--- a/plantilla-base-neo-talents.pptx
+++ b/plantilla-base-neo-talents.pptx
@@ -2,65 +2,66 @@
 <file path=ppt/presentation.xml><?xml version="1.0" encoding="utf-8"?>
 <p:presentation xmlns:a="http://schemas.openxmlformats.org/drawingml/2006/main" xmlns:r="http://schemas.openxmlformats.org/officeDocument/2006/relationships" xmlns:mc="http://schemas.openxmlformats.org/markup-compatibility/2006" xmlns:mv="urn:schemas-microsoft-com:mac:vml" xmlns:p="http://schemas.openxmlformats.org/presentationml/2006/main" xmlns:c="http://schemas.openxmlformats.org/drawingml/2006/chart" xmlns:dgm="http://schemas.openxmlformats.org/drawingml/2006/diagram" xmlns:o="urn:schemas-microsoft-com:office:office" xmlns:v="urn:schemas-microsoft-com:vml" xmlns:pvml="urn:schemas-microsoft-com:office:powerpoint" xmlns:com="http://schemas.openxmlformats.org/drawingml/2006/compatibility" xmlns:p14="http://schemas.microsoft.com/office/powerpoint/2010/main" xmlns:p15="http://schemas.microsoft.com/office/powerpoint/2012/main" xmlns:ahyp="http://schemas.microsoft.com/office/drawing/2018/hyperlinkcolor" autoCompressPictures="0" embedTrueTypeFonts="1" strictFirstAndLastChars="0" saveSubsetFonts="1">
   <p:sldMasterIdLst>
-    <p:sldMasterId id="2147483660" r:id="rId4"/>
+    <p:sldMasterId id="2147483661" r:id="rId4"/>
+    <p:sldMasterId id="2147483662" r:id="rId5"/>
   </p:sldMasterIdLst>
   <p:notesMasterIdLst>
-    <p:notesMasterId r:id="rId5"/>
+    <p:notesMasterId r:id="rId6"/>
   </p:notesMasterIdLst>
   <p:sldIdLst>
-    <p:sldId id="256" r:id="rId6"/>
-    <p:sldId id="257" r:id="rId7"/>
-    <p:sldId id="258" r:id="rId8"/>
-    <p:sldId id="259" r:id="rId9"/>
-    <p:sldId id="260" r:id="rId10"/>
-    <p:sldId id="261" r:id="rId11"/>
-    <p:sldId id="262" r:id="rId12"/>
-    <p:sldId id="263" r:id="rId13"/>
-    <p:sldId id="264" r:id="rId14"/>
-    <p:sldId id="265" r:id="rId15"/>
-    <p:sldId id="266" r:id="rId16"/>
-    <p:sldId id="267" r:id="rId17"/>
-    <p:sldId id="268" r:id="rId18"/>
-    <p:sldId id="269" r:id="rId19"/>
-    <p:sldId id="270" r:id="rId20"/>
-    <p:sldId id="271" r:id="rId21"/>
-    <p:sldId id="272" r:id="rId22"/>
-    <p:sldId id="273" r:id="rId23"/>
-    <p:sldId id="274" r:id="rId24"/>
+    <p:sldId id="256" r:id="rId7"/>
+    <p:sldId id="257" r:id="rId8"/>
+    <p:sldId id="258" r:id="rId9"/>
+    <p:sldId id="259" r:id="rId10"/>
+    <p:sldId id="260" r:id="rId11"/>
+    <p:sldId id="261" r:id="rId12"/>
+    <p:sldId id="262" r:id="rId13"/>
+    <p:sldId id="263" r:id="rId14"/>
+    <p:sldId id="264" r:id="rId15"/>
+    <p:sldId id="265" r:id="rId16"/>
+    <p:sldId id="266" r:id="rId17"/>
+    <p:sldId id="267" r:id="rId18"/>
+    <p:sldId id="268" r:id="rId19"/>
+    <p:sldId id="269" r:id="rId20"/>
+    <p:sldId id="270" r:id="rId21"/>
+    <p:sldId id="271" r:id="rId22"/>
+    <p:sldId id="272" r:id="rId23"/>
+    <p:sldId id="273" r:id="rId24"/>
+    <p:sldId id="274" r:id="rId25"/>
   </p:sldIdLst>
   <p:sldSz cy="5143500" cx="9144000"/>
   <p:notesSz cx="5143500" cy="9144000"/>
   <p:embeddedFontLst>
     <p:embeddedFont>
       <p:font typeface="Montserrat SemiBold"/>
-      <p:regular r:id="rId25"/>
-      <p:bold r:id="rId26"/>
-      <p:italic r:id="rId27"/>
-      <p:boldItalic r:id="rId28"/>
+      <p:regular r:id="rId26"/>
+      <p:bold r:id="rId27"/>
+      <p:italic r:id="rId28"/>
+      <p:boldItalic r:id="rId29"/>
     </p:embeddedFont>
     <p:embeddedFont>
       <p:font typeface="Montserrat"/>
-      <p:regular r:id="rId29"/>
-      <p:bold r:id="rId30"/>
-      <p:italic r:id="rId31"/>
-      <p:boldItalic r:id="rId32"/>
+      <p:regular r:id="rId30"/>
+      <p:bold r:id="rId31"/>
+      <p:italic r:id="rId32"/>
+      <p:boldItalic r:id="rId33"/>
     </p:embeddedFont>
     <p:embeddedFont>
       <p:font typeface="Montserrat Black"/>
-      <p:bold r:id="rId33"/>
-      <p:boldItalic r:id="rId34"/>
+      <p:bold r:id="rId34"/>
+      <p:boldItalic r:id="rId35"/>
     </p:embeddedFont>
     <p:embeddedFont>
       <p:font typeface="Montserrat Medium"/>
-      <p:regular r:id="rId35"/>
-      <p:bold r:id="rId36"/>
-      <p:italic r:id="rId37"/>
-      <p:boldItalic r:id="rId38"/>
+      <p:regular r:id="rId36"/>
+      <p:bold r:id="rId37"/>
+      <p:italic r:id="rId38"/>
+      <p:boldItalic r:id="rId39"/>
     </p:embeddedFont>
     <p:embeddedFont>
       <p:font typeface="Montserrat ExtraBold"/>
-      <p:bold r:id="rId39"/>
-      <p:boldItalic r:id="rId40"/>
+      <p:bold r:id="rId40"/>
+      <p:boldItalic r:id="rId41"/>
     </p:embeddedFont>
   </p:embeddedFontLst>
   <p:defaultTextStyle>
@@ -1728,7 +1729,7 @@
   <p:cSld>
     <p:spTree>
       <p:nvGrpSpPr>
-        <p:cNvPr id="57" name="Shape 57"/>
+        <p:cNvPr id="61" name="Shape 61"/>
         <p:cNvGrpSpPr/>
         <p:nvPr/>
       </p:nvGrpSpPr>
@@ -1742,7 +1743,7 @@
       </p:grpSpPr>
       <p:sp>
         <p:nvSpPr>
-          <p:cNvPr id="58" name="Google Shape;58;p1:notes"/>
+          <p:cNvPr id="62" name="Google Shape;62;p1:notes"/>
           <p:cNvSpPr/>
           <p:nvPr>
             <p:ph idx="2" type="sldImg"/>
@@ -1787,7 +1788,7 @@
       </p:sp>
       <p:sp>
         <p:nvSpPr>
-          <p:cNvPr id="59" name="Google Shape;59;p1:notes"/>
+          <p:cNvPr id="63" name="Google Shape;63;p1:notes"/>
           <p:cNvSpPr txBox="1"/>
           <p:nvPr>
             <p:ph idx="1" type="body"/>
@@ -1835,7 +1836,7 @@
       </p:sp>
       <p:sp>
         <p:nvSpPr>
-          <p:cNvPr id="60" name="Google Shape;60;p1:notes"/>
+          <p:cNvPr id="64" name="Google Shape;64;p1:notes"/>
           <p:cNvSpPr txBox="1"/>
           <p:nvPr>
             <p:ph idx="12" type="sldNum"/>
@@ -1894,7 +1895,7 @@
   <p:cSld>
     <p:spTree>
       <p:nvGrpSpPr>
-        <p:cNvPr id="192" name="Shape 192"/>
+        <p:cNvPr id="196" name="Shape 196"/>
         <p:cNvGrpSpPr/>
         <p:nvPr/>
       </p:nvGrpSpPr>
@@ -1908,46 +1909,7 @@
       </p:grpSpPr>
       <p:sp>
         <p:nvSpPr>
-          <p:cNvPr id="193" name="Google Shape;193;p10:notes"/>
-          <p:cNvSpPr txBox="1"/>
-          <p:nvPr>
-            <p:ph idx="1" type="body"/>
-          </p:nvPr>
-        </p:nvSpPr>
-        <p:spPr>
-          <a:xfrm>
-            <a:off x="685800" y="4400550"/>
-            <a:ext cx="5486400" cy="3600450"/>
-          </a:xfrm>
-          <a:prstGeom prst="rect">
-            <a:avLst/>
-          </a:prstGeom>
-        </p:spPr>
-        <p:txBody>
-          <a:bodyPr anchorCtr="0" anchor="t" bIns="45700" lIns="91425" spcFirstLastPara="1" rIns="91425" wrap="square" tIns="45700">
-            <a:noAutofit/>
-          </a:bodyPr>
-          <a:lstStyle/>
-          <a:p>
-            <a:pPr indent="0" lvl="0" marL="0" rtl="0" algn="l">
-              <a:spcBef>
-                <a:spcPts val="0"/>
-              </a:spcBef>
-              <a:spcAft>
-                <a:spcPts val="0"/>
-              </a:spcAft>
-              <a:buNone/>
-            </a:pPr>
-            <a:r>
-              <a:t/>
-            </a:r>
-            <a:endParaRPr/>
-          </a:p>
-        </p:txBody>
-      </p:sp>
-      <p:sp>
-        <p:nvSpPr>
-          <p:cNvPr id="194" name="Google Shape;194;p10:notes"/>
+          <p:cNvPr id="197" name="Google Shape;197;h190e4cfdee9e8be5_1_210:notes"/>
           <p:cNvSpPr/>
           <p:nvPr>
             <p:ph idx="2" type="sldImg"/>
@@ -1955,68 +1917,8 @@
         </p:nvSpPr>
         <p:spPr>
           <a:xfrm>
-            <a:off x="685800" y="1143000"/>
-            <a:ext cx="5486400" cy="3086100"/>
-          </a:xfrm>
-          <a:custGeom>
-            <a:rect b="b" l="l" r="r" t="t"/>
-            <a:pathLst>
-              <a:path extrusionOk="0" h="120000" w="120000">
-                <a:moveTo>
-                  <a:pt x="0" y="0"/>
-                </a:moveTo>
-                <a:lnTo>
-                  <a:pt x="120000" y="0"/>
-                </a:lnTo>
-                <a:lnTo>
-                  <a:pt x="120000" y="120000"/>
-                </a:lnTo>
-                <a:lnTo>
-                  <a:pt x="0" y="120000"/>
-                </a:lnTo>
-                <a:close/>
-              </a:path>
-            </a:pathLst>
-          </a:custGeom>
-        </p:spPr>
-      </p:sp>
-    </p:spTree>
-  </p:cSld>
-  <p:clrMapOvr>
-    <a:masterClrMapping/>
-  </p:clrMapOvr>
-</p:notes>
-</file>
-
-<file path=ppt/notesSlides/notesSlide11.xml><?xml version="1.0" encoding="utf-8"?>
-<p:notes xmlns:a="http://schemas.openxmlformats.org/drawingml/2006/main" xmlns:r="http://schemas.openxmlformats.org/officeDocument/2006/relationships" xmlns:mc="http://schemas.openxmlformats.org/markup-compatibility/2006" xmlns:mv="urn:schemas-microsoft-com:mac:vml" xmlns:p="http://schemas.openxmlformats.org/presentationml/2006/main" xmlns:c="http://schemas.openxmlformats.org/drawingml/2006/chart" xmlns:dgm="http://schemas.openxmlformats.org/drawingml/2006/diagram" xmlns:o="urn:schemas-microsoft-com:office:office" xmlns:v="urn:schemas-microsoft-com:vml" xmlns:pvml="urn:schemas-microsoft-com:office:powerpoint" xmlns:com="http://schemas.openxmlformats.org/drawingml/2006/compatibility" xmlns:p14="http://schemas.microsoft.com/office/powerpoint/2010/main" xmlns:p15="http://schemas.microsoft.com/office/powerpoint/2012/main" xmlns:ahyp="http://schemas.microsoft.com/office/drawing/2018/hyperlinkcolor" showMasterPhAnim="0" showMasterSp="0">
-  <p:cSld>
-    <p:spTree>
-      <p:nvGrpSpPr>
-        <p:cNvPr id="214" name="Shape 214"/>
-        <p:cNvGrpSpPr/>
-        <p:nvPr/>
-      </p:nvGrpSpPr>
-      <p:grpSpPr>
-        <a:xfrm>
-          <a:off x="0" y="0"/>
-          <a:ext cx="0" cy="0"/>
-          <a:chOff x="0" y="0"/>
-          <a:chExt cx="0" cy="0"/>
-        </a:xfrm>
-      </p:grpSpPr>
-      <p:sp>
-        <p:nvSpPr>
-          <p:cNvPr id="215" name="Google Shape;215;p11:notes"/>
-          <p:cNvSpPr/>
-          <p:nvPr>
-            <p:ph idx="2" type="sldImg"/>
-          </p:nvPr>
-        </p:nvSpPr>
-        <p:spPr>
-          <a:xfrm>
-            <a:off x="342900" y="571500"/>
-            <a:ext cx="2743200" cy="1543200"/>
+            <a:off x="285975" y="685800"/>
+            <a:ext cx="4572000" cy="3429000"/>
           </a:xfrm>
           <a:custGeom>
             <a:rect b="b" l="l" r="r" t="t"/>
@@ -2052,7 +1954,7 @@
       </p:sp>
       <p:sp>
         <p:nvSpPr>
-          <p:cNvPr id="216" name="Google Shape;216;p11:notes"/>
+          <p:cNvPr id="198" name="Google Shape;198;h190e4cfdee9e8be5_1_210:notes"/>
           <p:cNvSpPr txBox="1"/>
           <p:nvPr>
             <p:ph idx="1" type="body"/>
@@ -2060,8 +1962,8 @@
         </p:nvSpPr>
         <p:spPr>
           <a:xfrm>
-            <a:off x="342900" y="2200275"/>
-            <a:ext cx="2743200" cy="1800300"/>
+            <a:off x="514350" y="4343400"/>
+            <a:ext cx="4114800" cy="4114800"/>
           </a:xfrm>
           <a:prstGeom prst="rect">
             <a:avLst/>
@@ -2072,7 +1974,7 @@
           </a:ln>
         </p:spPr>
         <p:txBody>
-          <a:bodyPr anchorCtr="0" anchor="t" bIns="27925" lIns="55875" spcFirstLastPara="1" rIns="55875" wrap="square" tIns="27925">
+          <a:bodyPr anchorCtr="0" anchor="t" bIns="45700" lIns="91425" spcFirstLastPara="1" rIns="91425" wrap="square" tIns="45700">
             <a:noAutofit/>
           </a:bodyPr>
           <a:lstStyle/>
@@ -2093,55 +1995,7 @@
             <a:r>
               <a:t/>
             </a:r>
-            <a:endParaRPr sz="900"/>
-          </a:p>
-        </p:txBody>
-      </p:sp>
-      <p:sp>
-        <p:nvSpPr>
-          <p:cNvPr id="217" name="Google Shape;217;p11:notes"/>
-          <p:cNvSpPr txBox="1"/>
-          <p:nvPr>
-            <p:ph idx="12" type="sldNum"/>
-          </p:nvPr>
-        </p:nvSpPr>
-        <p:spPr>
-          <a:xfrm>
-            <a:off x="1942306" y="4342607"/>
-            <a:ext cx="1485900" cy="229500"/>
-          </a:xfrm>
-          <a:prstGeom prst="rect">
-            <a:avLst/>
-          </a:prstGeom>
-          <a:noFill/>
-          <a:ln>
-            <a:noFill/>
-          </a:ln>
-        </p:spPr>
-        <p:txBody>
-          <a:bodyPr anchorCtr="0" anchor="b" bIns="27925" lIns="55875" spcFirstLastPara="1" rIns="55875" wrap="square" tIns="27925">
-            <a:noAutofit/>
-          </a:bodyPr>
-          <a:lstStyle/>
-          <a:p>
-            <a:pPr indent="0" lvl="0" marL="0" rtl="0" algn="r">
-              <a:lnSpc>
-                <a:spcPct val="100000"/>
-              </a:lnSpc>
-              <a:spcBef>
-                <a:spcPts val="0"/>
-              </a:spcBef>
-              <a:spcAft>
-                <a:spcPts val="0"/>
-              </a:spcAft>
-              <a:buSzPts val="900"/>
-              <a:buNone/>
-            </a:pPr>
-            <a:fld id="{00000000-1234-1234-1234-123412341234}" type="slidenum">
-              <a:rPr lang="en-US" sz="900"/>
-              <a:t>‹#›</a:t>
-            </a:fld>
-            <a:endParaRPr sz="900"/>
+            <a:endParaRPr/>
           </a:p>
         </p:txBody>
       </p:sp>
@@ -2153,12 +2007,12 @@
 </p:notes>
 </file>
 
-<file path=ppt/notesSlides/notesSlide12.xml><?xml version="1.0" encoding="utf-8"?>
+<file path=ppt/notesSlides/notesSlide11.xml><?xml version="1.0" encoding="utf-8"?>
 <p:notes xmlns:a="http://schemas.openxmlformats.org/drawingml/2006/main" xmlns:r="http://schemas.openxmlformats.org/officeDocument/2006/relationships" xmlns:mc="http://schemas.openxmlformats.org/markup-compatibility/2006" xmlns:mv="urn:schemas-microsoft-com:mac:vml" xmlns:p="http://schemas.openxmlformats.org/presentationml/2006/main" xmlns:c="http://schemas.openxmlformats.org/drawingml/2006/chart" xmlns:dgm="http://schemas.openxmlformats.org/drawingml/2006/diagram" xmlns:o="urn:schemas-microsoft-com:office:office" xmlns:v="urn:schemas-microsoft-com:vml" xmlns:pvml="urn:schemas-microsoft-com:office:powerpoint" xmlns:com="http://schemas.openxmlformats.org/drawingml/2006/compatibility" xmlns:p14="http://schemas.microsoft.com/office/powerpoint/2010/main" xmlns:p15="http://schemas.microsoft.com/office/powerpoint/2012/main" xmlns:ahyp="http://schemas.microsoft.com/office/drawing/2018/hyperlinkcolor" showMasterPhAnim="0" showMasterSp="0">
   <p:cSld>
     <p:spTree>
       <p:nvGrpSpPr>
-        <p:cNvPr id="224" name="Shape 224"/>
+        <p:cNvPr id="218" name="Shape 218"/>
         <p:cNvGrpSpPr/>
         <p:nvPr/>
       </p:nvGrpSpPr>
@@ -2172,7 +2026,7 @@
       </p:grpSpPr>
       <p:sp>
         <p:nvSpPr>
-          <p:cNvPr id="225" name="Google Shape;225;h3c06cb87bc4eaa0a_0_27:notes"/>
+          <p:cNvPr id="219" name="Google Shape;219;p11:notes"/>
           <p:cNvSpPr/>
           <p:nvPr>
             <p:ph idx="2" type="sldImg"/>
@@ -2217,7 +2071,7 @@
       </p:sp>
       <p:sp>
         <p:nvSpPr>
-          <p:cNvPr id="226" name="Google Shape;226;h3c06cb87bc4eaa0a_0_27:notes"/>
+          <p:cNvPr id="220" name="Google Shape;220;p11:notes"/>
           <p:cNvSpPr txBox="1"/>
           <p:nvPr>
             <p:ph idx="1" type="body"/>
@@ -2264,7 +2118,7 @@
       </p:sp>
       <p:sp>
         <p:nvSpPr>
-          <p:cNvPr id="227" name="Google Shape;227;h3c06cb87bc4eaa0a_0_27:notes"/>
+          <p:cNvPr id="221" name="Google Shape;221;p11:notes"/>
           <p:cNvSpPr txBox="1"/>
           <p:nvPr>
             <p:ph idx="12" type="sldNum"/>
@@ -2318,12 +2172,12 @@
 </p:notes>
 </file>
 
-<file path=ppt/notesSlides/notesSlide13.xml><?xml version="1.0" encoding="utf-8"?>
+<file path=ppt/notesSlides/notesSlide12.xml><?xml version="1.0" encoding="utf-8"?>
 <p:notes xmlns:a="http://schemas.openxmlformats.org/drawingml/2006/main" xmlns:r="http://schemas.openxmlformats.org/officeDocument/2006/relationships" xmlns:mc="http://schemas.openxmlformats.org/markup-compatibility/2006" xmlns:mv="urn:schemas-microsoft-com:mac:vml" xmlns:p="http://schemas.openxmlformats.org/presentationml/2006/main" xmlns:c="http://schemas.openxmlformats.org/drawingml/2006/chart" xmlns:dgm="http://schemas.openxmlformats.org/drawingml/2006/diagram" xmlns:o="urn:schemas-microsoft-com:office:office" xmlns:v="urn:schemas-microsoft-com:vml" xmlns:pvml="urn:schemas-microsoft-com:office:powerpoint" xmlns:com="http://schemas.openxmlformats.org/drawingml/2006/compatibility" xmlns:p14="http://schemas.microsoft.com/office/powerpoint/2010/main" xmlns:p15="http://schemas.microsoft.com/office/powerpoint/2012/main" xmlns:ahyp="http://schemas.microsoft.com/office/drawing/2018/hyperlinkcolor" showMasterPhAnim="0" showMasterSp="0">
   <p:cSld>
     <p:spTree>
       <p:nvGrpSpPr>
-        <p:cNvPr id="236" name="Shape 236"/>
+        <p:cNvPr id="228" name="Shape 228"/>
         <p:cNvGrpSpPr/>
         <p:nvPr/>
       </p:nvGrpSpPr>
@@ -2337,7 +2191,7 @@
       </p:grpSpPr>
       <p:sp>
         <p:nvSpPr>
-          <p:cNvPr id="237" name="Google Shape;237;h3c06cb87bc4eaa0a_0_12:notes"/>
+          <p:cNvPr id="229" name="Google Shape;229;h3c06cb87bc4eaa0a_0_27:notes"/>
           <p:cNvSpPr/>
           <p:nvPr>
             <p:ph idx="2" type="sldImg"/>
@@ -2345,8 +2199,8 @@
         </p:nvSpPr>
         <p:spPr>
           <a:xfrm>
-            <a:off x="685800" y="1143000"/>
-            <a:ext cx="5486400" cy="3086100"/>
+            <a:off x="342900" y="571500"/>
+            <a:ext cx="2743200" cy="1543200"/>
           </a:xfrm>
           <a:custGeom>
             <a:rect b="b" l="l" r="r" t="t"/>
@@ -2382,7 +2236,7 @@
       </p:sp>
       <p:sp>
         <p:nvSpPr>
-          <p:cNvPr id="238" name="Google Shape;238;h3c06cb87bc4eaa0a_0_12:notes"/>
+          <p:cNvPr id="230" name="Google Shape;230;h3c06cb87bc4eaa0a_0_27:notes"/>
           <p:cNvSpPr txBox="1"/>
           <p:nvPr>
             <p:ph idx="1" type="body"/>
@@ -2390,8 +2244,8 @@
         </p:nvSpPr>
         <p:spPr>
           <a:xfrm>
-            <a:off x="685800" y="4400550"/>
-            <a:ext cx="5486400" cy="3600600"/>
+            <a:off x="342900" y="2200275"/>
+            <a:ext cx="2743200" cy="1800300"/>
           </a:xfrm>
           <a:prstGeom prst="rect">
             <a:avLst/>
@@ -2402,30 +2256,34 @@
           </a:ln>
         </p:spPr>
         <p:txBody>
-          <a:bodyPr anchorCtr="0" anchor="t" bIns="45700" lIns="91425" spcFirstLastPara="1" rIns="91425" wrap="square" tIns="45700">
+          <a:bodyPr anchorCtr="0" anchor="t" bIns="27925" lIns="55875" spcFirstLastPara="1" rIns="55875" wrap="square" tIns="27925">
             <a:noAutofit/>
           </a:bodyPr>
           <a:lstStyle/>
           <a:p>
             <a:pPr indent="0" lvl="0" marL="0" rtl="0" algn="l">
-              <a:spcBef>
-                <a:spcPts val="0"/>
-              </a:spcBef>
-              <a:spcAft>
-                <a:spcPts val="0"/>
-              </a:spcAft>
+              <a:lnSpc>
+                <a:spcPct val="100000"/>
+              </a:lnSpc>
+              <a:spcBef>
+                <a:spcPts val="0"/>
+              </a:spcBef>
+              <a:spcAft>
+                <a:spcPts val="0"/>
+              </a:spcAft>
+              <a:buSzPts val="1400"/>
               <a:buNone/>
             </a:pPr>
             <a:r>
               <a:t/>
             </a:r>
-            <a:endParaRPr/>
+            <a:endParaRPr sz="900"/>
           </a:p>
         </p:txBody>
       </p:sp>
       <p:sp>
         <p:nvSpPr>
-          <p:cNvPr id="239" name="Google Shape;239;h3c06cb87bc4eaa0a_0_12:notes"/>
+          <p:cNvPr id="231" name="Google Shape;231;h3c06cb87bc4eaa0a_0_27:notes"/>
           <p:cNvSpPr txBox="1"/>
           <p:nvPr>
             <p:ph idx="12" type="sldNum"/>
@@ -2433,8 +2291,8 @@
         </p:nvSpPr>
         <p:spPr>
           <a:xfrm>
-            <a:off x="3884613" y="8685213"/>
-            <a:ext cx="2971800" cy="458700"/>
+            <a:off x="1942306" y="4342607"/>
+            <a:ext cx="1485900" cy="229500"/>
           </a:xfrm>
           <a:prstGeom prst="rect">
             <a:avLst/>
@@ -2445,25 +2303,29 @@
           </a:ln>
         </p:spPr>
         <p:txBody>
-          <a:bodyPr anchorCtr="0" anchor="b" bIns="45700" lIns="91425" spcFirstLastPara="1" rIns="91425" wrap="square" tIns="45700">
+          <a:bodyPr anchorCtr="0" anchor="b" bIns="27925" lIns="55875" spcFirstLastPara="1" rIns="55875" wrap="square" tIns="27925">
             <a:noAutofit/>
           </a:bodyPr>
           <a:lstStyle/>
           <a:p>
             <a:pPr indent="0" lvl="0" marL="0" rtl="0" algn="r">
-              <a:spcBef>
-                <a:spcPts val="0"/>
-              </a:spcBef>
-              <a:spcAft>
-                <a:spcPts val="0"/>
-              </a:spcAft>
+              <a:lnSpc>
+                <a:spcPct val="100000"/>
+              </a:lnSpc>
+              <a:spcBef>
+                <a:spcPts val="0"/>
+              </a:spcBef>
+              <a:spcAft>
+                <a:spcPts val="0"/>
+              </a:spcAft>
+              <a:buSzPts val="900"/>
               <a:buNone/>
             </a:pPr>
             <a:fld id="{00000000-1234-1234-1234-123412341234}" type="slidenum">
-              <a:rPr lang="en-US"/>
+              <a:rPr lang="en-US" sz="900"/>
               <a:t>‹#›</a:t>
             </a:fld>
-            <a:endParaRPr/>
+            <a:endParaRPr sz="900"/>
           </a:p>
         </p:txBody>
       </p:sp>
@@ -2475,12 +2337,12 @@
 </p:notes>
 </file>
 
-<file path=ppt/notesSlides/notesSlide14.xml><?xml version="1.0" encoding="utf-8"?>
+<file path=ppt/notesSlides/notesSlide13.xml><?xml version="1.0" encoding="utf-8"?>
 <p:notes xmlns:a="http://schemas.openxmlformats.org/drawingml/2006/main" xmlns:r="http://schemas.openxmlformats.org/officeDocument/2006/relationships" xmlns:mc="http://schemas.openxmlformats.org/markup-compatibility/2006" xmlns:mv="urn:schemas-microsoft-com:mac:vml" xmlns:p="http://schemas.openxmlformats.org/presentationml/2006/main" xmlns:c="http://schemas.openxmlformats.org/drawingml/2006/chart" xmlns:dgm="http://schemas.openxmlformats.org/drawingml/2006/diagram" xmlns:o="urn:schemas-microsoft-com:office:office" xmlns:v="urn:schemas-microsoft-com:vml" xmlns:pvml="urn:schemas-microsoft-com:office:powerpoint" xmlns:com="http://schemas.openxmlformats.org/drawingml/2006/compatibility" xmlns:p14="http://schemas.microsoft.com/office/powerpoint/2010/main" xmlns:p15="http://schemas.microsoft.com/office/powerpoint/2012/main" xmlns:ahyp="http://schemas.microsoft.com/office/drawing/2018/hyperlinkcolor" showMasterPhAnim="0" showMasterSp="0">
   <p:cSld>
     <p:spTree>
       <p:nvGrpSpPr>
-        <p:cNvPr id="247" name="Shape 247"/>
+        <p:cNvPr id="240" name="Shape 240"/>
         <p:cNvGrpSpPr/>
         <p:nvPr/>
       </p:nvGrpSpPr>
@@ -2494,7 +2356,7 @@
       </p:grpSpPr>
       <p:sp>
         <p:nvSpPr>
-          <p:cNvPr id="248" name="Google Shape;248;p19:notes"/>
+          <p:cNvPr id="241" name="Google Shape;241;h3c06cb87bc4eaa0a_0_12:notes"/>
           <p:cNvSpPr/>
           <p:nvPr>
             <p:ph idx="2" type="sldImg"/>
@@ -2539,7 +2401,7 @@
       </p:sp>
       <p:sp>
         <p:nvSpPr>
-          <p:cNvPr id="249" name="Google Shape;249;p19:notes"/>
+          <p:cNvPr id="242" name="Google Shape;242;h3c06cb87bc4eaa0a_0_12:notes"/>
           <p:cNvSpPr txBox="1"/>
           <p:nvPr>
             <p:ph idx="1" type="body"/>
@@ -2565,16 +2427,12 @@
           <a:lstStyle/>
           <a:p>
             <a:pPr indent="0" lvl="0" marL="0" rtl="0" algn="l">
-              <a:lnSpc>
-                <a:spcPct val="100000"/>
-              </a:lnSpc>
-              <a:spcBef>
-                <a:spcPts val="0"/>
-              </a:spcBef>
-              <a:spcAft>
-                <a:spcPts val="0"/>
-              </a:spcAft>
-              <a:buSzPts val="1400"/>
+              <a:spcBef>
+                <a:spcPts val="0"/>
+              </a:spcBef>
+              <a:spcAft>
+                <a:spcPts val="0"/>
+              </a:spcAft>
               <a:buNone/>
             </a:pPr>
             <a:r>
@@ -2586,7 +2444,7 @@
       </p:sp>
       <p:sp>
         <p:nvSpPr>
-          <p:cNvPr id="250" name="Google Shape;250;p19:notes"/>
+          <p:cNvPr id="243" name="Google Shape;243;h3c06cb87bc4eaa0a_0_12:notes"/>
           <p:cNvSpPr txBox="1"/>
           <p:nvPr>
             <p:ph idx="12" type="sldNum"/>
@@ -2612,16 +2470,12 @@
           <a:lstStyle/>
           <a:p>
             <a:pPr indent="0" lvl="0" marL="0" rtl="0" algn="r">
-              <a:lnSpc>
-                <a:spcPct val="100000"/>
-              </a:lnSpc>
-              <a:spcBef>
-                <a:spcPts val="0"/>
-              </a:spcBef>
-              <a:spcAft>
-                <a:spcPts val="0"/>
-              </a:spcAft>
-              <a:buSzPts val="1400"/>
+              <a:spcBef>
+                <a:spcPts val="0"/>
+              </a:spcBef>
+              <a:spcAft>
+                <a:spcPts val="0"/>
+              </a:spcAft>
               <a:buNone/>
             </a:pPr>
             <a:fld id="{00000000-1234-1234-1234-123412341234}" type="slidenum">
@@ -2640,12 +2494,12 @@
 </p:notes>
 </file>
 
-<file path=ppt/notesSlides/notesSlide15.xml><?xml version="1.0" encoding="utf-8"?>
+<file path=ppt/notesSlides/notesSlide14.xml><?xml version="1.0" encoding="utf-8"?>
 <p:notes xmlns:a="http://schemas.openxmlformats.org/drawingml/2006/main" xmlns:r="http://schemas.openxmlformats.org/officeDocument/2006/relationships" xmlns:mc="http://schemas.openxmlformats.org/markup-compatibility/2006" xmlns:mv="urn:schemas-microsoft-com:mac:vml" xmlns:p="http://schemas.openxmlformats.org/presentationml/2006/main" xmlns:c="http://schemas.openxmlformats.org/drawingml/2006/chart" xmlns:dgm="http://schemas.openxmlformats.org/drawingml/2006/diagram" xmlns:o="urn:schemas-microsoft-com:office:office" xmlns:v="urn:schemas-microsoft-com:vml" xmlns:pvml="urn:schemas-microsoft-com:office:powerpoint" xmlns:com="http://schemas.openxmlformats.org/drawingml/2006/compatibility" xmlns:p14="http://schemas.microsoft.com/office/powerpoint/2010/main" xmlns:p15="http://schemas.microsoft.com/office/powerpoint/2012/main" xmlns:ahyp="http://schemas.microsoft.com/office/drawing/2018/hyperlinkcolor" showMasterPhAnim="0" showMasterSp="0">
   <p:cSld>
     <p:spTree>
       <p:nvGrpSpPr>
-        <p:cNvPr id="258" name="Shape 258"/>
+        <p:cNvPr id="251" name="Shape 251"/>
         <p:cNvGrpSpPr/>
         <p:nvPr/>
       </p:nvGrpSpPr>
@@ -2659,7 +2513,7 @@
       </p:grpSpPr>
       <p:sp>
         <p:nvSpPr>
-          <p:cNvPr id="259" name="Google Shape;259;p20:notes"/>
+          <p:cNvPr id="252" name="Google Shape;252;p19:notes"/>
           <p:cNvSpPr/>
           <p:nvPr>
             <p:ph idx="2" type="sldImg"/>
@@ -2667,8 +2521,8 @@
         </p:nvSpPr>
         <p:spPr>
           <a:xfrm>
-            <a:off x="285975" y="685800"/>
-            <a:ext cx="4572000" cy="3429000"/>
+            <a:off x="685800" y="1143000"/>
+            <a:ext cx="5486400" cy="3086100"/>
           </a:xfrm>
           <a:custGeom>
             <a:rect b="b" l="l" r="r" t="t"/>
@@ -2704,7 +2558,7 @@
       </p:sp>
       <p:sp>
         <p:nvSpPr>
-          <p:cNvPr id="260" name="Google Shape;260;p20:notes"/>
+          <p:cNvPr id="253" name="Google Shape;253;p19:notes"/>
           <p:cNvSpPr txBox="1"/>
           <p:nvPr>
             <p:ph idx="1" type="body"/>
@@ -2712,8 +2566,8 @@
         </p:nvSpPr>
         <p:spPr>
           <a:xfrm>
-            <a:off x="514350" y="4343400"/>
-            <a:ext cx="4114800" cy="4114800"/>
+            <a:off x="685800" y="4400550"/>
+            <a:ext cx="5486400" cy="3600600"/>
           </a:xfrm>
           <a:prstGeom prst="rect">
             <a:avLst/>
@@ -2745,6 +2599,54 @@
             <a:r>
               <a:t/>
             </a:r>
+            <a:endParaRPr/>
+          </a:p>
+        </p:txBody>
+      </p:sp>
+      <p:sp>
+        <p:nvSpPr>
+          <p:cNvPr id="254" name="Google Shape;254;p19:notes"/>
+          <p:cNvSpPr txBox="1"/>
+          <p:nvPr>
+            <p:ph idx="12" type="sldNum"/>
+          </p:nvPr>
+        </p:nvSpPr>
+        <p:spPr>
+          <a:xfrm>
+            <a:off x="3884613" y="8685213"/>
+            <a:ext cx="2971800" cy="458700"/>
+          </a:xfrm>
+          <a:prstGeom prst="rect">
+            <a:avLst/>
+          </a:prstGeom>
+          <a:noFill/>
+          <a:ln>
+            <a:noFill/>
+          </a:ln>
+        </p:spPr>
+        <p:txBody>
+          <a:bodyPr anchorCtr="0" anchor="b" bIns="45700" lIns="91425" spcFirstLastPara="1" rIns="91425" wrap="square" tIns="45700">
+            <a:noAutofit/>
+          </a:bodyPr>
+          <a:lstStyle/>
+          <a:p>
+            <a:pPr indent="0" lvl="0" marL="0" rtl="0" algn="r">
+              <a:lnSpc>
+                <a:spcPct val="100000"/>
+              </a:lnSpc>
+              <a:spcBef>
+                <a:spcPts val="0"/>
+              </a:spcBef>
+              <a:spcAft>
+                <a:spcPts val="0"/>
+              </a:spcAft>
+              <a:buSzPts val="1400"/>
+              <a:buNone/>
+            </a:pPr>
+            <a:fld id="{00000000-1234-1234-1234-123412341234}" type="slidenum">
+              <a:rPr lang="en-US"/>
+              <a:t>‹#›</a:t>
+            </a:fld>
             <a:endParaRPr/>
           </a:p>
         </p:txBody>
@@ -2757,12 +2659,12 @@
 </p:notes>
 </file>
 
-<file path=ppt/notesSlides/notesSlide16.xml><?xml version="1.0" encoding="utf-8"?>
+<file path=ppt/notesSlides/notesSlide15.xml><?xml version="1.0" encoding="utf-8"?>
 <p:notes xmlns:a="http://schemas.openxmlformats.org/drawingml/2006/main" xmlns:r="http://schemas.openxmlformats.org/officeDocument/2006/relationships" xmlns:mc="http://schemas.openxmlformats.org/markup-compatibility/2006" xmlns:mv="urn:schemas-microsoft-com:mac:vml" xmlns:p="http://schemas.openxmlformats.org/presentationml/2006/main" xmlns:c="http://schemas.openxmlformats.org/drawingml/2006/chart" xmlns:dgm="http://schemas.openxmlformats.org/drawingml/2006/diagram" xmlns:o="urn:schemas-microsoft-com:office:office" xmlns:v="urn:schemas-microsoft-com:vml" xmlns:pvml="urn:schemas-microsoft-com:office:powerpoint" xmlns:com="http://schemas.openxmlformats.org/drawingml/2006/compatibility" xmlns:p14="http://schemas.microsoft.com/office/powerpoint/2010/main" xmlns:p15="http://schemas.microsoft.com/office/powerpoint/2012/main" xmlns:ahyp="http://schemas.microsoft.com/office/drawing/2018/hyperlinkcolor" showMasterPhAnim="0" showMasterSp="0">
   <p:cSld>
     <p:spTree>
       <p:nvGrpSpPr>
-        <p:cNvPr id="269" name="Shape 269"/>
+        <p:cNvPr id="262" name="Shape 262"/>
         <p:cNvGrpSpPr/>
         <p:nvPr/>
       </p:nvGrpSpPr>
@@ -2776,7 +2678,7 @@
       </p:grpSpPr>
       <p:sp>
         <p:nvSpPr>
-          <p:cNvPr id="270" name="Google Shape;270;h3c06cb87bc4eaa0a_0_46:notes"/>
+          <p:cNvPr id="263" name="Google Shape;263;p20:notes"/>
           <p:cNvSpPr/>
           <p:nvPr>
             <p:ph idx="2" type="sldImg"/>
@@ -2784,8 +2686,8 @@
         </p:nvSpPr>
         <p:spPr>
           <a:xfrm>
-            <a:off x="342900" y="571500"/>
-            <a:ext cx="2743200" cy="1543200"/>
+            <a:off x="285975" y="685800"/>
+            <a:ext cx="4572000" cy="3429000"/>
           </a:xfrm>
           <a:custGeom>
             <a:rect b="b" l="l" r="r" t="t"/>
@@ -2821,7 +2723,7 @@
       </p:sp>
       <p:sp>
         <p:nvSpPr>
-          <p:cNvPr id="271" name="Google Shape;271;h3c06cb87bc4eaa0a_0_46:notes"/>
+          <p:cNvPr id="264" name="Google Shape;264;p20:notes"/>
           <p:cNvSpPr txBox="1"/>
           <p:nvPr>
             <p:ph idx="1" type="body"/>
@@ -2829,8 +2731,8 @@
         </p:nvSpPr>
         <p:spPr>
           <a:xfrm>
-            <a:off x="342900" y="2200275"/>
-            <a:ext cx="2743200" cy="1800300"/>
+            <a:off x="514350" y="4343400"/>
+            <a:ext cx="4114800" cy="4114800"/>
           </a:xfrm>
           <a:prstGeom prst="rect">
             <a:avLst/>
@@ -2841,7 +2743,7 @@
           </a:ln>
         </p:spPr>
         <p:txBody>
-          <a:bodyPr anchorCtr="0" anchor="t" bIns="27925" lIns="55875" spcFirstLastPara="1" rIns="55875" wrap="square" tIns="27925">
+          <a:bodyPr anchorCtr="0" anchor="t" bIns="45700" lIns="91425" spcFirstLastPara="1" rIns="91425" wrap="square" tIns="45700">
             <a:noAutofit/>
           </a:bodyPr>
           <a:lstStyle/>
@@ -2862,55 +2764,7 @@
             <a:r>
               <a:t/>
             </a:r>
-            <a:endParaRPr sz="900"/>
-          </a:p>
-        </p:txBody>
-      </p:sp>
-      <p:sp>
-        <p:nvSpPr>
-          <p:cNvPr id="272" name="Google Shape;272;h3c06cb87bc4eaa0a_0_46:notes"/>
-          <p:cNvSpPr txBox="1"/>
-          <p:nvPr>
-            <p:ph idx="12" type="sldNum"/>
-          </p:nvPr>
-        </p:nvSpPr>
-        <p:spPr>
-          <a:xfrm>
-            <a:off x="1942306" y="4342607"/>
-            <a:ext cx="1485900" cy="229500"/>
-          </a:xfrm>
-          <a:prstGeom prst="rect">
-            <a:avLst/>
-          </a:prstGeom>
-          <a:noFill/>
-          <a:ln>
-            <a:noFill/>
-          </a:ln>
-        </p:spPr>
-        <p:txBody>
-          <a:bodyPr anchorCtr="0" anchor="b" bIns="27925" lIns="55875" spcFirstLastPara="1" rIns="55875" wrap="square" tIns="27925">
-            <a:noAutofit/>
-          </a:bodyPr>
-          <a:lstStyle/>
-          <a:p>
-            <a:pPr indent="0" lvl="0" marL="0" rtl="0" algn="r">
-              <a:lnSpc>
-                <a:spcPct val="100000"/>
-              </a:lnSpc>
-              <a:spcBef>
-                <a:spcPts val="0"/>
-              </a:spcBef>
-              <a:spcAft>
-                <a:spcPts val="0"/>
-              </a:spcAft>
-              <a:buSzPts val="900"/>
-              <a:buNone/>
-            </a:pPr>
-            <a:fld id="{00000000-1234-1234-1234-123412341234}" type="slidenum">
-              <a:rPr lang="en-US" sz="900"/>
-              <a:t>‹#›</a:t>
-            </a:fld>
-            <a:endParaRPr sz="900"/>
+            <a:endParaRPr/>
           </a:p>
         </p:txBody>
       </p:sp>
@@ -2922,12 +2776,12 @@
 </p:notes>
 </file>
 
-<file path=ppt/notesSlides/notesSlide17.xml><?xml version="1.0" encoding="utf-8"?>
+<file path=ppt/notesSlides/notesSlide16.xml><?xml version="1.0" encoding="utf-8"?>
 <p:notes xmlns:a="http://schemas.openxmlformats.org/drawingml/2006/main" xmlns:r="http://schemas.openxmlformats.org/officeDocument/2006/relationships" xmlns:mc="http://schemas.openxmlformats.org/markup-compatibility/2006" xmlns:mv="urn:schemas-microsoft-com:mac:vml" xmlns:p="http://schemas.openxmlformats.org/presentationml/2006/main" xmlns:c="http://schemas.openxmlformats.org/drawingml/2006/chart" xmlns:dgm="http://schemas.openxmlformats.org/drawingml/2006/diagram" xmlns:o="urn:schemas-microsoft-com:office:office" xmlns:v="urn:schemas-microsoft-com:vml" xmlns:pvml="urn:schemas-microsoft-com:office:powerpoint" xmlns:com="http://schemas.openxmlformats.org/drawingml/2006/compatibility" xmlns:p14="http://schemas.microsoft.com/office/powerpoint/2010/main" xmlns:p15="http://schemas.microsoft.com/office/powerpoint/2012/main" xmlns:ahyp="http://schemas.microsoft.com/office/drawing/2018/hyperlinkcolor" showMasterPhAnim="0" showMasterSp="0">
   <p:cSld>
     <p:spTree>
       <p:nvGrpSpPr>
-        <p:cNvPr id="286" name="Shape 286"/>
+        <p:cNvPr id="273" name="Shape 273"/>
         <p:cNvGrpSpPr/>
         <p:nvPr/>
       </p:nvGrpSpPr>
@@ -2941,7 +2795,7 @@
       </p:grpSpPr>
       <p:sp>
         <p:nvSpPr>
-          <p:cNvPr id="287" name="Google Shape;287;p22:notes"/>
+          <p:cNvPr id="274" name="Google Shape;274;h3c06cb87bc4eaa0a_0_46:notes"/>
           <p:cNvSpPr/>
           <p:nvPr>
             <p:ph idx="2" type="sldImg"/>
@@ -2986,7 +2840,7 @@
       </p:sp>
       <p:sp>
         <p:nvSpPr>
-          <p:cNvPr id="288" name="Google Shape;288;p22:notes"/>
+          <p:cNvPr id="275" name="Google Shape;275;h3c06cb87bc4eaa0a_0_46:notes"/>
           <p:cNvSpPr txBox="1"/>
           <p:nvPr>
             <p:ph idx="1" type="body"/>
@@ -3033,7 +2887,7 @@
       </p:sp>
       <p:sp>
         <p:nvSpPr>
-          <p:cNvPr id="289" name="Google Shape;289;p22:notes"/>
+          <p:cNvPr id="276" name="Google Shape;276;h3c06cb87bc4eaa0a_0_46:notes"/>
           <p:cNvSpPr txBox="1"/>
           <p:nvPr>
             <p:ph idx="12" type="sldNum"/>
@@ -3087,12 +2941,12 @@
 </p:notes>
 </file>
 
-<file path=ppt/notesSlides/notesSlide18.xml><?xml version="1.0" encoding="utf-8"?>
+<file path=ppt/notesSlides/notesSlide17.xml><?xml version="1.0" encoding="utf-8"?>
 <p:notes xmlns:a="http://schemas.openxmlformats.org/drawingml/2006/main" xmlns:r="http://schemas.openxmlformats.org/officeDocument/2006/relationships" xmlns:mc="http://schemas.openxmlformats.org/markup-compatibility/2006" xmlns:mv="urn:schemas-microsoft-com:mac:vml" xmlns:p="http://schemas.openxmlformats.org/presentationml/2006/main" xmlns:c="http://schemas.openxmlformats.org/drawingml/2006/chart" xmlns:dgm="http://schemas.openxmlformats.org/drawingml/2006/diagram" xmlns:o="urn:schemas-microsoft-com:office:office" xmlns:v="urn:schemas-microsoft-com:vml" xmlns:pvml="urn:schemas-microsoft-com:office:powerpoint" xmlns:com="http://schemas.openxmlformats.org/drawingml/2006/compatibility" xmlns:p14="http://schemas.microsoft.com/office/powerpoint/2010/main" xmlns:p15="http://schemas.microsoft.com/office/powerpoint/2012/main" xmlns:ahyp="http://schemas.microsoft.com/office/drawing/2018/hyperlinkcolor" showMasterPhAnim="0" showMasterSp="0">
   <p:cSld>
     <p:spTree>
       <p:nvGrpSpPr>
-        <p:cNvPr id="303" name="Shape 303"/>
+        <p:cNvPr id="290" name="Shape 290"/>
         <p:cNvGrpSpPr/>
         <p:nvPr/>
       </p:nvGrpSpPr>
@@ -3106,7 +2960,7 @@
       </p:grpSpPr>
       <p:sp>
         <p:nvSpPr>
-          <p:cNvPr id="304" name="Google Shape;304;p23:notes"/>
+          <p:cNvPr id="291" name="Google Shape;291;p22:notes"/>
           <p:cNvSpPr/>
           <p:nvPr>
             <p:ph idx="2" type="sldImg"/>
@@ -3151,7 +3005,7 @@
       </p:sp>
       <p:sp>
         <p:nvSpPr>
-          <p:cNvPr id="305" name="Google Shape;305;p23:notes"/>
+          <p:cNvPr id="292" name="Google Shape;292;p22:notes"/>
           <p:cNvSpPr txBox="1"/>
           <p:nvPr>
             <p:ph idx="1" type="body"/>
@@ -3198,7 +3052,7 @@
       </p:sp>
       <p:sp>
         <p:nvSpPr>
-          <p:cNvPr id="306" name="Google Shape;306;p23:notes"/>
+          <p:cNvPr id="293" name="Google Shape;293;p22:notes"/>
           <p:cNvSpPr txBox="1"/>
           <p:nvPr>
             <p:ph idx="12" type="sldNum"/>
@@ -3252,12 +3106,12 @@
 </p:notes>
 </file>
 
-<file path=ppt/notesSlides/notesSlide19.xml><?xml version="1.0" encoding="utf-8"?>
+<file path=ppt/notesSlides/notesSlide18.xml><?xml version="1.0" encoding="utf-8"?>
 <p:notes xmlns:a="http://schemas.openxmlformats.org/drawingml/2006/main" xmlns:r="http://schemas.openxmlformats.org/officeDocument/2006/relationships" xmlns:mc="http://schemas.openxmlformats.org/markup-compatibility/2006" xmlns:mv="urn:schemas-microsoft-com:mac:vml" xmlns:p="http://schemas.openxmlformats.org/presentationml/2006/main" xmlns:c="http://schemas.openxmlformats.org/drawingml/2006/chart" xmlns:dgm="http://schemas.openxmlformats.org/drawingml/2006/diagram" xmlns:o="urn:schemas-microsoft-com:office:office" xmlns:v="urn:schemas-microsoft-com:vml" xmlns:pvml="urn:schemas-microsoft-com:office:powerpoint" xmlns:com="http://schemas.openxmlformats.org/drawingml/2006/compatibility" xmlns:p14="http://schemas.microsoft.com/office/powerpoint/2010/main" xmlns:p15="http://schemas.microsoft.com/office/powerpoint/2012/main" xmlns:ahyp="http://schemas.microsoft.com/office/drawing/2018/hyperlinkcolor" showMasterPhAnim="0" showMasterSp="0">
   <p:cSld>
     <p:spTree>
       <p:nvGrpSpPr>
-        <p:cNvPr id="364" name="Shape 364"/>
+        <p:cNvPr id="307" name="Shape 307"/>
         <p:cNvGrpSpPr/>
         <p:nvPr/>
       </p:nvGrpSpPr>
@@ -3271,7 +3125,7 @@
       </p:grpSpPr>
       <p:sp>
         <p:nvSpPr>
-          <p:cNvPr id="365" name="Google Shape;365;p24:notes"/>
+          <p:cNvPr id="308" name="Google Shape;308;p23:notes"/>
           <p:cNvSpPr/>
           <p:nvPr>
             <p:ph idx="2" type="sldImg"/>
@@ -3316,7 +3170,7 @@
       </p:sp>
       <p:sp>
         <p:nvSpPr>
-          <p:cNvPr id="366" name="Google Shape;366;p24:notes"/>
+          <p:cNvPr id="309" name="Google Shape;309;p23:notes"/>
           <p:cNvSpPr txBox="1"/>
           <p:nvPr>
             <p:ph idx="1" type="body"/>
@@ -3363,7 +3217,7 @@
       </p:sp>
       <p:sp>
         <p:nvSpPr>
-          <p:cNvPr id="367" name="Google Shape;367;p24:notes"/>
+          <p:cNvPr id="310" name="Google Shape;310;p23:notes"/>
           <p:cNvSpPr txBox="1"/>
           <p:nvPr>
             <p:ph idx="12" type="sldNum"/>
@@ -3417,12 +3271,12 @@
 </p:notes>
 </file>
 
-<file path=ppt/notesSlides/notesSlide2.xml><?xml version="1.0" encoding="utf-8"?>
+<file path=ppt/notesSlides/notesSlide19.xml><?xml version="1.0" encoding="utf-8"?>
 <p:notes xmlns:a="http://schemas.openxmlformats.org/drawingml/2006/main" xmlns:r="http://schemas.openxmlformats.org/officeDocument/2006/relationships" xmlns:mc="http://schemas.openxmlformats.org/markup-compatibility/2006" xmlns:mv="urn:schemas-microsoft-com:mac:vml" xmlns:p="http://schemas.openxmlformats.org/presentationml/2006/main" xmlns:c="http://schemas.openxmlformats.org/drawingml/2006/chart" xmlns:dgm="http://schemas.openxmlformats.org/drawingml/2006/diagram" xmlns:o="urn:schemas-microsoft-com:office:office" xmlns:v="urn:schemas-microsoft-com:vml" xmlns:pvml="urn:schemas-microsoft-com:office:powerpoint" xmlns:com="http://schemas.openxmlformats.org/drawingml/2006/compatibility" xmlns:p14="http://schemas.microsoft.com/office/powerpoint/2010/main" xmlns:p15="http://schemas.microsoft.com/office/powerpoint/2012/main" xmlns:ahyp="http://schemas.microsoft.com/office/drawing/2018/hyperlinkcolor" showMasterPhAnim="0" showMasterSp="0">
   <p:cSld>
     <p:spTree>
       <p:nvGrpSpPr>
-        <p:cNvPr id="67" name="Shape 67"/>
+        <p:cNvPr id="368" name="Shape 368"/>
         <p:cNvGrpSpPr/>
         <p:nvPr/>
       </p:nvGrpSpPr>
@@ -3436,7 +3290,7 @@
       </p:grpSpPr>
       <p:sp>
         <p:nvSpPr>
-          <p:cNvPr id="68" name="Google Shape;68;p2:notes"/>
+          <p:cNvPr id="369" name="Google Shape;369;p24:notes"/>
           <p:cNvSpPr/>
           <p:nvPr>
             <p:ph idx="2" type="sldImg"/>
@@ -3444,8 +3298,8 @@
         </p:nvSpPr>
         <p:spPr>
           <a:xfrm>
-            <a:off x="685800" y="1143000"/>
-            <a:ext cx="5486400" cy="3086100"/>
+            <a:off x="342900" y="571500"/>
+            <a:ext cx="2743200" cy="1543200"/>
           </a:xfrm>
           <a:custGeom>
             <a:rect b="b" l="l" r="r" t="t"/>
@@ -3481,7 +3335,7 @@
       </p:sp>
       <p:sp>
         <p:nvSpPr>
-          <p:cNvPr id="69" name="Google Shape;69;p2:notes"/>
+          <p:cNvPr id="370" name="Google Shape;370;p24:notes"/>
           <p:cNvSpPr txBox="1"/>
           <p:nvPr>
             <p:ph idx="1" type="body"/>
@@ -3489,8 +3343,8 @@
         </p:nvSpPr>
         <p:spPr>
           <a:xfrm>
-            <a:off x="685800" y="4400550"/>
-            <a:ext cx="5486400" cy="3600450"/>
+            <a:off x="342900" y="2200275"/>
+            <a:ext cx="2743200" cy="1800300"/>
           </a:xfrm>
           <a:prstGeom prst="rect">
             <a:avLst/>
@@ -3501,7 +3355,7 @@
           </a:ln>
         </p:spPr>
         <p:txBody>
-          <a:bodyPr anchorCtr="0" anchor="t" bIns="45700" lIns="91425" spcFirstLastPara="1" rIns="91425" wrap="square" tIns="45700">
+          <a:bodyPr anchorCtr="0" anchor="t" bIns="27925" lIns="55875" spcFirstLastPara="1" rIns="55875" wrap="square" tIns="27925">
             <a:noAutofit/>
           </a:bodyPr>
           <a:lstStyle/>
@@ -3520,16 +3374,15 @@
               <a:buNone/>
             </a:pPr>
             <a:r>
-              <a:rPr lang="en-US"/>
-              <a:t>L02 · PORTADA DE PROPUESTA — Reemplazar servicio, área, cliente y mes. El mes se escribe con inicial mayúscula. - PLANTILLA FIJA</a:t>
+              <a:t/>
             </a:r>
-            <a:endParaRPr/>
+            <a:endParaRPr sz="900"/>
           </a:p>
         </p:txBody>
       </p:sp>
       <p:sp>
         <p:nvSpPr>
-          <p:cNvPr id="70" name="Google Shape;70;p2:notes"/>
+          <p:cNvPr id="371" name="Google Shape;371;p24:notes"/>
           <p:cNvSpPr txBox="1"/>
           <p:nvPr>
             <p:ph idx="12" type="sldNum"/>
@@ -3537,8 +3390,8 @@
         </p:nvSpPr>
         <p:spPr>
           <a:xfrm>
-            <a:off x="3884613" y="8685213"/>
-            <a:ext cx="2971800" cy="458787"/>
+            <a:off x="1942306" y="4342607"/>
+            <a:ext cx="1485900" cy="229500"/>
           </a:xfrm>
           <a:prstGeom prst="rect">
             <a:avLst/>
@@ -3549,7 +3402,7 @@
           </a:ln>
         </p:spPr>
         <p:txBody>
-          <a:bodyPr anchorCtr="0" anchor="b" bIns="45700" lIns="91425" spcFirstLastPara="1" rIns="91425" wrap="square" tIns="45700">
+          <a:bodyPr anchorCtr="0" anchor="b" bIns="27925" lIns="55875" spcFirstLastPara="1" rIns="55875" wrap="square" tIns="27925">
             <a:noAutofit/>
           </a:bodyPr>
           <a:lstStyle/>
@@ -3564,14 +3417,14 @@
               <a:spcAft>
                 <a:spcPts val="0"/>
               </a:spcAft>
-              <a:buSzPts val="1400"/>
+              <a:buSzPts val="900"/>
               <a:buNone/>
             </a:pPr>
             <a:fld id="{00000000-1234-1234-1234-123412341234}" type="slidenum">
-              <a:rPr lang="en-US"/>
+              <a:rPr lang="en-US" sz="900"/>
               <a:t>‹#›</a:t>
             </a:fld>
-            <a:endParaRPr/>
+            <a:endParaRPr sz="900"/>
           </a:p>
         </p:txBody>
       </p:sp>
@@ -3583,12 +3436,12 @@
 </p:notes>
 </file>
 
-<file path=ppt/notesSlides/notesSlide3.xml><?xml version="1.0" encoding="utf-8"?>
+<file path=ppt/notesSlides/notesSlide2.xml><?xml version="1.0" encoding="utf-8"?>
 <p:notes xmlns:a="http://schemas.openxmlformats.org/drawingml/2006/main" xmlns:r="http://schemas.openxmlformats.org/officeDocument/2006/relationships" xmlns:mc="http://schemas.openxmlformats.org/markup-compatibility/2006" xmlns:mv="urn:schemas-microsoft-com:mac:vml" xmlns:p="http://schemas.openxmlformats.org/presentationml/2006/main" xmlns:c="http://schemas.openxmlformats.org/drawingml/2006/chart" xmlns:dgm="http://schemas.openxmlformats.org/drawingml/2006/diagram" xmlns:o="urn:schemas-microsoft-com:office:office" xmlns:v="urn:schemas-microsoft-com:vml" xmlns:pvml="urn:schemas-microsoft-com:office:powerpoint" xmlns:com="http://schemas.openxmlformats.org/drawingml/2006/compatibility" xmlns:p14="http://schemas.microsoft.com/office/powerpoint/2010/main" xmlns:p15="http://schemas.microsoft.com/office/powerpoint/2012/main" xmlns:ahyp="http://schemas.microsoft.com/office/drawing/2018/hyperlinkcolor" showMasterPhAnim="0" showMasterSp="0">
   <p:cSld>
     <p:spTree>
       <p:nvGrpSpPr>
-        <p:cNvPr id="78" name="Shape 78"/>
+        <p:cNvPr id="71" name="Shape 71"/>
         <p:cNvGrpSpPr/>
         <p:nvPr/>
       </p:nvGrpSpPr>
@@ -3602,7 +3455,7 @@
       </p:grpSpPr>
       <p:sp>
         <p:nvSpPr>
-          <p:cNvPr id="79" name="Google Shape;79;p3:notes"/>
+          <p:cNvPr id="72" name="Google Shape;72;p2:notes"/>
           <p:cNvSpPr/>
           <p:nvPr>
             <p:ph idx="2" type="sldImg"/>
@@ -3647,7 +3500,7 @@
       </p:sp>
       <p:sp>
         <p:nvSpPr>
-          <p:cNvPr id="80" name="Google Shape;80;p3:notes"/>
+          <p:cNvPr id="73" name="Google Shape;73;p2:notes"/>
           <p:cNvSpPr txBox="1"/>
           <p:nvPr>
             <p:ph idx="1" type="body"/>
@@ -3656,7 +3509,7 @@
         <p:spPr>
           <a:xfrm>
             <a:off x="685800" y="4400550"/>
-            <a:ext cx="5486400" cy="3600600"/>
+            <a:ext cx="5486400" cy="3600450"/>
           </a:xfrm>
           <a:prstGeom prst="rect">
             <a:avLst/>
@@ -3686,7 +3539,8 @@
               <a:buNone/>
             </a:pPr>
             <a:r>
-              <a:t/>
+              <a:rPr lang="en-US"/>
+              <a:t>L02 · PORTADA DE PROPUESTA — Reemplazar servicio, área, cliente y mes. El mes se escribe con inicial mayúscula. - PLANTILLA FIJA</a:t>
             </a:r>
             <a:endParaRPr/>
           </a:p>
@@ -3694,7 +3548,7 @@
       </p:sp>
       <p:sp>
         <p:nvSpPr>
-          <p:cNvPr id="81" name="Google Shape;81;p3:notes"/>
+          <p:cNvPr id="74" name="Google Shape;74;p2:notes"/>
           <p:cNvSpPr txBox="1"/>
           <p:nvPr>
             <p:ph idx="12" type="sldNum"/>
@@ -3703,7 +3557,7 @@
         <p:spPr>
           <a:xfrm>
             <a:off x="3884613" y="8685213"/>
-            <a:ext cx="2971800" cy="458700"/>
+            <a:ext cx="2971800" cy="458787"/>
           </a:xfrm>
           <a:prstGeom prst="rect">
             <a:avLst/>
@@ -3748,12 +3602,12 @@
 </p:notes>
 </file>
 
-<file path=ppt/notesSlides/notesSlide4.xml><?xml version="1.0" encoding="utf-8"?>
+<file path=ppt/notesSlides/notesSlide3.xml><?xml version="1.0" encoding="utf-8"?>
 <p:notes xmlns:a="http://schemas.openxmlformats.org/drawingml/2006/main" xmlns:r="http://schemas.openxmlformats.org/officeDocument/2006/relationships" xmlns:mc="http://schemas.openxmlformats.org/markup-compatibility/2006" xmlns:mv="urn:schemas-microsoft-com:mac:vml" xmlns:p="http://schemas.openxmlformats.org/presentationml/2006/main" xmlns:c="http://schemas.openxmlformats.org/drawingml/2006/chart" xmlns:dgm="http://schemas.openxmlformats.org/drawingml/2006/diagram" xmlns:o="urn:schemas-microsoft-com:office:office" xmlns:v="urn:schemas-microsoft-com:vml" xmlns:pvml="urn:schemas-microsoft-com:office:powerpoint" xmlns:com="http://schemas.openxmlformats.org/drawingml/2006/compatibility" xmlns:p14="http://schemas.microsoft.com/office/powerpoint/2010/main" xmlns:p15="http://schemas.microsoft.com/office/powerpoint/2012/main" xmlns:ahyp="http://schemas.microsoft.com/office/drawing/2018/hyperlinkcolor" showMasterPhAnim="0" showMasterSp="0">
   <p:cSld>
     <p:spTree>
       <p:nvGrpSpPr>
-        <p:cNvPr id="98" name="Shape 98"/>
+        <p:cNvPr id="82" name="Shape 82"/>
         <p:cNvGrpSpPr/>
         <p:nvPr/>
       </p:nvGrpSpPr>
@@ -3767,7 +3621,7 @@
       </p:grpSpPr>
       <p:sp>
         <p:nvSpPr>
-          <p:cNvPr id="99" name="Google Shape;99;p4:notes"/>
+          <p:cNvPr id="83" name="Google Shape;83;p3:notes"/>
           <p:cNvSpPr/>
           <p:nvPr>
             <p:ph idx="2" type="sldImg"/>
@@ -3812,7 +3666,7 @@
       </p:sp>
       <p:sp>
         <p:nvSpPr>
-          <p:cNvPr id="100" name="Google Shape;100;p4:notes"/>
+          <p:cNvPr id="84" name="Google Shape;84;p3:notes"/>
           <p:cNvSpPr txBox="1"/>
           <p:nvPr>
             <p:ph idx="1" type="body"/>
@@ -3859,7 +3713,7 @@
       </p:sp>
       <p:sp>
         <p:nvSpPr>
-          <p:cNvPr id="101" name="Google Shape;101;p4:notes"/>
+          <p:cNvPr id="85" name="Google Shape;85;p3:notes"/>
           <p:cNvSpPr txBox="1"/>
           <p:nvPr>
             <p:ph idx="12" type="sldNum"/>
@@ -3913,12 +3767,12 @@
 </p:notes>
 </file>
 
-<file path=ppt/notesSlides/notesSlide5.xml><?xml version="1.0" encoding="utf-8"?>
+<file path=ppt/notesSlides/notesSlide4.xml><?xml version="1.0" encoding="utf-8"?>
 <p:notes xmlns:a="http://schemas.openxmlformats.org/drawingml/2006/main" xmlns:r="http://schemas.openxmlformats.org/officeDocument/2006/relationships" xmlns:mc="http://schemas.openxmlformats.org/markup-compatibility/2006" xmlns:mv="urn:schemas-microsoft-com:mac:vml" xmlns:p="http://schemas.openxmlformats.org/presentationml/2006/main" xmlns:c="http://schemas.openxmlformats.org/drawingml/2006/chart" xmlns:dgm="http://schemas.openxmlformats.org/drawingml/2006/diagram" xmlns:o="urn:schemas-microsoft-com:office:office" xmlns:v="urn:schemas-microsoft-com:vml" xmlns:pvml="urn:schemas-microsoft-com:office:powerpoint" xmlns:com="http://schemas.openxmlformats.org/drawingml/2006/compatibility" xmlns:p14="http://schemas.microsoft.com/office/powerpoint/2010/main" xmlns:p15="http://schemas.microsoft.com/office/powerpoint/2012/main" xmlns:ahyp="http://schemas.microsoft.com/office/drawing/2018/hyperlinkcolor" showMasterPhAnim="0" showMasterSp="0">
   <p:cSld>
     <p:spTree>
       <p:nvGrpSpPr>
-        <p:cNvPr id="108" name="Shape 108"/>
+        <p:cNvPr id="102" name="Shape 102"/>
         <p:cNvGrpSpPr/>
         <p:nvPr/>
       </p:nvGrpSpPr>
@@ -3932,106 +3786,7 @@
       </p:grpSpPr>
       <p:sp>
         <p:nvSpPr>
-          <p:cNvPr id="109" name="Google Shape;109;p5:notes"/>
-          <p:cNvSpPr txBox="1"/>
-          <p:nvPr>
-            <p:ph idx="1" type="body"/>
-          </p:nvPr>
-        </p:nvSpPr>
-        <p:spPr>
-          <a:xfrm>
-            <a:off x="685800" y="4400550"/>
-            <a:ext cx="5486400" cy="3600450"/>
-          </a:xfrm>
-          <a:prstGeom prst="rect">
-            <a:avLst/>
-          </a:prstGeom>
-        </p:spPr>
-        <p:txBody>
-          <a:bodyPr anchorCtr="0" anchor="t" bIns="45700" lIns="91425" spcFirstLastPara="1" rIns="91425" wrap="square" tIns="45700">
-            <a:noAutofit/>
-          </a:bodyPr>
-          <a:lstStyle/>
-          <a:p>
-            <a:pPr indent="0" lvl="0" marL="0" rtl="0" algn="l">
-              <a:spcBef>
-                <a:spcPts val="0"/>
-              </a:spcBef>
-              <a:spcAft>
-                <a:spcPts val="0"/>
-              </a:spcAft>
-              <a:buNone/>
-            </a:pPr>
-            <a:r>
-              <a:t/>
-            </a:r>
-            <a:endParaRPr/>
-          </a:p>
-        </p:txBody>
-      </p:sp>
-      <p:sp>
-        <p:nvSpPr>
-          <p:cNvPr id="110" name="Google Shape;110;p5:notes"/>
-          <p:cNvSpPr/>
-          <p:nvPr>
-            <p:ph idx="2" type="sldImg"/>
-          </p:nvPr>
-        </p:nvSpPr>
-        <p:spPr>
-          <a:xfrm>
-            <a:off x="685800" y="1143000"/>
-            <a:ext cx="5486400" cy="3086100"/>
-          </a:xfrm>
-          <a:custGeom>
-            <a:rect b="b" l="l" r="r" t="t"/>
-            <a:pathLst>
-              <a:path extrusionOk="0" h="120000" w="120000">
-                <a:moveTo>
-                  <a:pt x="0" y="0"/>
-                </a:moveTo>
-                <a:lnTo>
-                  <a:pt x="120000" y="0"/>
-                </a:lnTo>
-                <a:lnTo>
-                  <a:pt x="120000" y="120000"/>
-                </a:lnTo>
-                <a:lnTo>
-                  <a:pt x="0" y="120000"/>
-                </a:lnTo>
-                <a:close/>
-              </a:path>
-            </a:pathLst>
-          </a:custGeom>
-        </p:spPr>
-      </p:sp>
-    </p:spTree>
-  </p:cSld>
-  <p:clrMapOvr>
-    <a:masterClrMapping/>
-  </p:clrMapOvr>
-</p:notes>
-</file>
-
-<file path=ppt/notesSlides/notesSlide6.xml><?xml version="1.0" encoding="utf-8"?>
-<p:notes xmlns:a="http://schemas.openxmlformats.org/drawingml/2006/main" xmlns:r="http://schemas.openxmlformats.org/officeDocument/2006/relationships" xmlns:mc="http://schemas.openxmlformats.org/markup-compatibility/2006" xmlns:mv="urn:schemas-microsoft-com:mac:vml" xmlns:p="http://schemas.openxmlformats.org/presentationml/2006/main" xmlns:c="http://schemas.openxmlformats.org/drawingml/2006/chart" xmlns:dgm="http://schemas.openxmlformats.org/drawingml/2006/diagram" xmlns:o="urn:schemas-microsoft-com:office:office" xmlns:v="urn:schemas-microsoft-com:vml" xmlns:pvml="urn:schemas-microsoft-com:office:powerpoint" xmlns:com="http://schemas.openxmlformats.org/drawingml/2006/compatibility" xmlns:p14="http://schemas.microsoft.com/office/powerpoint/2010/main" xmlns:p15="http://schemas.microsoft.com/office/powerpoint/2012/main" xmlns:ahyp="http://schemas.microsoft.com/office/drawing/2018/hyperlinkcolor" showMasterPhAnim="0" showMasterSp="0">
-  <p:cSld>
-    <p:spTree>
-      <p:nvGrpSpPr>
-        <p:cNvPr id="116" name="Shape 116"/>
-        <p:cNvGrpSpPr/>
-        <p:nvPr/>
-      </p:nvGrpSpPr>
-      <p:grpSpPr>
-        <a:xfrm>
-          <a:off x="0" y="0"/>
-          <a:ext cx="0" cy="0"/>
-          <a:chOff x="0" y="0"/>
-          <a:chExt cx="0" cy="0"/>
-        </a:xfrm>
-      </p:grpSpPr>
-      <p:sp>
-        <p:nvSpPr>
-          <p:cNvPr id="117" name="Google Shape;117;p6:notes"/>
+          <p:cNvPr id="103" name="Google Shape;103;p4:notes"/>
           <p:cNvSpPr/>
           <p:nvPr>
             <p:ph idx="2" type="sldImg"/>
@@ -4076,7 +3831,271 @@
       </p:sp>
       <p:sp>
         <p:nvSpPr>
-          <p:cNvPr id="118" name="Google Shape;118;p6:notes"/>
+          <p:cNvPr id="104" name="Google Shape;104;p4:notes"/>
+          <p:cNvSpPr txBox="1"/>
+          <p:nvPr>
+            <p:ph idx="1" type="body"/>
+          </p:nvPr>
+        </p:nvSpPr>
+        <p:spPr>
+          <a:xfrm>
+            <a:off x="685800" y="4400550"/>
+            <a:ext cx="5486400" cy="3600600"/>
+          </a:xfrm>
+          <a:prstGeom prst="rect">
+            <a:avLst/>
+          </a:prstGeom>
+          <a:noFill/>
+          <a:ln>
+            <a:noFill/>
+          </a:ln>
+        </p:spPr>
+        <p:txBody>
+          <a:bodyPr anchorCtr="0" anchor="t" bIns="45700" lIns="91425" spcFirstLastPara="1" rIns="91425" wrap="square" tIns="45700">
+            <a:noAutofit/>
+          </a:bodyPr>
+          <a:lstStyle/>
+          <a:p>
+            <a:pPr indent="0" lvl="0" marL="0" rtl="0" algn="l">
+              <a:lnSpc>
+                <a:spcPct val="100000"/>
+              </a:lnSpc>
+              <a:spcBef>
+                <a:spcPts val="0"/>
+              </a:spcBef>
+              <a:spcAft>
+                <a:spcPts val="0"/>
+              </a:spcAft>
+              <a:buSzPts val="1400"/>
+              <a:buNone/>
+            </a:pPr>
+            <a:r>
+              <a:t/>
+            </a:r>
+            <a:endParaRPr/>
+          </a:p>
+        </p:txBody>
+      </p:sp>
+      <p:sp>
+        <p:nvSpPr>
+          <p:cNvPr id="105" name="Google Shape;105;p4:notes"/>
+          <p:cNvSpPr txBox="1"/>
+          <p:nvPr>
+            <p:ph idx="12" type="sldNum"/>
+          </p:nvPr>
+        </p:nvSpPr>
+        <p:spPr>
+          <a:xfrm>
+            <a:off x="3884613" y="8685213"/>
+            <a:ext cx="2971800" cy="458700"/>
+          </a:xfrm>
+          <a:prstGeom prst="rect">
+            <a:avLst/>
+          </a:prstGeom>
+          <a:noFill/>
+          <a:ln>
+            <a:noFill/>
+          </a:ln>
+        </p:spPr>
+        <p:txBody>
+          <a:bodyPr anchorCtr="0" anchor="b" bIns="45700" lIns="91425" spcFirstLastPara="1" rIns="91425" wrap="square" tIns="45700">
+            <a:noAutofit/>
+          </a:bodyPr>
+          <a:lstStyle/>
+          <a:p>
+            <a:pPr indent="0" lvl="0" marL="0" rtl="0" algn="r">
+              <a:lnSpc>
+                <a:spcPct val="100000"/>
+              </a:lnSpc>
+              <a:spcBef>
+                <a:spcPts val="0"/>
+              </a:spcBef>
+              <a:spcAft>
+                <a:spcPts val="0"/>
+              </a:spcAft>
+              <a:buSzPts val="1400"/>
+              <a:buNone/>
+            </a:pPr>
+            <a:fld id="{00000000-1234-1234-1234-123412341234}" type="slidenum">
+              <a:rPr lang="en-US"/>
+              <a:t>‹#›</a:t>
+            </a:fld>
+            <a:endParaRPr/>
+          </a:p>
+        </p:txBody>
+      </p:sp>
+    </p:spTree>
+  </p:cSld>
+  <p:clrMapOvr>
+    <a:masterClrMapping/>
+  </p:clrMapOvr>
+</p:notes>
+</file>
+
+<file path=ppt/notesSlides/notesSlide5.xml><?xml version="1.0" encoding="utf-8"?>
+<p:notes xmlns:a="http://schemas.openxmlformats.org/drawingml/2006/main" xmlns:r="http://schemas.openxmlformats.org/officeDocument/2006/relationships" xmlns:mc="http://schemas.openxmlformats.org/markup-compatibility/2006" xmlns:mv="urn:schemas-microsoft-com:mac:vml" xmlns:p="http://schemas.openxmlformats.org/presentationml/2006/main" xmlns:c="http://schemas.openxmlformats.org/drawingml/2006/chart" xmlns:dgm="http://schemas.openxmlformats.org/drawingml/2006/diagram" xmlns:o="urn:schemas-microsoft-com:office:office" xmlns:v="urn:schemas-microsoft-com:vml" xmlns:pvml="urn:schemas-microsoft-com:office:powerpoint" xmlns:com="http://schemas.openxmlformats.org/drawingml/2006/compatibility" xmlns:p14="http://schemas.microsoft.com/office/powerpoint/2010/main" xmlns:p15="http://schemas.microsoft.com/office/powerpoint/2012/main" xmlns:ahyp="http://schemas.microsoft.com/office/drawing/2018/hyperlinkcolor" showMasterPhAnim="0" showMasterSp="0">
+  <p:cSld>
+    <p:spTree>
+      <p:nvGrpSpPr>
+        <p:cNvPr id="112" name="Shape 112"/>
+        <p:cNvGrpSpPr/>
+        <p:nvPr/>
+      </p:nvGrpSpPr>
+      <p:grpSpPr>
+        <a:xfrm>
+          <a:off x="0" y="0"/>
+          <a:ext cx="0" cy="0"/>
+          <a:chOff x="0" y="0"/>
+          <a:chExt cx="0" cy="0"/>
+        </a:xfrm>
+      </p:grpSpPr>
+      <p:sp>
+        <p:nvSpPr>
+          <p:cNvPr id="113" name="Google Shape;113;p5:notes"/>
+          <p:cNvSpPr txBox="1"/>
+          <p:nvPr>
+            <p:ph idx="1" type="body"/>
+          </p:nvPr>
+        </p:nvSpPr>
+        <p:spPr>
+          <a:xfrm>
+            <a:off x="685800" y="4400550"/>
+            <a:ext cx="5486400" cy="3600450"/>
+          </a:xfrm>
+          <a:prstGeom prst="rect">
+            <a:avLst/>
+          </a:prstGeom>
+        </p:spPr>
+        <p:txBody>
+          <a:bodyPr anchorCtr="0" anchor="t" bIns="45700" lIns="91425" spcFirstLastPara="1" rIns="91425" wrap="square" tIns="45700">
+            <a:noAutofit/>
+          </a:bodyPr>
+          <a:lstStyle/>
+          <a:p>
+            <a:pPr indent="0" lvl="0" marL="0" rtl="0" algn="l">
+              <a:spcBef>
+                <a:spcPts val="0"/>
+              </a:spcBef>
+              <a:spcAft>
+                <a:spcPts val="0"/>
+              </a:spcAft>
+              <a:buNone/>
+            </a:pPr>
+            <a:r>
+              <a:t/>
+            </a:r>
+            <a:endParaRPr/>
+          </a:p>
+        </p:txBody>
+      </p:sp>
+      <p:sp>
+        <p:nvSpPr>
+          <p:cNvPr id="114" name="Google Shape;114;p5:notes"/>
+          <p:cNvSpPr/>
+          <p:nvPr>
+            <p:ph idx="2" type="sldImg"/>
+          </p:nvPr>
+        </p:nvSpPr>
+        <p:spPr>
+          <a:xfrm>
+            <a:off x="685800" y="1143000"/>
+            <a:ext cx="5486400" cy="3086100"/>
+          </a:xfrm>
+          <a:custGeom>
+            <a:rect b="b" l="l" r="r" t="t"/>
+            <a:pathLst>
+              <a:path extrusionOk="0" h="120000" w="120000">
+                <a:moveTo>
+                  <a:pt x="0" y="0"/>
+                </a:moveTo>
+                <a:lnTo>
+                  <a:pt x="120000" y="0"/>
+                </a:lnTo>
+                <a:lnTo>
+                  <a:pt x="120000" y="120000"/>
+                </a:lnTo>
+                <a:lnTo>
+                  <a:pt x="0" y="120000"/>
+                </a:lnTo>
+                <a:close/>
+              </a:path>
+            </a:pathLst>
+          </a:custGeom>
+        </p:spPr>
+      </p:sp>
+    </p:spTree>
+  </p:cSld>
+  <p:clrMapOvr>
+    <a:masterClrMapping/>
+  </p:clrMapOvr>
+</p:notes>
+</file>
+
+<file path=ppt/notesSlides/notesSlide6.xml><?xml version="1.0" encoding="utf-8"?>
+<p:notes xmlns:a="http://schemas.openxmlformats.org/drawingml/2006/main" xmlns:r="http://schemas.openxmlformats.org/officeDocument/2006/relationships" xmlns:mc="http://schemas.openxmlformats.org/markup-compatibility/2006" xmlns:mv="urn:schemas-microsoft-com:mac:vml" xmlns:p="http://schemas.openxmlformats.org/presentationml/2006/main" xmlns:c="http://schemas.openxmlformats.org/drawingml/2006/chart" xmlns:dgm="http://schemas.openxmlformats.org/drawingml/2006/diagram" xmlns:o="urn:schemas-microsoft-com:office:office" xmlns:v="urn:schemas-microsoft-com:vml" xmlns:pvml="urn:schemas-microsoft-com:office:powerpoint" xmlns:com="http://schemas.openxmlformats.org/drawingml/2006/compatibility" xmlns:p14="http://schemas.microsoft.com/office/powerpoint/2010/main" xmlns:p15="http://schemas.microsoft.com/office/powerpoint/2012/main" xmlns:ahyp="http://schemas.microsoft.com/office/drawing/2018/hyperlinkcolor" showMasterPhAnim="0" showMasterSp="0">
+  <p:cSld>
+    <p:spTree>
+      <p:nvGrpSpPr>
+        <p:cNvPr id="120" name="Shape 120"/>
+        <p:cNvGrpSpPr/>
+        <p:nvPr/>
+      </p:nvGrpSpPr>
+      <p:grpSpPr>
+        <a:xfrm>
+          <a:off x="0" y="0"/>
+          <a:ext cx="0" cy="0"/>
+          <a:chOff x="0" y="0"/>
+          <a:chExt cx="0" cy="0"/>
+        </a:xfrm>
+      </p:grpSpPr>
+      <p:sp>
+        <p:nvSpPr>
+          <p:cNvPr id="121" name="Google Shape;121;p6:notes"/>
+          <p:cNvSpPr/>
+          <p:nvPr>
+            <p:ph idx="2" type="sldImg"/>
+          </p:nvPr>
+        </p:nvSpPr>
+        <p:spPr>
+          <a:xfrm>
+            <a:off x="685800" y="1143000"/>
+            <a:ext cx="5486400" cy="3086100"/>
+          </a:xfrm>
+          <a:custGeom>
+            <a:rect b="b" l="l" r="r" t="t"/>
+            <a:pathLst>
+              <a:path extrusionOk="0" h="120000" w="120000">
+                <a:moveTo>
+                  <a:pt x="0" y="0"/>
+                </a:moveTo>
+                <a:lnTo>
+                  <a:pt x="120000" y="0"/>
+                </a:lnTo>
+                <a:lnTo>
+                  <a:pt x="120000" y="120000"/>
+                </a:lnTo>
+                <a:lnTo>
+                  <a:pt x="0" y="120000"/>
+                </a:lnTo>
+                <a:close/>
+              </a:path>
+            </a:pathLst>
+          </a:custGeom>
+          <a:noFill/>
+          <a:ln cap="flat" cmpd="sng" w="12700">
+            <a:solidFill>
+              <a:srgbClr val="000000"/>
+            </a:solidFill>
+            <a:prstDash val="solid"/>
+            <a:round/>
+            <a:headEnd len="sm" w="sm" type="none"/>
+            <a:tailEnd len="sm" w="sm" type="none"/>
+          </a:ln>
+        </p:spPr>
+      </p:sp>
+      <p:sp>
+        <p:nvSpPr>
+          <p:cNvPr id="122" name="Google Shape;122;p6:notes"/>
           <p:cNvSpPr txBox="1"/>
           <p:nvPr>
             <p:ph idx="1" type="body"/>
@@ -4124,7 +4143,7 @@
       </p:sp>
       <p:sp>
         <p:nvSpPr>
-          <p:cNvPr id="119" name="Google Shape;119;p6:notes"/>
+          <p:cNvPr id="123" name="Google Shape;123;p6:notes"/>
           <p:cNvSpPr txBox="1"/>
           <p:nvPr>
             <p:ph idx="12" type="sldNum"/>
@@ -4183,7 +4202,7 @@
   <p:cSld>
     <p:spTree>
       <p:nvGrpSpPr>
-        <p:cNvPr id="126" name="Shape 126"/>
+        <p:cNvPr id="130" name="Shape 130"/>
         <p:cNvGrpSpPr/>
         <p:nvPr/>
       </p:nvGrpSpPr>
@@ -4197,7 +4216,7 @@
       </p:grpSpPr>
       <p:sp>
         <p:nvSpPr>
-          <p:cNvPr id="127" name="Google Shape;127;p7:notes"/>
+          <p:cNvPr id="131" name="Google Shape;131;p7:notes"/>
           <p:cNvSpPr txBox="1"/>
           <p:nvPr>
             <p:ph idx="1" type="body"/>
@@ -4236,7 +4255,7 @@
       </p:sp>
       <p:sp>
         <p:nvSpPr>
-          <p:cNvPr id="128" name="Google Shape;128;p7:notes"/>
+          <p:cNvPr id="132" name="Google Shape;132;p7:notes"/>
           <p:cNvSpPr/>
           <p:nvPr>
             <p:ph idx="2" type="sldImg"/>
@@ -4282,7 +4301,7 @@
   <p:cSld>
     <p:spTree>
       <p:nvGrpSpPr>
-        <p:cNvPr id="134" name="Shape 134"/>
+        <p:cNvPr id="138" name="Shape 138"/>
         <p:cNvGrpSpPr/>
         <p:nvPr/>
       </p:nvGrpSpPr>
@@ -4296,7 +4315,7 @@
       </p:grpSpPr>
       <p:sp>
         <p:nvSpPr>
-          <p:cNvPr id="135" name="Google Shape;135;p8:notes"/>
+          <p:cNvPr id="139" name="Google Shape;139;p8:notes"/>
           <p:cNvSpPr txBox="1"/>
           <p:nvPr>
             <p:ph idx="1" type="body"/>
@@ -4335,7 +4354,7 @@
       </p:sp>
       <p:sp>
         <p:nvSpPr>
-          <p:cNvPr id="136" name="Google Shape;136;p8:notes"/>
+          <p:cNvPr id="140" name="Google Shape;140;p8:notes"/>
           <p:cNvSpPr/>
           <p:nvPr>
             <p:ph idx="2" type="sldImg"/>
@@ -4381,7 +4400,7 @@
   <p:cSld>
     <p:spTree>
       <p:nvGrpSpPr>
-        <p:cNvPr id="163" name="Shape 163"/>
+        <p:cNvPr id="167" name="Shape 167"/>
         <p:cNvGrpSpPr/>
         <p:nvPr/>
       </p:nvGrpSpPr>
@@ -4395,7 +4414,7 @@
       </p:grpSpPr>
       <p:sp>
         <p:nvSpPr>
-          <p:cNvPr id="164" name="Google Shape;164;p9:notes"/>
+          <p:cNvPr id="168" name="Google Shape;168;p9:notes"/>
           <p:cNvSpPr txBox="1"/>
           <p:nvPr>
             <p:ph idx="1" type="body"/>
@@ -4434,7 +4453,7 @@
       </p:sp>
       <p:sp>
         <p:nvSpPr>
-          <p:cNvPr id="165" name="Google Shape;165;p9:notes"/>
+          <p:cNvPr id="169" name="Google Shape;169;p9:notes"/>
           <p:cNvSpPr/>
           <p:nvPr>
             <p:ph idx="2" type="sldImg"/>
@@ -5426,6 +5445,139 @@
         <p:spPr>
           <a:xfrm>
             <a:off x="569671" y="389534"/>
+            <a:ext cx="1228039" cy="245059"/>
+          </a:xfrm>
+          <a:prstGeom prst="rect">
+            <a:avLst/>
+          </a:prstGeom>
+          <a:noFill/>
+          <a:ln>
+            <a:noFill/>
+          </a:ln>
+        </p:spPr>
+      </p:pic>
+    </p:spTree>
+  </p:cSld>
+  <p:clrMapOvr>
+    <a:masterClrMapping/>
+  </p:clrMapOvr>
+</p:sldLayout>
+</file>
+
+<file path=ppt/slideLayouts/slideLayout13.xml><?xml version="1.0" encoding="utf-8"?>
+<p:sldLayout xmlns:a="http://schemas.openxmlformats.org/drawingml/2006/main" xmlns:r="http://schemas.openxmlformats.org/officeDocument/2006/relationships" xmlns:mc="http://schemas.openxmlformats.org/markup-compatibility/2006" xmlns:mv="urn:schemas-microsoft-com:mac:vml" xmlns:p="http://schemas.openxmlformats.org/presentationml/2006/main" xmlns:c="http://schemas.openxmlformats.org/drawingml/2006/chart" xmlns:dgm="http://schemas.openxmlformats.org/drawingml/2006/diagram" xmlns:o="urn:schemas-microsoft-com:office:office" xmlns:v="urn:schemas-microsoft-com:vml" xmlns:pvml="urn:schemas-microsoft-com:office:powerpoint" xmlns:com="http://schemas.openxmlformats.org/drawingml/2006/compatibility" xmlns:p14="http://schemas.microsoft.com/office/powerpoint/2010/main" xmlns:p15="http://schemas.microsoft.com/office/powerpoint/2012/main" xmlns:ahyp="http://schemas.microsoft.com/office/drawing/2018/hyperlinkcolor" matchingName="DEFAULT">
+  <p:cSld name="DEFAULT">
+    <p:bg>
+      <p:bgPr>
+        <a:gradFill>
+          <a:gsLst>
+            <a:gs pos="0">
+              <a:schemeClr val="lt1"/>
+            </a:gs>
+            <a:gs pos="100000">
+              <a:srgbClr val="EEF3FF"/>
+            </a:gs>
+          </a:gsLst>
+          <a:lin ang="16198662" scaled="0"/>
+        </a:gradFill>
+      </p:bgPr>
+    </p:bg>
+    <p:spTree>
+      <p:nvGrpSpPr>
+        <p:cNvPr id="58" name="Shape 58"/>
+        <p:cNvGrpSpPr/>
+        <p:nvPr/>
+      </p:nvGrpSpPr>
+      <p:grpSpPr>
+        <a:xfrm>
+          <a:off x="0" y="0"/>
+          <a:ext cx="0" cy="0"/>
+          <a:chOff x="0" y="0"/>
+          <a:chExt cx="0" cy="0"/>
+        </a:xfrm>
+      </p:grpSpPr>
+      <p:sp>
+        <p:nvSpPr>
+          <p:cNvPr id="59" name="Google Shape;59;p15"/>
+          <p:cNvSpPr/>
+          <p:nvPr/>
+        </p:nvSpPr>
+        <p:spPr>
+          <a:xfrm>
+            <a:off x="8512444" y="515696"/>
+            <a:ext cx="162000" cy="52500"/>
+          </a:xfrm>
+          <a:prstGeom prst="rect">
+            <a:avLst/>
+          </a:prstGeom>
+          <a:noFill/>
+          <a:ln>
+            <a:noFill/>
+          </a:ln>
+        </p:spPr>
+        <p:txBody>
+          <a:bodyPr anchorCtr="0" anchor="t" bIns="0" lIns="0" spcFirstLastPara="1" rIns="0" wrap="square" tIns="0">
+            <a:noAutofit/>
+          </a:bodyPr>
+          <a:lstStyle/>
+          <a:p>
+            <a:pPr indent="0" lvl="0" marL="0" marR="0" rtl="0" algn="l">
+              <a:lnSpc>
+                <a:spcPct val="88449"/>
+              </a:lnSpc>
+              <a:spcBef>
+                <a:spcPts val="0"/>
+              </a:spcBef>
+              <a:spcAft>
+                <a:spcPts val="0"/>
+              </a:spcAft>
+              <a:buClr>
+                <a:srgbClr val="000033"/>
+              </a:buClr>
+              <a:buSzPts val="300"/>
+              <a:buFont typeface="Montserrat SemiBold"/>
+              <a:buNone/>
+            </a:pPr>
+            <a:r>
+              <a:rPr b="1" i="0" lang="en-US" sz="300" u="none" cap="none" strike="noStrike">
+                <a:solidFill>
+                  <a:srgbClr val="000033"/>
+                </a:solidFill>
+                <a:latin typeface="Montserrat"/>
+                <a:ea typeface="Montserrat"/>
+                <a:cs typeface="Montserrat"/>
+                <a:sym typeface="Montserrat"/>
+              </a:rPr>
+              <a:t>AÑOS </a:t>
+            </a:r>
+            <a:endParaRPr b="0" i="0" sz="300" u="none" cap="none" strike="noStrike">
+              <a:solidFill>
+                <a:srgbClr val="000000"/>
+              </a:solidFill>
+              <a:latin typeface="Montserrat"/>
+              <a:ea typeface="Montserrat"/>
+              <a:cs typeface="Montserrat"/>
+              <a:sym typeface="Montserrat"/>
+            </a:endParaRPr>
+          </a:p>
+        </p:txBody>
+      </p:sp>
+      <p:pic>
+        <p:nvPicPr>
+          <p:cNvPr descr="logo_navy.png" id="60" name="Google Shape;60;p15"/>
+          <p:cNvPicPr preferRelativeResize="0"/>
+          <p:nvPr/>
+        </p:nvPicPr>
+        <p:blipFill rotWithShape="1">
+          <a:blip r:embed="rId2">
+            <a:alphaModFix/>
+          </a:blip>
+          <a:srcRect b="0" l="0" r="0" t="0"/>
+          <a:stretch/>
+        </p:blipFill>
+        <p:spPr>
+          <a:xfrm>
+            <a:off x="7353846" y="399609"/>
             <a:ext cx="1228039" cy="245059"/>
           </a:xfrm>
           <a:prstGeom prst="rect">
@@ -9258,6 +9410,722 @@
 </p:sldMaster>
 </file>
 
+<file path=ppt/slideMasters/slideMaster2.xml><?xml version="1.0" encoding="utf-8"?>
+<p:sldMaster xmlns:a="http://schemas.openxmlformats.org/drawingml/2006/main" xmlns:r="http://schemas.openxmlformats.org/officeDocument/2006/relationships" xmlns:mc="http://schemas.openxmlformats.org/markup-compatibility/2006" xmlns:mv="urn:schemas-microsoft-com:mac:vml" xmlns:p="http://schemas.openxmlformats.org/presentationml/2006/main" xmlns:c="http://schemas.openxmlformats.org/drawingml/2006/chart" xmlns:dgm="http://schemas.openxmlformats.org/drawingml/2006/diagram" xmlns:o="urn:schemas-microsoft-com:office:office" xmlns:v="urn:schemas-microsoft-com:vml" xmlns:pvml="urn:schemas-microsoft-com:office:powerpoint" xmlns:com="http://schemas.openxmlformats.org/drawingml/2006/compatibility" xmlns:p14="http://schemas.microsoft.com/office/powerpoint/2010/main" xmlns:p15="http://schemas.microsoft.com/office/powerpoint/2012/main" xmlns:ahyp="http://schemas.microsoft.com/office/drawing/2018/hyperlinkcolor">
+  <p:cSld>
+    <p:spTree>
+      <p:nvGrpSpPr>
+        <p:cNvPr id="57" name="Shape 57"/>
+        <p:cNvGrpSpPr/>
+        <p:nvPr/>
+      </p:nvGrpSpPr>
+      <p:grpSpPr>
+        <a:xfrm>
+          <a:off x="0" y="0"/>
+          <a:ext cx="0" cy="0"/>
+          <a:chOff x="0" y="0"/>
+          <a:chExt cx="0" cy="0"/>
+        </a:xfrm>
+      </p:grpSpPr>
+    </p:spTree>
+  </p:cSld>
+  <p:clrMap accent1="accent1" accent2="accent2" accent3="accent3" accent4="accent4" accent5="accent5" accent6="accent6" bg1="lt1" bg2="dk2" tx1="dk1" tx2="lt2" folHlink="folHlink" hlink="hlink"/>
+  <p:sldLayoutIdLst>
+    <p:sldLayoutId id="2147483660" r:id="rId1"/>
+  </p:sldLayoutIdLst>
+  <p:hf dt="0" ftr="0" hdr="0" sldNum="0"/>
+  <p:txStyles>
+    <p:titleStyle>
+      <a:defPPr lvl="0" marR="0" rtl="0" algn="l">
+        <a:lnSpc>
+          <a:spcPct val="100000"/>
+        </a:lnSpc>
+        <a:spcBef>
+          <a:spcPts val="0"/>
+        </a:spcBef>
+        <a:spcAft>
+          <a:spcPts val="0"/>
+        </a:spcAft>
+      </a:defPPr>
+      <a:lvl1pPr lvl="0" marR="0" rtl="0" algn="l">
+        <a:lnSpc>
+          <a:spcPct val="100000"/>
+        </a:lnSpc>
+        <a:spcBef>
+          <a:spcPts val="0"/>
+        </a:spcBef>
+        <a:spcAft>
+          <a:spcPts val="0"/>
+        </a:spcAft>
+        <a:buClr>
+          <a:srgbClr val="000000"/>
+        </a:buClr>
+        <a:buFont typeface="Arial"/>
+        <a:defRPr b="0" i="0" spc="0" sz="1400" u="none" cap="none" strike="noStrike">
+          <a:solidFill>
+            <a:srgbClr val="000000"/>
+          </a:solidFill>
+          <a:latin typeface="Arial"/>
+          <a:ea typeface="Arial"/>
+          <a:cs typeface="Arial"/>
+          <a:sym typeface="Arial"/>
+        </a:defRPr>
+      </a:lvl1pPr>
+      <a:lvl2pPr lvl="1" marR="0" rtl="0" algn="l">
+        <a:lnSpc>
+          <a:spcPct val="100000"/>
+        </a:lnSpc>
+        <a:spcBef>
+          <a:spcPts val="0"/>
+        </a:spcBef>
+        <a:spcAft>
+          <a:spcPts val="0"/>
+        </a:spcAft>
+        <a:buClr>
+          <a:srgbClr val="000000"/>
+        </a:buClr>
+        <a:buFont typeface="Arial"/>
+        <a:defRPr b="0" i="0" spc="0" sz="1400" u="none" cap="none" strike="noStrike">
+          <a:solidFill>
+            <a:srgbClr val="000000"/>
+          </a:solidFill>
+          <a:latin typeface="Arial"/>
+          <a:ea typeface="Arial"/>
+          <a:cs typeface="Arial"/>
+          <a:sym typeface="Arial"/>
+        </a:defRPr>
+      </a:lvl2pPr>
+      <a:lvl3pPr lvl="2" marR="0" rtl="0" algn="l">
+        <a:lnSpc>
+          <a:spcPct val="100000"/>
+        </a:lnSpc>
+        <a:spcBef>
+          <a:spcPts val="0"/>
+        </a:spcBef>
+        <a:spcAft>
+          <a:spcPts val="0"/>
+        </a:spcAft>
+        <a:buClr>
+          <a:srgbClr val="000000"/>
+        </a:buClr>
+        <a:buFont typeface="Arial"/>
+        <a:defRPr b="0" i="0" spc="0" sz="1400" u="none" cap="none" strike="noStrike">
+          <a:solidFill>
+            <a:srgbClr val="000000"/>
+          </a:solidFill>
+          <a:latin typeface="Arial"/>
+          <a:ea typeface="Arial"/>
+          <a:cs typeface="Arial"/>
+          <a:sym typeface="Arial"/>
+        </a:defRPr>
+      </a:lvl3pPr>
+      <a:lvl4pPr lvl="3" marR="0" rtl="0" algn="l">
+        <a:lnSpc>
+          <a:spcPct val="100000"/>
+        </a:lnSpc>
+        <a:spcBef>
+          <a:spcPts val="0"/>
+        </a:spcBef>
+        <a:spcAft>
+          <a:spcPts val="0"/>
+        </a:spcAft>
+        <a:buClr>
+          <a:srgbClr val="000000"/>
+        </a:buClr>
+        <a:buFont typeface="Arial"/>
+        <a:defRPr b="0" i="0" spc="0" sz="1400" u="none" cap="none" strike="noStrike">
+          <a:solidFill>
+            <a:srgbClr val="000000"/>
+          </a:solidFill>
+          <a:latin typeface="Arial"/>
+          <a:ea typeface="Arial"/>
+          <a:cs typeface="Arial"/>
+          <a:sym typeface="Arial"/>
+        </a:defRPr>
+      </a:lvl4pPr>
+      <a:lvl5pPr lvl="4" marR="0" rtl="0" algn="l">
+        <a:lnSpc>
+          <a:spcPct val="100000"/>
+        </a:lnSpc>
+        <a:spcBef>
+          <a:spcPts val="0"/>
+        </a:spcBef>
+        <a:spcAft>
+          <a:spcPts val="0"/>
+        </a:spcAft>
+        <a:buClr>
+          <a:srgbClr val="000000"/>
+        </a:buClr>
+        <a:buFont typeface="Arial"/>
+        <a:defRPr b="0" i="0" spc="0" sz="1400" u="none" cap="none" strike="noStrike">
+          <a:solidFill>
+            <a:srgbClr val="000000"/>
+          </a:solidFill>
+          <a:latin typeface="Arial"/>
+          <a:ea typeface="Arial"/>
+          <a:cs typeface="Arial"/>
+          <a:sym typeface="Arial"/>
+        </a:defRPr>
+      </a:lvl5pPr>
+      <a:lvl6pPr lvl="5" marR="0" rtl="0" algn="l">
+        <a:lnSpc>
+          <a:spcPct val="100000"/>
+        </a:lnSpc>
+        <a:spcBef>
+          <a:spcPts val="0"/>
+        </a:spcBef>
+        <a:spcAft>
+          <a:spcPts val="0"/>
+        </a:spcAft>
+        <a:buClr>
+          <a:srgbClr val="000000"/>
+        </a:buClr>
+        <a:buFont typeface="Arial"/>
+        <a:defRPr b="0" i="0" spc="0" sz="1400" u="none" cap="none" strike="noStrike">
+          <a:solidFill>
+            <a:srgbClr val="000000"/>
+          </a:solidFill>
+          <a:latin typeface="Arial"/>
+          <a:ea typeface="Arial"/>
+          <a:cs typeface="Arial"/>
+          <a:sym typeface="Arial"/>
+        </a:defRPr>
+      </a:lvl6pPr>
+      <a:lvl7pPr lvl="6" marR="0" rtl="0" algn="l">
+        <a:lnSpc>
+          <a:spcPct val="100000"/>
+        </a:lnSpc>
+        <a:spcBef>
+          <a:spcPts val="0"/>
+        </a:spcBef>
+        <a:spcAft>
+          <a:spcPts val="0"/>
+        </a:spcAft>
+        <a:buClr>
+          <a:srgbClr val="000000"/>
+        </a:buClr>
+        <a:buFont typeface="Arial"/>
+        <a:defRPr b="0" i="0" spc="0" sz="1400" u="none" cap="none" strike="noStrike">
+          <a:solidFill>
+            <a:srgbClr val="000000"/>
+          </a:solidFill>
+          <a:latin typeface="Arial"/>
+          <a:ea typeface="Arial"/>
+          <a:cs typeface="Arial"/>
+          <a:sym typeface="Arial"/>
+        </a:defRPr>
+      </a:lvl7pPr>
+      <a:lvl8pPr lvl="7" marR="0" rtl="0" algn="l">
+        <a:lnSpc>
+          <a:spcPct val="100000"/>
+        </a:lnSpc>
+        <a:spcBef>
+          <a:spcPts val="0"/>
+        </a:spcBef>
+        <a:spcAft>
+          <a:spcPts val="0"/>
+        </a:spcAft>
+        <a:buClr>
+          <a:srgbClr val="000000"/>
+        </a:buClr>
+        <a:buFont typeface="Arial"/>
+        <a:defRPr b="0" i="0" spc="0" sz="1400" u="none" cap="none" strike="noStrike">
+          <a:solidFill>
+            <a:srgbClr val="000000"/>
+          </a:solidFill>
+          <a:latin typeface="Arial"/>
+          <a:ea typeface="Arial"/>
+          <a:cs typeface="Arial"/>
+          <a:sym typeface="Arial"/>
+        </a:defRPr>
+      </a:lvl8pPr>
+      <a:lvl9pPr lvl="8" marR="0" rtl="0" algn="l">
+        <a:lnSpc>
+          <a:spcPct val="100000"/>
+        </a:lnSpc>
+        <a:spcBef>
+          <a:spcPts val="0"/>
+        </a:spcBef>
+        <a:spcAft>
+          <a:spcPts val="0"/>
+        </a:spcAft>
+        <a:buClr>
+          <a:srgbClr val="000000"/>
+        </a:buClr>
+        <a:buFont typeface="Arial"/>
+        <a:defRPr b="0" i="0" spc="0" sz="1400" u="none" cap="none" strike="noStrike">
+          <a:solidFill>
+            <a:srgbClr val="000000"/>
+          </a:solidFill>
+          <a:latin typeface="Arial"/>
+          <a:ea typeface="Arial"/>
+          <a:cs typeface="Arial"/>
+          <a:sym typeface="Arial"/>
+        </a:defRPr>
+      </a:lvl9pPr>
+    </p:titleStyle>
+    <p:bodyStyle>
+      <a:defPPr lvl="0" marR="0" rtl="0" algn="l">
+        <a:lnSpc>
+          <a:spcPct val="100000"/>
+        </a:lnSpc>
+        <a:spcBef>
+          <a:spcPts val="0"/>
+        </a:spcBef>
+        <a:spcAft>
+          <a:spcPts val="0"/>
+        </a:spcAft>
+      </a:defPPr>
+      <a:lvl1pPr lvl="0" marR="0" rtl="0" algn="l">
+        <a:lnSpc>
+          <a:spcPct val="100000"/>
+        </a:lnSpc>
+        <a:spcBef>
+          <a:spcPts val="0"/>
+        </a:spcBef>
+        <a:spcAft>
+          <a:spcPts val="0"/>
+        </a:spcAft>
+        <a:buClr>
+          <a:srgbClr val="000000"/>
+        </a:buClr>
+        <a:buFont typeface="Arial"/>
+        <a:defRPr b="0" i="0" spc="0" sz="1400" u="none" cap="none" strike="noStrike">
+          <a:solidFill>
+            <a:srgbClr val="000000"/>
+          </a:solidFill>
+          <a:latin typeface="Arial"/>
+          <a:ea typeface="Arial"/>
+          <a:cs typeface="Arial"/>
+          <a:sym typeface="Arial"/>
+        </a:defRPr>
+      </a:lvl1pPr>
+      <a:lvl2pPr lvl="1" marR="0" rtl="0" algn="l">
+        <a:lnSpc>
+          <a:spcPct val="100000"/>
+        </a:lnSpc>
+        <a:spcBef>
+          <a:spcPts val="0"/>
+        </a:spcBef>
+        <a:spcAft>
+          <a:spcPts val="0"/>
+        </a:spcAft>
+        <a:buClr>
+          <a:srgbClr val="000000"/>
+        </a:buClr>
+        <a:buFont typeface="Arial"/>
+        <a:defRPr b="0" i="0" spc="0" sz="1400" u="none" cap="none" strike="noStrike">
+          <a:solidFill>
+            <a:srgbClr val="000000"/>
+          </a:solidFill>
+          <a:latin typeface="Arial"/>
+          <a:ea typeface="Arial"/>
+          <a:cs typeface="Arial"/>
+          <a:sym typeface="Arial"/>
+        </a:defRPr>
+      </a:lvl2pPr>
+      <a:lvl3pPr lvl="2" marR="0" rtl="0" algn="l">
+        <a:lnSpc>
+          <a:spcPct val="100000"/>
+        </a:lnSpc>
+        <a:spcBef>
+          <a:spcPts val="0"/>
+        </a:spcBef>
+        <a:spcAft>
+          <a:spcPts val="0"/>
+        </a:spcAft>
+        <a:buClr>
+          <a:srgbClr val="000000"/>
+        </a:buClr>
+        <a:buFont typeface="Arial"/>
+        <a:defRPr b="0" i="0" spc="0" sz="1400" u="none" cap="none" strike="noStrike">
+          <a:solidFill>
+            <a:srgbClr val="000000"/>
+          </a:solidFill>
+          <a:latin typeface="Arial"/>
+          <a:ea typeface="Arial"/>
+          <a:cs typeface="Arial"/>
+          <a:sym typeface="Arial"/>
+        </a:defRPr>
+      </a:lvl3pPr>
+      <a:lvl4pPr lvl="3" marR="0" rtl="0" algn="l">
+        <a:lnSpc>
+          <a:spcPct val="100000"/>
+        </a:lnSpc>
+        <a:spcBef>
+          <a:spcPts val="0"/>
+        </a:spcBef>
+        <a:spcAft>
+          <a:spcPts val="0"/>
+        </a:spcAft>
+        <a:buClr>
+          <a:srgbClr val="000000"/>
+        </a:buClr>
+        <a:buFont typeface="Arial"/>
+        <a:defRPr b="0" i="0" spc="0" sz="1400" u="none" cap="none" strike="noStrike">
+          <a:solidFill>
+            <a:srgbClr val="000000"/>
+          </a:solidFill>
+          <a:latin typeface="Arial"/>
+          <a:ea typeface="Arial"/>
+          <a:cs typeface="Arial"/>
+          <a:sym typeface="Arial"/>
+        </a:defRPr>
+      </a:lvl4pPr>
+      <a:lvl5pPr lvl="4" marR="0" rtl="0" algn="l">
+        <a:lnSpc>
+          <a:spcPct val="100000"/>
+        </a:lnSpc>
+        <a:spcBef>
+          <a:spcPts val="0"/>
+        </a:spcBef>
+        <a:spcAft>
+          <a:spcPts val="0"/>
+        </a:spcAft>
+        <a:buClr>
+          <a:srgbClr val="000000"/>
+        </a:buClr>
+        <a:buFont typeface="Arial"/>
+        <a:defRPr b="0" i="0" spc="0" sz="1400" u="none" cap="none" strike="noStrike">
+          <a:solidFill>
+            <a:srgbClr val="000000"/>
+          </a:solidFill>
+          <a:latin typeface="Arial"/>
+          <a:ea typeface="Arial"/>
+          <a:cs typeface="Arial"/>
+          <a:sym typeface="Arial"/>
+        </a:defRPr>
+      </a:lvl5pPr>
+      <a:lvl6pPr lvl="5" marR="0" rtl="0" algn="l">
+        <a:lnSpc>
+          <a:spcPct val="100000"/>
+        </a:lnSpc>
+        <a:spcBef>
+          <a:spcPts val="0"/>
+        </a:spcBef>
+        <a:spcAft>
+          <a:spcPts val="0"/>
+        </a:spcAft>
+        <a:buClr>
+          <a:srgbClr val="000000"/>
+        </a:buClr>
+        <a:buFont typeface="Arial"/>
+        <a:defRPr b="0" i="0" spc="0" sz="1400" u="none" cap="none" strike="noStrike">
+          <a:solidFill>
+            <a:srgbClr val="000000"/>
+          </a:solidFill>
+          <a:latin typeface="Arial"/>
+          <a:ea typeface="Arial"/>
+          <a:cs typeface="Arial"/>
+          <a:sym typeface="Arial"/>
+        </a:defRPr>
+      </a:lvl6pPr>
+      <a:lvl7pPr lvl="6" marR="0" rtl="0" algn="l">
+        <a:lnSpc>
+          <a:spcPct val="100000"/>
+        </a:lnSpc>
+        <a:spcBef>
+          <a:spcPts val="0"/>
+        </a:spcBef>
+        <a:spcAft>
+          <a:spcPts val="0"/>
+        </a:spcAft>
+        <a:buClr>
+          <a:srgbClr val="000000"/>
+        </a:buClr>
+        <a:buFont typeface="Arial"/>
+        <a:defRPr b="0" i="0" spc="0" sz="1400" u="none" cap="none" strike="noStrike">
+          <a:solidFill>
+            <a:srgbClr val="000000"/>
+          </a:solidFill>
+          <a:latin typeface="Arial"/>
+          <a:ea typeface="Arial"/>
+          <a:cs typeface="Arial"/>
+          <a:sym typeface="Arial"/>
+        </a:defRPr>
+      </a:lvl7pPr>
+      <a:lvl8pPr lvl="7" marR="0" rtl="0" algn="l">
+        <a:lnSpc>
+          <a:spcPct val="100000"/>
+        </a:lnSpc>
+        <a:spcBef>
+          <a:spcPts val="0"/>
+        </a:spcBef>
+        <a:spcAft>
+          <a:spcPts val="0"/>
+        </a:spcAft>
+        <a:buClr>
+          <a:srgbClr val="000000"/>
+        </a:buClr>
+        <a:buFont typeface="Arial"/>
+        <a:defRPr b="0" i="0" spc="0" sz="1400" u="none" cap="none" strike="noStrike">
+          <a:solidFill>
+            <a:srgbClr val="000000"/>
+          </a:solidFill>
+          <a:latin typeface="Arial"/>
+          <a:ea typeface="Arial"/>
+          <a:cs typeface="Arial"/>
+          <a:sym typeface="Arial"/>
+        </a:defRPr>
+      </a:lvl8pPr>
+      <a:lvl9pPr lvl="8" marR="0" rtl="0" algn="l">
+        <a:lnSpc>
+          <a:spcPct val="100000"/>
+        </a:lnSpc>
+        <a:spcBef>
+          <a:spcPts val="0"/>
+        </a:spcBef>
+        <a:spcAft>
+          <a:spcPts val="0"/>
+        </a:spcAft>
+        <a:buClr>
+          <a:srgbClr val="000000"/>
+        </a:buClr>
+        <a:buFont typeface="Arial"/>
+        <a:defRPr b="0" i="0" spc="0" sz="1400" u="none" cap="none" strike="noStrike">
+          <a:solidFill>
+            <a:srgbClr val="000000"/>
+          </a:solidFill>
+          <a:latin typeface="Arial"/>
+          <a:ea typeface="Arial"/>
+          <a:cs typeface="Arial"/>
+          <a:sym typeface="Arial"/>
+        </a:defRPr>
+      </a:lvl9pPr>
+    </p:bodyStyle>
+    <p:otherStyle>
+      <a:defPPr lvl="0" marR="0" rtl="0" algn="l">
+        <a:lnSpc>
+          <a:spcPct val="100000"/>
+        </a:lnSpc>
+        <a:spcBef>
+          <a:spcPts val="0"/>
+        </a:spcBef>
+        <a:spcAft>
+          <a:spcPts val="0"/>
+        </a:spcAft>
+      </a:defPPr>
+      <a:lvl1pPr lvl="0" marR="0" rtl="0" algn="l">
+        <a:lnSpc>
+          <a:spcPct val="100000"/>
+        </a:lnSpc>
+        <a:spcBef>
+          <a:spcPts val="0"/>
+        </a:spcBef>
+        <a:spcAft>
+          <a:spcPts val="0"/>
+        </a:spcAft>
+        <a:buClr>
+          <a:srgbClr val="000000"/>
+        </a:buClr>
+        <a:buFont typeface="Arial"/>
+        <a:defRPr b="0" i="0" spc="0" sz="1400" u="none" cap="none" strike="noStrike">
+          <a:solidFill>
+            <a:srgbClr val="000000"/>
+          </a:solidFill>
+          <a:latin typeface="Arial"/>
+          <a:ea typeface="Arial"/>
+          <a:cs typeface="Arial"/>
+          <a:sym typeface="Arial"/>
+        </a:defRPr>
+      </a:lvl1pPr>
+      <a:lvl2pPr lvl="1" marR="0" rtl="0" algn="l">
+        <a:lnSpc>
+          <a:spcPct val="100000"/>
+        </a:lnSpc>
+        <a:spcBef>
+          <a:spcPts val="0"/>
+        </a:spcBef>
+        <a:spcAft>
+          <a:spcPts val="0"/>
+        </a:spcAft>
+        <a:buClr>
+          <a:srgbClr val="000000"/>
+        </a:buClr>
+        <a:buFont typeface="Arial"/>
+        <a:defRPr b="0" i="0" spc="0" sz="1400" u="none" cap="none" strike="noStrike">
+          <a:solidFill>
+            <a:srgbClr val="000000"/>
+          </a:solidFill>
+          <a:latin typeface="Arial"/>
+          <a:ea typeface="Arial"/>
+          <a:cs typeface="Arial"/>
+          <a:sym typeface="Arial"/>
+        </a:defRPr>
+      </a:lvl2pPr>
+      <a:lvl3pPr lvl="2" marR="0" rtl="0" algn="l">
+        <a:lnSpc>
+          <a:spcPct val="100000"/>
+        </a:lnSpc>
+        <a:spcBef>
+          <a:spcPts val="0"/>
+        </a:spcBef>
+        <a:spcAft>
+          <a:spcPts val="0"/>
+        </a:spcAft>
+        <a:buClr>
+          <a:srgbClr val="000000"/>
+        </a:buClr>
+        <a:buFont typeface="Arial"/>
+        <a:defRPr b="0" i="0" spc="0" sz="1400" u="none" cap="none" strike="noStrike">
+          <a:solidFill>
+            <a:srgbClr val="000000"/>
+          </a:solidFill>
+          <a:latin typeface="Arial"/>
+          <a:ea typeface="Arial"/>
+          <a:cs typeface="Arial"/>
+          <a:sym typeface="Arial"/>
+        </a:defRPr>
+      </a:lvl3pPr>
+      <a:lvl4pPr lvl="3" marR="0" rtl="0" algn="l">
+        <a:lnSpc>
+          <a:spcPct val="100000"/>
+        </a:lnSpc>
+        <a:spcBef>
+          <a:spcPts val="0"/>
+        </a:spcBef>
+        <a:spcAft>
+          <a:spcPts val="0"/>
+        </a:spcAft>
+        <a:buClr>
+          <a:srgbClr val="000000"/>
+        </a:buClr>
+        <a:buFont typeface="Arial"/>
+        <a:defRPr b="0" i="0" spc="0" sz="1400" u="none" cap="none" strike="noStrike">
+          <a:solidFill>
+            <a:srgbClr val="000000"/>
+          </a:solidFill>
+          <a:latin typeface="Arial"/>
+          <a:ea typeface="Arial"/>
+          <a:cs typeface="Arial"/>
+          <a:sym typeface="Arial"/>
+        </a:defRPr>
+      </a:lvl4pPr>
+      <a:lvl5pPr lvl="4" marR="0" rtl="0" algn="l">
+        <a:lnSpc>
+          <a:spcPct val="100000"/>
+        </a:lnSpc>
+        <a:spcBef>
+          <a:spcPts val="0"/>
+        </a:spcBef>
+        <a:spcAft>
+          <a:spcPts val="0"/>
+        </a:spcAft>
+        <a:buClr>
+          <a:srgbClr val="000000"/>
+        </a:buClr>
+        <a:buFont typeface="Arial"/>
+        <a:defRPr b="0" i="0" spc="0" sz="1400" u="none" cap="none" strike="noStrike">
+          <a:solidFill>
+            <a:srgbClr val="000000"/>
+          </a:solidFill>
+          <a:latin typeface="Arial"/>
+          <a:ea typeface="Arial"/>
+          <a:cs typeface="Arial"/>
+          <a:sym typeface="Arial"/>
+        </a:defRPr>
+      </a:lvl5pPr>
+      <a:lvl6pPr lvl="5" marR="0" rtl="0" algn="l">
+        <a:lnSpc>
+          <a:spcPct val="100000"/>
+        </a:lnSpc>
+        <a:spcBef>
+          <a:spcPts val="0"/>
+        </a:spcBef>
+        <a:spcAft>
+          <a:spcPts val="0"/>
+        </a:spcAft>
+        <a:buClr>
+          <a:srgbClr val="000000"/>
+        </a:buClr>
+        <a:buFont typeface="Arial"/>
+        <a:defRPr b="0" i="0" spc="0" sz="1400" u="none" cap="none" strike="noStrike">
+          <a:solidFill>
+            <a:srgbClr val="000000"/>
+          </a:solidFill>
+          <a:latin typeface="Arial"/>
+          <a:ea typeface="Arial"/>
+          <a:cs typeface="Arial"/>
+          <a:sym typeface="Arial"/>
+        </a:defRPr>
+      </a:lvl6pPr>
+      <a:lvl7pPr lvl="6" marR="0" rtl="0" algn="l">
+        <a:lnSpc>
+          <a:spcPct val="100000"/>
+        </a:lnSpc>
+        <a:spcBef>
+          <a:spcPts val="0"/>
+        </a:spcBef>
+        <a:spcAft>
+          <a:spcPts val="0"/>
+        </a:spcAft>
+        <a:buClr>
+          <a:srgbClr val="000000"/>
+        </a:buClr>
+        <a:buFont typeface="Arial"/>
+        <a:defRPr b="0" i="0" spc="0" sz="1400" u="none" cap="none" strike="noStrike">
+          <a:solidFill>
+            <a:srgbClr val="000000"/>
+          </a:solidFill>
+          <a:latin typeface="Arial"/>
+          <a:ea typeface="Arial"/>
+          <a:cs typeface="Arial"/>
+          <a:sym typeface="Arial"/>
+        </a:defRPr>
+      </a:lvl7pPr>
+      <a:lvl8pPr lvl="7" marR="0" rtl="0" algn="l">
+        <a:lnSpc>
+          <a:spcPct val="100000"/>
+        </a:lnSpc>
+        <a:spcBef>
+          <a:spcPts val="0"/>
+        </a:spcBef>
+        <a:spcAft>
+          <a:spcPts val="0"/>
+        </a:spcAft>
+        <a:buClr>
+          <a:srgbClr val="000000"/>
+        </a:buClr>
+        <a:buFont typeface="Arial"/>
+        <a:defRPr b="0" i="0" spc="0" sz="1400" u="none" cap="none" strike="noStrike">
+          <a:solidFill>
+            <a:srgbClr val="000000"/>
+          </a:solidFill>
+          <a:latin typeface="Arial"/>
+          <a:ea typeface="Arial"/>
+          <a:cs typeface="Arial"/>
+          <a:sym typeface="Arial"/>
+        </a:defRPr>
+      </a:lvl8pPr>
+      <a:lvl9pPr lvl="8" marR="0" rtl="0" algn="l">
+        <a:lnSpc>
+          <a:spcPct val="100000"/>
+        </a:lnSpc>
+        <a:spcBef>
+          <a:spcPts val="0"/>
+        </a:spcBef>
+        <a:spcAft>
+          <a:spcPts val="0"/>
+        </a:spcAft>
+        <a:buClr>
+          <a:srgbClr val="000000"/>
+        </a:buClr>
+        <a:buFont typeface="Arial"/>
+        <a:defRPr b="0" i="0" spc="0" sz="1400" u="none" cap="none" strike="noStrike">
+          <a:solidFill>
+            <a:srgbClr val="000000"/>
+          </a:solidFill>
+          <a:latin typeface="Arial"/>
+          <a:ea typeface="Arial"/>
+          <a:cs typeface="Arial"/>
+          <a:sym typeface="Arial"/>
+        </a:defRPr>
+      </a:lvl9pPr>
+    </p:otherStyle>
+  </p:txStyles>
+</p:sldMaster>
+</file>
+
 <file path=ppt/slides/slide1.xml><?xml version="1.0" encoding="utf-8"?>
 <p:sld xmlns:a="http://schemas.openxmlformats.org/drawingml/2006/main" xmlns:r="http://schemas.openxmlformats.org/officeDocument/2006/relationships" xmlns:mc="http://schemas.openxmlformats.org/markup-compatibility/2006" xmlns:mv="urn:schemas-microsoft-com:mac:vml" xmlns:p="http://schemas.openxmlformats.org/presentationml/2006/main" xmlns:c="http://schemas.openxmlformats.org/drawingml/2006/chart" xmlns:dgm="http://schemas.openxmlformats.org/drawingml/2006/diagram" xmlns:o="urn:schemas-microsoft-com:office:office" xmlns:v="urn:schemas-microsoft-com:vml" xmlns:pvml="urn:schemas-microsoft-com:office:powerpoint" xmlns:com="http://schemas.openxmlformats.org/drawingml/2006/compatibility" xmlns:p14="http://schemas.microsoft.com/office/powerpoint/2010/main" xmlns:p15="http://schemas.microsoft.com/office/powerpoint/2012/main" xmlns:ahyp="http://schemas.microsoft.com/office/drawing/2018/hyperlinkcolor">
   <p:cSld>
@@ -9270,7 +10138,7 @@
     </p:bg>
     <p:spTree>
       <p:nvGrpSpPr>
-        <p:cNvPr id="61" name="Shape 61"/>
+        <p:cNvPr id="65" name="Shape 65"/>
         <p:cNvGrpSpPr/>
         <p:nvPr/>
       </p:nvGrpSpPr>
@@ -9284,7 +10152,7 @@
       </p:grpSpPr>
       <p:pic>
         <p:nvPicPr>
-          <p:cNvPr descr="bg-dark-glow.png" id="62" name="Google Shape;62;p14"/>
+          <p:cNvPr descr="bg-dark-glow.png" id="66" name="Google Shape;66;p16"/>
           <p:cNvPicPr preferRelativeResize="0"/>
           <p:nvPr/>
         </p:nvPicPr>
@@ -9311,7 +10179,7 @@
       </p:pic>
       <p:pic>
         <p:nvPicPr>
-          <p:cNvPr descr="neo-logo-25-white.png" id="63" name="Google Shape;63;p14"/>
+          <p:cNvPr descr="neo-logo-25-white.png" id="67" name="Google Shape;67;p16"/>
           <p:cNvPicPr preferRelativeResize="0"/>
           <p:nvPr/>
         </p:nvPicPr>
@@ -9338,7 +10206,7 @@
       </p:pic>
       <p:sp>
         <p:nvSpPr>
-          <p:cNvPr id="64" name="Google Shape;64;p14"/>
+          <p:cNvPr id="68" name="Google Shape;68;p16"/>
           <p:cNvSpPr txBox="1"/>
           <p:nvPr/>
         </p:nvSpPr>
@@ -9404,7 +10272,7 @@
       </p:sp>
       <p:sp>
         <p:nvSpPr>
-          <p:cNvPr id="65" name="Google Shape;65;p14"/>
+          <p:cNvPr id="69" name="Google Shape;69;p16"/>
           <p:cNvSpPr txBox="1"/>
           <p:nvPr/>
         </p:nvSpPr>
@@ -9470,7 +10338,7 @@
       </p:sp>
       <p:sp>
         <p:nvSpPr>
-          <p:cNvPr id="66" name="Google Shape;66;p14"/>
+          <p:cNvPr id="70" name="Google Shape;70;p16"/>
           <p:cNvSpPr txBox="1"/>
           <p:nvPr/>
         </p:nvSpPr>
@@ -9545,9 +10413,24 @@
 <file path=ppt/slides/slide10.xml><?xml version="1.0" encoding="utf-8"?>
 <p:sld xmlns:a="http://schemas.openxmlformats.org/drawingml/2006/main" xmlns:r="http://schemas.openxmlformats.org/officeDocument/2006/relationships" xmlns:mc="http://schemas.openxmlformats.org/markup-compatibility/2006" xmlns:mv="urn:schemas-microsoft-com:mac:vml" xmlns:p="http://schemas.openxmlformats.org/presentationml/2006/main" xmlns:c="http://schemas.openxmlformats.org/drawingml/2006/chart" xmlns:dgm="http://schemas.openxmlformats.org/drawingml/2006/diagram" xmlns:o="urn:schemas-microsoft-com:office:office" xmlns:v="urn:schemas-microsoft-com:vml" xmlns:pvml="urn:schemas-microsoft-com:office:powerpoint" xmlns:com="http://schemas.openxmlformats.org/drawingml/2006/compatibility" xmlns:p14="http://schemas.microsoft.com/office/powerpoint/2010/main" xmlns:p15="http://schemas.microsoft.com/office/powerpoint/2012/main" xmlns:ahyp="http://schemas.microsoft.com/office/drawing/2018/hyperlinkcolor">
   <p:cSld>
+    <p:bg>
+      <p:bgPr>
+        <a:gradFill>
+          <a:gsLst>
+            <a:gs pos="0">
+              <a:schemeClr val="lt1"/>
+            </a:gs>
+            <a:gs pos="100000">
+              <a:srgbClr val="EEF3FF"/>
+            </a:gs>
+          </a:gsLst>
+          <a:lin ang="16198662" scaled="0"/>
+        </a:gradFill>
+      </p:bgPr>
+    </p:bg>
     <p:spTree>
       <p:nvGrpSpPr>
-        <p:cNvPr id="195" name="Shape 195"/>
+        <p:cNvPr id="199" name="Shape 199"/>
         <p:cNvGrpSpPr/>
         <p:nvPr/>
       </p:nvGrpSpPr>
@@ -9561,14 +10444,14 @@
       </p:grpSpPr>
       <p:sp>
         <p:nvSpPr>
-          <p:cNvPr id="196" name="Google Shape;196;p23"/>
+          <p:cNvPr id="200" name="Google Shape;200;p25"/>
           <p:cNvSpPr txBox="1"/>
           <p:nvPr/>
         </p:nvSpPr>
         <p:spPr>
           <a:xfrm>
-            <a:off x="571500" y="850900"/>
-            <a:ext cx="8001000" cy="193040"/>
+            <a:off x="571500" y="413925"/>
+            <a:ext cx="8001000" cy="192900"/>
           </a:xfrm>
           <a:prstGeom prst="rect">
             <a:avLst/>
@@ -9627,14 +10510,14 @@
       </p:sp>
       <p:sp>
         <p:nvSpPr>
-          <p:cNvPr id="197" name="Google Shape;197;p23"/>
+          <p:cNvPr id="201" name="Google Shape;201;p25"/>
           <p:cNvSpPr txBox="1"/>
           <p:nvPr/>
         </p:nvSpPr>
         <p:spPr>
           <a:xfrm>
-            <a:off x="571500" y="1088390"/>
-            <a:ext cx="8001000" cy="328930"/>
+            <a:off x="571500" y="730390"/>
+            <a:ext cx="8001000" cy="328800"/>
           </a:xfrm>
           <a:prstGeom prst="rect">
             <a:avLst/>
@@ -9705,13 +10588,13 @@
       </p:sp>
       <p:sp>
         <p:nvSpPr>
-          <p:cNvPr id="198" name="Google Shape;198;p23"/>
+          <p:cNvPr id="202" name="Google Shape;202;p25"/>
           <p:cNvSpPr/>
           <p:nvPr/>
         </p:nvSpPr>
         <p:spPr>
           <a:xfrm>
-            <a:off x="571500" y="1485900"/>
+            <a:off x="571500" y="1127900"/>
             <a:ext cx="3683100" cy="254100"/>
           </a:xfrm>
           <a:prstGeom prst="roundRect">
@@ -9734,7 +10617,7 @@
           <a:effectLst>
             <a:outerShdw blurRad="101600" rotWithShape="0" algn="bl" dir="5400000" dist="25400">
               <a:srgbClr val="000033">
-                <a:alpha val="10196"/>
+                <a:alpha val="10200"/>
               </a:srgbClr>
             </a:outerShdw>
           </a:effectLst>
@@ -9779,13 +10662,13 @@
       </p:sp>
       <p:sp>
         <p:nvSpPr>
-          <p:cNvPr id="199" name="Google Shape;199;p23"/>
+          <p:cNvPr id="203" name="Google Shape;203;p25"/>
           <p:cNvSpPr txBox="1"/>
           <p:nvPr/>
         </p:nvSpPr>
         <p:spPr>
           <a:xfrm>
-            <a:off x="571500" y="1517650"/>
+            <a:off x="571500" y="1159650"/>
             <a:ext cx="3683100" cy="190500"/>
           </a:xfrm>
           <a:prstGeom prst="rect">
@@ -9845,14 +10728,14 @@
       </p:sp>
       <p:sp>
         <p:nvSpPr>
-          <p:cNvPr id="200" name="Google Shape;200;p23"/>
+          <p:cNvPr id="204" name="Google Shape;204;p25"/>
           <p:cNvSpPr/>
           <p:nvPr/>
         </p:nvSpPr>
         <p:spPr>
           <a:xfrm>
-            <a:off x="571500" y="1854200"/>
-            <a:ext cx="8001000" cy="558800"/>
+            <a:off x="571500" y="1537488"/>
+            <a:ext cx="8001000" cy="771000"/>
           </a:xfrm>
           <a:prstGeom prst="roundRect">
             <a:avLst>
@@ -9905,14 +10788,14 @@
       </p:sp>
       <p:sp>
         <p:nvSpPr>
-          <p:cNvPr id="201" name="Google Shape;201;p23"/>
+          <p:cNvPr id="205" name="Google Shape;205;p25"/>
           <p:cNvSpPr txBox="1"/>
           <p:nvPr/>
         </p:nvSpPr>
         <p:spPr>
           <a:xfrm>
-            <a:off x="702600" y="1930400"/>
-            <a:ext cx="7738800" cy="406400"/>
+            <a:off x="702600" y="1642591"/>
+            <a:ext cx="7738800" cy="560700"/>
           </a:xfrm>
           <a:prstGeom prst="rect">
             <a:avLst/>
@@ -9946,7 +10829,7 @@
               <a:buNone/>
             </a:pPr>
             <a:r>
-              <a:rPr b="1" i="0" lang="en-US" sz="1000" u="none" cap="none" strike="noStrike">
+              <a:rPr b="1" i="0" lang="en-US" sz="1100" u="none" cap="none" strike="noStrike">
                 <a:solidFill>
                   <a:srgbClr val="000033"/>
                 </a:solidFill>
@@ -9958,7 +10841,7 @@
               <a:t>Objetivo del puesto: </a:t>
             </a:r>
             <a:r>
-              <a:rPr b="0" i="0" lang="en-US" sz="1000" u="none" cap="none" strike="noStrike">
+              <a:rPr b="0" i="0" lang="en-US" sz="1100" u="none" cap="none" strike="noStrike">
                 <a:solidFill>
                   <a:srgbClr val="000033"/>
                 </a:solidFill>
@@ -9969,7 +10852,7 @@
               </a:rPr>
               <a:t>xxxxxxxx (resumen del objetivo de la posición según el caso)</a:t>
             </a:r>
-            <a:endParaRPr b="0" i="0" sz="750" u="none" cap="none" strike="noStrike">
+            <a:endParaRPr b="0" i="0" sz="1100" u="none" cap="none" strike="noStrike">
               <a:solidFill>
                 <a:schemeClr val="dk1"/>
               </a:solidFill>
@@ -9998,7 +10881,7 @@
               <a:buNone/>
             </a:pPr>
             <a:r>
-              <a:rPr b="1" i="0" lang="en-US" sz="1000" u="none" cap="none" strike="noStrike">
+              <a:rPr b="1" i="0" lang="en-US" sz="1100" u="none" cap="none" strike="noStrike">
                 <a:solidFill>
                   <a:srgbClr val="000033"/>
                 </a:solidFill>
@@ -10010,7 +10893,7 @@
               <a:t>Tiempo de experiencia: </a:t>
             </a:r>
             <a:r>
-              <a:rPr b="0" i="0" lang="en-US" sz="1000" u="none" cap="none" strike="noStrike">
+              <a:rPr b="0" i="0" lang="en-US" sz="1100" u="none" cap="none" strike="noStrike">
                 <a:solidFill>
                   <a:srgbClr val="000033"/>
                 </a:solidFill>
@@ -10021,7 +10904,7 @@
               </a:rPr>
               <a:t>xxxxxxx (incluir el mínimo de años de experiencia)</a:t>
             </a:r>
-            <a:endParaRPr b="0" i="0" sz="750" u="none" cap="none" strike="noStrike">
+            <a:endParaRPr b="0" i="0" sz="1100" u="none" cap="none" strike="noStrike">
               <a:solidFill>
                 <a:schemeClr val="dk1"/>
               </a:solidFill>
@@ -10035,14 +10918,14 @@
       </p:sp>
       <p:sp>
         <p:nvSpPr>
-          <p:cNvPr id="202" name="Google Shape;202;p23"/>
+          <p:cNvPr id="206" name="Google Shape;206;p25"/>
           <p:cNvSpPr/>
           <p:nvPr/>
         </p:nvSpPr>
         <p:spPr>
           <a:xfrm>
-            <a:off x="571500" y="2540000"/>
-            <a:ext cx="2590500" cy="2209200"/>
+            <a:off x="571500" y="2418857"/>
+            <a:ext cx="2590500" cy="2481000"/>
           </a:xfrm>
           <a:prstGeom prst="roundRect">
             <a:avLst>
@@ -10095,13 +10978,13 @@
       </p:sp>
       <p:sp>
         <p:nvSpPr>
-          <p:cNvPr id="203" name="Google Shape;203;p23"/>
+          <p:cNvPr id="207" name="Google Shape;207;p25"/>
           <p:cNvSpPr txBox="1"/>
           <p:nvPr/>
         </p:nvSpPr>
         <p:spPr>
           <a:xfrm>
-            <a:off x="754380" y="2692400"/>
+            <a:off x="754380" y="2571257"/>
             <a:ext cx="2224800" cy="190500"/>
           </a:xfrm>
           <a:prstGeom prst="rect">
@@ -10161,13 +11044,13 @@
       </p:sp>
       <p:sp>
         <p:nvSpPr>
-          <p:cNvPr id="204" name="Google Shape;204;p23"/>
+          <p:cNvPr id="208" name="Google Shape;208;p25"/>
           <p:cNvSpPr/>
           <p:nvPr/>
         </p:nvSpPr>
         <p:spPr>
           <a:xfrm>
-            <a:off x="754380" y="2933700"/>
+            <a:off x="754380" y="2812557"/>
             <a:ext cx="2224800" cy="7200"/>
           </a:xfrm>
           <a:prstGeom prst="rect">
@@ -10226,14 +11109,14 @@
       </p:sp>
       <p:sp>
         <p:nvSpPr>
-          <p:cNvPr id="205" name="Google Shape;205;p23"/>
+          <p:cNvPr id="209" name="Google Shape;209;p25"/>
           <p:cNvSpPr/>
           <p:nvPr/>
         </p:nvSpPr>
         <p:spPr>
           <a:xfrm>
-            <a:off x="3276749" y="2540000"/>
-            <a:ext cx="2590500" cy="2209200"/>
+            <a:off x="3276749" y="2418857"/>
+            <a:ext cx="2590500" cy="2481000"/>
           </a:xfrm>
           <a:prstGeom prst="roundRect">
             <a:avLst>
@@ -10286,13 +11169,13 @@
       </p:sp>
       <p:sp>
         <p:nvSpPr>
-          <p:cNvPr id="206" name="Google Shape;206;p23"/>
+          <p:cNvPr id="210" name="Google Shape;210;p25"/>
           <p:cNvSpPr txBox="1"/>
           <p:nvPr/>
         </p:nvSpPr>
         <p:spPr>
           <a:xfrm>
-            <a:off x="3459632" y="2692400"/>
+            <a:off x="3459632" y="2571257"/>
             <a:ext cx="2224800" cy="190500"/>
           </a:xfrm>
           <a:prstGeom prst="rect">
@@ -10352,13 +11235,13 @@
       </p:sp>
       <p:sp>
         <p:nvSpPr>
-          <p:cNvPr id="207" name="Google Shape;207;p23"/>
+          <p:cNvPr id="211" name="Google Shape;211;p25"/>
           <p:cNvSpPr/>
           <p:nvPr/>
         </p:nvSpPr>
         <p:spPr>
           <a:xfrm>
-            <a:off x="3459632" y="2933700"/>
+            <a:off x="3459632" y="2812557"/>
             <a:ext cx="2224800" cy="7200"/>
           </a:xfrm>
           <a:prstGeom prst="rect">
@@ -10417,14 +11300,14 @@
       </p:sp>
       <p:sp>
         <p:nvSpPr>
-          <p:cNvPr id="208" name="Google Shape;208;p23"/>
+          <p:cNvPr id="212" name="Google Shape;212;p25"/>
           <p:cNvSpPr/>
           <p:nvPr/>
         </p:nvSpPr>
         <p:spPr>
           <a:xfrm>
-            <a:off x="5982001" y="2540000"/>
-            <a:ext cx="2590500" cy="2209200"/>
+            <a:off x="5982000" y="2418857"/>
+            <a:ext cx="2590500" cy="2481000"/>
           </a:xfrm>
           <a:prstGeom prst="roundRect">
             <a:avLst>
@@ -10477,13 +11360,13 @@
       </p:sp>
       <p:sp>
         <p:nvSpPr>
-          <p:cNvPr id="209" name="Google Shape;209;p23"/>
+          <p:cNvPr id="213" name="Google Shape;213;p25"/>
           <p:cNvSpPr txBox="1"/>
           <p:nvPr/>
         </p:nvSpPr>
         <p:spPr>
           <a:xfrm>
-            <a:off x="6164885" y="2692400"/>
+            <a:off x="6164885" y="2571257"/>
             <a:ext cx="2224800" cy="190500"/>
           </a:xfrm>
           <a:prstGeom prst="rect">
@@ -10543,13 +11426,13 @@
       </p:sp>
       <p:sp>
         <p:nvSpPr>
-          <p:cNvPr id="210" name="Google Shape;210;p23"/>
+          <p:cNvPr id="214" name="Google Shape;214;p25"/>
           <p:cNvSpPr/>
           <p:nvPr/>
         </p:nvSpPr>
         <p:spPr>
           <a:xfrm>
-            <a:off x="6164885" y="2933700"/>
+            <a:off x="6164885" y="2812557"/>
             <a:ext cx="2224800" cy="7200"/>
           </a:xfrm>
           <a:prstGeom prst="rect">
@@ -10608,13 +11491,13 @@
       </p:sp>
       <p:sp>
         <p:nvSpPr>
-          <p:cNvPr id="211" name="Google Shape;211;p23"/>
+          <p:cNvPr id="215" name="Google Shape;215;p25"/>
           <p:cNvSpPr txBox="1"/>
           <p:nvPr/>
         </p:nvSpPr>
         <p:spPr>
           <a:xfrm>
-            <a:off x="754375" y="2946350"/>
+            <a:off x="754375" y="2825206"/>
             <a:ext cx="2224800" cy="1219200"/>
           </a:xfrm>
           <a:prstGeom prst="rect">
@@ -10631,7 +11514,7 @@
           </a:bodyPr>
           <a:lstStyle/>
           <a:p>
-            <a:pPr indent="-152401" lvl="0" marL="180000" marR="0" rtl="0" algn="l">
+            <a:pPr indent="-165101" lvl="0" marL="180000" marR="0" rtl="0" algn="l">
               <a:lnSpc>
                 <a:spcPct val="100000"/>
               </a:lnSpc>
@@ -10644,7 +11527,7 @@
               <a:buClr>
                 <a:srgbClr val="2D5BFF"/>
               </a:buClr>
-              <a:buSzPts val="900"/>
+              <a:buSzPts val="1100"/>
               <a:buFont typeface="Montserrat"/>
               <a:buChar char="●"/>
             </a:pPr>
@@ -10660,7 +11543,7 @@
               </a:rPr>
               <a:t>xxxxx</a:t>
             </a:r>
-            <a:endParaRPr b="0" i="0" sz="900" u="none" cap="none" strike="noStrike">
+            <a:endParaRPr b="0" i="0" sz="1100" u="none" cap="none" strike="noStrike">
               <a:solidFill>
                 <a:srgbClr val="000033"/>
               </a:solidFill>
@@ -10671,7 +11554,7 @@
             </a:endParaRPr>
           </a:p>
           <a:p>
-            <a:pPr indent="-152401" lvl="0" marL="180000" marR="0" rtl="0" algn="l">
+            <a:pPr indent="-165101" lvl="0" marL="180000" marR="0" rtl="0" algn="l">
               <a:lnSpc>
                 <a:spcPct val="100000"/>
               </a:lnSpc>
@@ -10684,7 +11567,7 @@
               <a:buClr>
                 <a:srgbClr val="2D5BFF"/>
               </a:buClr>
-              <a:buSzPts val="900"/>
+              <a:buSzPts val="1100"/>
               <a:buFont typeface="Montserrat"/>
               <a:buChar char="●"/>
             </a:pPr>
@@ -10700,7 +11583,7 @@
               </a:rPr>
               <a:t>xxxxx</a:t>
             </a:r>
-            <a:endParaRPr b="0" i="0" sz="900" u="none" cap="none" strike="noStrike">
+            <a:endParaRPr b="0" i="0" sz="1100" u="none" cap="none" strike="noStrike">
               <a:solidFill>
                 <a:srgbClr val="000033"/>
               </a:solidFill>
@@ -10711,7 +11594,7 @@
             </a:endParaRPr>
           </a:p>
           <a:p>
-            <a:pPr indent="-152401" lvl="0" marL="180000" marR="0" rtl="0" algn="l">
+            <a:pPr indent="-165101" lvl="0" marL="180000" marR="0" rtl="0" algn="l">
               <a:lnSpc>
                 <a:spcPct val="100000"/>
               </a:lnSpc>
@@ -10724,7 +11607,7 @@
               <a:buClr>
                 <a:srgbClr val="2D5BFF"/>
               </a:buClr>
-              <a:buSzPts val="900"/>
+              <a:buSzPts val="1100"/>
               <a:buFont typeface="Montserrat"/>
               <a:buChar char="●"/>
             </a:pPr>
@@ -10740,7 +11623,7 @@
               </a:rPr>
               <a:t>xxxxx</a:t>
             </a:r>
-            <a:endParaRPr b="0" i="0" sz="900" u="none" cap="none" strike="noStrike">
+            <a:endParaRPr b="0" i="0" sz="1100" u="none" cap="none" strike="noStrike">
               <a:solidFill>
                 <a:srgbClr val="000033"/>
               </a:solidFill>
@@ -10751,7 +11634,7 @@
             </a:endParaRPr>
           </a:p>
           <a:p>
-            <a:pPr indent="-152401" lvl="0" marL="180000" marR="0" rtl="0" algn="l">
+            <a:pPr indent="-165101" lvl="0" marL="180000" marR="0" rtl="0" algn="l">
               <a:lnSpc>
                 <a:spcPct val="100000"/>
               </a:lnSpc>
@@ -10764,7 +11647,7 @@
               <a:buClr>
                 <a:srgbClr val="2D5BFF"/>
               </a:buClr>
-              <a:buSzPts val="900"/>
+              <a:buSzPts val="1100"/>
               <a:buFont typeface="Montserrat"/>
               <a:buChar char="●"/>
             </a:pPr>
@@ -10780,7 +11663,7 @@
               </a:rPr>
               <a:t>xxxxx</a:t>
             </a:r>
-            <a:endParaRPr b="0" i="0" sz="900" u="none" cap="none" strike="noStrike">
+            <a:endParaRPr b="0" i="0" sz="1100" u="none" cap="none" strike="noStrike">
               <a:solidFill>
                 <a:srgbClr val="000033"/>
               </a:solidFill>
@@ -10791,7 +11674,7 @@
             </a:endParaRPr>
           </a:p>
           <a:p>
-            <a:pPr indent="-152401" lvl="0" marL="180000" marR="0" rtl="0" algn="l">
+            <a:pPr indent="-165101" lvl="0" marL="180000" marR="0" rtl="0" algn="l">
               <a:lnSpc>
                 <a:spcPct val="100000"/>
               </a:lnSpc>
@@ -10804,7 +11687,7 @@
               <a:buClr>
                 <a:srgbClr val="2D5BFF"/>
               </a:buClr>
-              <a:buSzPts val="900"/>
+              <a:buSzPts val="1100"/>
               <a:buFont typeface="Montserrat"/>
               <a:buChar char="●"/>
             </a:pPr>
@@ -10820,7 +11703,7 @@
               </a:rPr>
               <a:t>xxxxx</a:t>
             </a:r>
-            <a:endParaRPr b="0" i="0" sz="900" u="none" cap="none" strike="noStrike">
+            <a:endParaRPr b="0" i="0" sz="1100" u="none" cap="none" strike="noStrike">
               <a:solidFill>
                 <a:srgbClr val="000033"/>
               </a:solidFill>
@@ -10834,13 +11717,13 @@
       </p:sp>
       <p:sp>
         <p:nvSpPr>
-          <p:cNvPr id="212" name="Google Shape;212;p23"/>
+          <p:cNvPr id="216" name="Google Shape;216;p25"/>
           <p:cNvSpPr txBox="1"/>
           <p:nvPr/>
         </p:nvSpPr>
         <p:spPr>
           <a:xfrm>
-            <a:off x="3459600" y="2946350"/>
+            <a:off x="3459600" y="2825206"/>
             <a:ext cx="2224800" cy="1219200"/>
           </a:xfrm>
           <a:prstGeom prst="rect">
@@ -10857,7 +11740,7 @@
           </a:bodyPr>
           <a:lstStyle/>
           <a:p>
-            <a:pPr indent="-152401" lvl="0" marL="180000" marR="0" rtl="0" algn="l">
+            <a:pPr indent="-165101" lvl="0" marL="180000" marR="0" rtl="0" algn="l">
               <a:lnSpc>
                 <a:spcPct val="100000"/>
               </a:lnSpc>
@@ -10870,7 +11753,7 @@
               <a:buClr>
                 <a:srgbClr val="2D5BFF"/>
               </a:buClr>
-              <a:buSzPts val="900"/>
+              <a:buSzPts val="1100"/>
               <a:buFont typeface="Montserrat"/>
               <a:buChar char="●"/>
             </a:pPr>
@@ -10886,7 +11769,7 @@
               </a:rPr>
               <a:t>xxxxx</a:t>
             </a:r>
-            <a:endParaRPr b="0" i="0" sz="900" u="none" cap="none" strike="noStrike">
+            <a:endParaRPr b="0" i="0" sz="1100" u="none" cap="none" strike="noStrike">
               <a:solidFill>
                 <a:srgbClr val="000033"/>
               </a:solidFill>
@@ -10897,7 +11780,7 @@
             </a:endParaRPr>
           </a:p>
           <a:p>
-            <a:pPr indent="-152401" lvl="0" marL="180000" marR="0" rtl="0" algn="l">
+            <a:pPr indent="-165101" lvl="0" marL="180000" marR="0" rtl="0" algn="l">
               <a:lnSpc>
                 <a:spcPct val="100000"/>
               </a:lnSpc>
@@ -10910,7 +11793,7 @@
               <a:buClr>
                 <a:srgbClr val="2D5BFF"/>
               </a:buClr>
-              <a:buSzPts val="900"/>
+              <a:buSzPts val="1100"/>
               <a:buFont typeface="Montserrat"/>
               <a:buChar char="●"/>
             </a:pPr>
@@ -10926,7 +11809,7 @@
               </a:rPr>
               <a:t>xxxxx</a:t>
             </a:r>
-            <a:endParaRPr b="0" i="0" sz="900" u="none" cap="none" strike="noStrike">
+            <a:endParaRPr b="0" i="0" sz="1100" u="none" cap="none" strike="noStrike">
               <a:solidFill>
                 <a:srgbClr val="000033"/>
               </a:solidFill>
@@ -10937,7 +11820,7 @@
             </a:endParaRPr>
           </a:p>
           <a:p>
-            <a:pPr indent="-152401" lvl="0" marL="180000" marR="0" rtl="0" algn="l">
+            <a:pPr indent="-165101" lvl="0" marL="180000" marR="0" rtl="0" algn="l">
               <a:lnSpc>
                 <a:spcPct val="100000"/>
               </a:lnSpc>
@@ -10950,7 +11833,7 @@
               <a:buClr>
                 <a:srgbClr val="2D5BFF"/>
               </a:buClr>
-              <a:buSzPts val="900"/>
+              <a:buSzPts val="1100"/>
               <a:buFont typeface="Montserrat"/>
               <a:buChar char="●"/>
             </a:pPr>
@@ -10966,7 +11849,7 @@
               </a:rPr>
               <a:t>xxxxx</a:t>
             </a:r>
-            <a:endParaRPr b="0" i="0" sz="900" u="none" cap="none" strike="noStrike">
+            <a:endParaRPr b="0" i="0" sz="1100" u="none" cap="none" strike="noStrike">
               <a:solidFill>
                 <a:srgbClr val="000033"/>
               </a:solidFill>
@@ -10977,7 +11860,7 @@
             </a:endParaRPr>
           </a:p>
           <a:p>
-            <a:pPr indent="-152401" lvl="0" marL="180000" marR="0" rtl="0" algn="l">
+            <a:pPr indent="-165101" lvl="0" marL="180000" marR="0" rtl="0" algn="l">
               <a:lnSpc>
                 <a:spcPct val="100000"/>
               </a:lnSpc>
@@ -10990,7 +11873,7 @@
               <a:buClr>
                 <a:srgbClr val="2D5BFF"/>
               </a:buClr>
-              <a:buSzPts val="900"/>
+              <a:buSzPts val="1100"/>
               <a:buFont typeface="Montserrat"/>
               <a:buChar char="●"/>
             </a:pPr>
@@ -11006,7 +11889,7 @@
               </a:rPr>
               <a:t>xxxxx</a:t>
             </a:r>
-            <a:endParaRPr b="0" i="0" sz="900" u="none" cap="none" strike="noStrike">
+            <a:endParaRPr b="0" i="0" sz="1100" u="none" cap="none" strike="noStrike">
               <a:solidFill>
                 <a:srgbClr val="000033"/>
               </a:solidFill>
@@ -11017,7 +11900,7 @@
             </a:endParaRPr>
           </a:p>
           <a:p>
-            <a:pPr indent="-152401" lvl="0" marL="180000" marR="0" rtl="0" algn="l">
+            <a:pPr indent="-165101" lvl="0" marL="180000" marR="0" rtl="0" algn="l">
               <a:lnSpc>
                 <a:spcPct val="100000"/>
               </a:lnSpc>
@@ -11030,7 +11913,7 @@
               <a:buClr>
                 <a:srgbClr val="2D5BFF"/>
               </a:buClr>
-              <a:buSzPts val="900"/>
+              <a:buSzPts val="1100"/>
               <a:buFont typeface="Montserrat"/>
               <a:buChar char="●"/>
             </a:pPr>
@@ -11046,7 +11929,7 @@
               </a:rPr>
               <a:t>xxxxx</a:t>
             </a:r>
-            <a:endParaRPr b="0" i="0" sz="900" u="none" cap="none" strike="noStrike">
+            <a:endParaRPr b="0" i="0" sz="1100" u="none" cap="none" strike="noStrike">
               <a:solidFill>
                 <a:srgbClr val="000033"/>
               </a:solidFill>
@@ -11060,13 +11943,13 @@
       </p:sp>
       <p:sp>
         <p:nvSpPr>
-          <p:cNvPr id="213" name="Google Shape;213;p23"/>
+          <p:cNvPr id="217" name="Google Shape;217;p25"/>
           <p:cNvSpPr txBox="1"/>
           <p:nvPr/>
         </p:nvSpPr>
         <p:spPr>
           <a:xfrm>
-            <a:off x="6164825" y="2946350"/>
+            <a:off x="6164825" y="2825206"/>
             <a:ext cx="2224800" cy="1219200"/>
           </a:xfrm>
           <a:prstGeom prst="rect">
@@ -11083,7 +11966,7 @@
           </a:bodyPr>
           <a:lstStyle/>
           <a:p>
-            <a:pPr indent="-152401" lvl="0" marL="180000" marR="0" rtl="0" algn="l">
+            <a:pPr indent="-165101" lvl="0" marL="180000" marR="0" rtl="0" algn="l">
               <a:lnSpc>
                 <a:spcPct val="100000"/>
               </a:lnSpc>
@@ -11096,7 +11979,7 @@
               <a:buClr>
                 <a:srgbClr val="2D5BFF"/>
               </a:buClr>
-              <a:buSzPts val="900"/>
+              <a:buSzPts val="1100"/>
               <a:buFont typeface="Montserrat"/>
               <a:buChar char="●"/>
             </a:pPr>
@@ -11112,7 +11995,7 @@
               </a:rPr>
               <a:t>xxxxx</a:t>
             </a:r>
-            <a:endParaRPr b="0" i="0" sz="900" u="none" cap="none" strike="noStrike">
+            <a:endParaRPr b="0" i="0" sz="1100" u="none" cap="none" strike="noStrike">
               <a:solidFill>
                 <a:srgbClr val="000033"/>
               </a:solidFill>
@@ -11123,7 +12006,7 @@
             </a:endParaRPr>
           </a:p>
           <a:p>
-            <a:pPr indent="-152401" lvl="0" marL="180000" marR="0" rtl="0" algn="l">
+            <a:pPr indent="-165101" lvl="0" marL="180000" marR="0" rtl="0" algn="l">
               <a:lnSpc>
                 <a:spcPct val="100000"/>
               </a:lnSpc>
@@ -11136,7 +12019,7 @@
               <a:buClr>
                 <a:srgbClr val="2D5BFF"/>
               </a:buClr>
-              <a:buSzPts val="900"/>
+              <a:buSzPts val="1100"/>
               <a:buFont typeface="Montserrat"/>
               <a:buChar char="●"/>
             </a:pPr>
@@ -11152,7 +12035,7 @@
               </a:rPr>
               <a:t>xxxxx</a:t>
             </a:r>
-            <a:endParaRPr b="0" i="0" sz="900" u="none" cap="none" strike="noStrike">
+            <a:endParaRPr b="0" i="0" sz="1100" u="none" cap="none" strike="noStrike">
               <a:solidFill>
                 <a:srgbClr val="000033"/>
               </a:solidFill>
@@ -11163,7 +12046,7 @@
             </a:endParaRPr>
           </a:p>
           <a:p>
-            <a:pPr indent="-152401" lvl="0" marL="180000" marR="0" rtl="0" algn="l">
+            <a:pPr indent="-165101" lvl="0" marL="180000" marR="0" rtl="0" algn="l">
               <a:lnSpc>
                 <a:spcPct val="100000"/>
               </a:lnSpc>
@@ -11176,7 +12059,7 @@
               <a:buClr>
                 <a:srgbClr val="2D5BFF"/>
               </a:buClr>
-              <a:buSzPts val="900"/>
+              <a:buSzPts val="1100"/>
               <a:buFont typeface="Montserrat"/>
               <a:buChar char="●"/>
             </a:pPr>
@@ -11192,7 +12075,7 @@
               </a:rPr>
               <a:t>xxxxx</a:t>
             </a:r>
-            <a:endParaRPr b="0" i="0" sz="900" u="none" cap="none" strike="noStrike">
+            <a:endParaRPr b="0" i="0" sz="1100" u="none" cap="none" strike="noStrike">
               <a:solidFill>
                 <a:srgbClr val="000033"/>
               </a:solidFill>
@@ -11203,7 +12086,7 @@
             </a:endParaRPr>
           </a:p>
           <a:p>
-            <a:pPr indent="-152401" lvl="0" marL="180000" marR="0" rtl="0" algn="l">
+            <a:pPr indent="-165101" lvl="0" marL="180000" marR="0" rtl="0" algn="l">
               <a:lnSpc>
                 <a:spcPct val="100000"/>
               </a:lnSpc>
@@ -11216,7 +12099,7 @@
               <a:buClr>
                 <a:srgbClr val="2D5BFF"/>
               </a:buClr>
-              <a:buSzPts val="900"/>
+              <a:buSzPts val="1100"/>
               <a:buFont typeface="Montserrat"/>
               <a:buChar char="●"/>
             </a:pPr>
@@ -11232,7 +12115,7 @@
               </a:rPr>
               <a:t>xxxxx</a:t>
             </a:r>
-            <a:endParaRPr b="0" i="0" sz="900" u="none" cap="none" strike="noStrike">
+            <a:endParaRPr b="0" i="0" sz="1100" u="none" cap="none" strike="noStrike">
               <a:solidFill>
                 <a:srgbClr val="000033"/>
               </a:solidFill>
@@ -11243,7 +12126,7 @@
             </a:endParaRPr>
           </a:p>
           <a:p>
-            <a:pPr indent="-152401" lvl="0" marL="180000" marR="0" rtl="0" algn="l">
+            <a:pPr indent="-165101" lvl="0" marL="180000" marR="0" rtl="0" algn="l">
               <a:lnSpc>
                 <a:spcPct val="100000"/>
               </a:lnSpc>
@@ -11256,7 +12139,7 @@
               <a:buClr>
                 <a:srgbClr val="2D5BFF"/>
               </a:buClr>
-              <a:buSzPts val="900"/>
+              <a:buSzPts val="1100"/>
               <a:buFont typeface="Montserrat"/>
               <a:buChar char="●"/>
             </a:pPr>
@@ -11272,7 +12155,7 @@
               </a:rPr>
               <a:t>xxxxx</a:t>
             </a:r>
-            <a:endParaRPr b="0" i="0" sz="900" u="none" cap="none" strike="noStrike">
+            <a:endParaRPr b="0" i="0" sz="1100" u="none" cap="none" strike="noStrike">
               <a:solidFill>
                 <a:srgbClr val="000033"/>
               </a:solidFill>
@@ -11304,7 +12187,7 @@
     </p:bg>
     <p:spTree>
       <p:nvGrpSpPr>
-        <p:cNvPr id="218" name="Shape 218"/>
+        <p:cNvPr id="222" name="Shape 222"/>
         <p:cNvGrpSpPr/>
         <p:nvPr/>
       </p:nvGrpSpPr>
@@ -11318,7 +12201,7 @@
       </p:grpSpPr>
       <p:pic>
         <p:nvPicPr>
-          <p:cNvPr descr="bg-dark-glow.png" id="219" name="Google Shape;219;p24"/>
+          <p:cNvPr descr="bg-dark-glow.png" id="223" name="Google Shape;223;p26"/>
           <p:cNvPicPr preferRelativeResize="0"/>
           <p:nvPr/>
         </p:nvPicPr>
@@ -11345,7 +12228,7 @@
       </p:pic>
       <p:pic>
         <p:nvPicPr>
-          <p:cNvPr descr="neo-logo-25-white.png" id="220" name="Google Shape;220;p24"/>
+          <p:cNvPr descr="neo-logo-25-white.png" id="224" name="Google Shape;224;p26"/>
           <p:cNvPicPr preferRelativeResize="0"/>
           <p:nvPr/>
         </p:nvPicPr>
@@ -11359,7 +12242,7 @@
         <p:spPr>
           <a:xfrm>
             <a:off x="571500" y="398780"/>
-            <a:ext cx="1228090" cy="245110"/>
+            <a:ext cx="1228091" cy="245110"/>
           </a:xfrm>
           <a:prstGeom prst="rect">
             <a:avLst/>
@@ -11372,14 +12255,14 @@
       </p:pic>
       <p:sp>
         <p:nvSpPr>
-          <p:cNvPr id="221" name="Google Shape;221;p24"/>
+          <p:cNvPr id="225" name="Google Shape;225;p26"/>
           <p:cNvSpPr txBox="1"/>
           <p:nvPr/>
         </p:nvSpPr>
         <p:spPr>
           <a:xfrm>
             <a:off x="571500" y="4577080"/>
-            <a:ext cx="2032000" cy="185420"/>
+            <a:ext cx="2031900" cy="185400"/>
           </a:xfrm>
           <a:prstGeom prst="rect">
             <a:avLst/>
@@ -11438,14 +12321,14 @@
       </p:sp>
       <p:sp>
         <p:nvSpPr>
-          <p:cNvPr id="222" name="Google Shape;222;p24"/>
+          <p:cNvPr id="226" name="Google Shape;226;p26"/>
           <p:cNvSpPr txBox="1"/>
           <p:nvPr/>
         </p:nvSpPr>
         <p:spPr>
           <a:xfrm>
             <a:off x="571500" y="2159000"/>
-            <a:ext cx="8001000" cy="642620"/>
+            <a:ext cx="8001000" cy="642600"/>
           </a:xfrm>
           <a:prstGeom prst="rect">
             <a:avLst/>
@@ -11516,14 +12399,14 @@
       </p:sp>
       <p:sp>
         <p:nvSpPr>
-          <p:cNvPr id="223" name="Google Shape;223;p24"/>
+          <p:cNvPr id="227" name="Google Shape;227;p26"/>
           <p:cNvSpPr txBox="1"/>
           <p:nvPr/>
         </p:nvSpPr>
         <p:spPr>
           <a:xfrm>
             <a:off x="571500" y="1798320"/>
-            <a:ext cx="8001000" cy="208279"/>
+            <a:ext cx="8001000" cy="208200"/>
           </a:xfrm>
           <a:prstGeom prst="rect">
             <a:avLst/>
@@ -11608,7 +12491,7 @@
     </p:bg>
     <p:spTree>
       <p:nvGrpSpPr>
-        <p:cNvPr id="228" name="Shape 228"/>
+        <p:cNvPr id="232" name="Shape 232"/>
         <p:cNvGrpSpPr/>
         <p:nvPr/>
       </p:nvGrpSpPr>
@@ -11622,7 +12505,7 @@
       </p:grpSpPr>
       <p:sp>
         <p:nvSpPr>
-          <p:cNvPr id="229" name="Google Shape;229;p25"/>
+          <p:cNvPr id="233" name="Google Shape;233;p27"/>
           <p:cNvSpPr txBox="1"/>
           <p:nvPr/>
         </p:nvSpPr>
@@ -11685,7 +12568,7 @@
       </p:sp>
       <p:sp>
         <p:nvSpPr>
-          <p:cNvPr id="230" name="Google Shape;230;p25"/>
+          <p:cNvPr id="234" name="Google Shape;234;p27"/>
           <p:cNvSpPr txBox="1"/>
           <p:nvPr/>
         </p:nvSpPr>
@@ -11748,7 +12631,7 @@
       </p:sp>
       <p:graphicFrame>
         <p:nvGraphicFramePr>
-          <p:cNvPr id="231" name="Google Shape;231;p25"/>
+          <p:cNvPr id="235" name="Google Shape;235;p27"/>
           <p:cNvGraphicFramePr/>
           <p:nvPr/>
         </p:nvGraphicFramePr>
@@ -11761,7 +12644,7 @@
             <a:tbl>
               <a:tblPr>
                 <a:noFill/>
-                <a:tableStyleId>{C7987163-05EB-4841-B32E-FE23FC968E0B}</a:tableStyleId>
+                <a:tableStyleId>{128F3E1C-D594-40A7-8D9A-C35E21F81C6D}</a:tableStyleId>
               </a:tblPr>
               <a:tblGrid>
                 <a:gridCol w="3657600"/>
@@ -12601,7 +13484,7 @@
       </p:graphicFrame>
       <p:sp>
         <p:nvSpPr>
-          <p:cNvPr id="232" name="Google Shape;232;p25"/>
+          <p:cNvPr id="236" name="Google Shape;236;p27"/>
           <p:cNvSpPr txBox="1"/>
           <p:nvPr/>
         </p:nvSpPr>
@@ -12664,7 +13547,7 @@
       </p:sp>
       <p:sp>
         <p:nvSpPr>
-          <p:cNvPr id="233" name="Google Shape;233;p25"/>
+          <p:cNvPr id="237" name="Google Shape;237;p27"/>
           <p:cNvSpPr/>
           <p:nvPr/>
         </p:nvSpPr>
@@ -12713,7 +13596,7 @@
       </p:sp>
       <p:sp>
         <p:nvSpPr>
-          <p:cNvPr id="234" name="Google Shape;234;p25"/>
+          <p:cNvPr id="238" name="Google Shape;238;p27"/>
           <p:cNvSpPr txBox="1"/>
           <p:nvPr/>
         </p:nvSpPr>
@@ -12776,7 +13659,7 @@
       </p:sp>
       <p:sp>
         <p:nvSpPr>
-          <p:cNvPr id="235" name="Google Shape;235;p25"/>
+          <p:cNvPr id="239" name="Google Shape;239;p27"/>
           <p:cNvSpPr txBox="1"/>
           <p:nvPr/>
         </p:nvSpPr>
@@ -12948,7 +13831,7 @@
     </p:bg>
     <p:spTree>
       <p:nvGrpSpPr>
-        <p:cNvPr id="240" name="Shape 240"/>
+        <p:cNvPr id="244" name="Shape 244"/>
         <p:cNvGrpSpPr/>
         <p:nvPr/>
       </p:nvGrpSpPr>
@@ -12962,7 +13845,7 @@
       </p:grpSpPr>
       <p:sp>
         <p:nvSpPr>
-          <p:cNvPr id="241" name="Google Shape;241;p26"/>
+          <p:cNvPr id="245" name="Google Shape;245;p28"/>
           <p:cNvSpPr txBox="1"/>
           <p:nvPr/>
         </p:nvSpPr>
@@ -13049,7 +13932,7 @@
       </p:sp>
       <p:sp>
         <p:nvSpPr>
-          <p:cNvPr id="242" name="Google Shape;242;p26"/>
+          <p:cNvPr id="246" name="Google Shape;246;p28"/>
           <p:cNvSpPr/>
           <p:nvPr/>
         </p:nvSpPr>
@@ -13107,7 +13990,7 @@
       </p:sp>
       <p:sp>
         <p:nvSpPr>
-          <p:cNvPr id="243" name="Google Shape;243;p26"/>
+          <p:cNvPr id="247" name="Google Shape;247;p28"/>
           <p:cNvSpPr txBox="1"/>
           <p:nvPr/>
         </p:nvSpPr>
@@ -13444,7 +14327,7 @@
       </p:sp>
       <p:sp>
         <p:nvSpPr>
-          <p:cNvPr id="244" name="Google Shape;244;p26"/>
+          <p:cNvPr id="248" name="Google Shape;248;p28"/>
           <p:cNvSpPr/>
           <p:nvPr/>
         </p:nvSpPr>
@@ -13502,7 +14385,7 @@
       </p:sp>
       <p:sp>
         <p:nvSpPr>
-          <p:cNvPr id="245" name="Google Shape;245;p26"/>
+          <p:cNvPr id="249" name="Google Shape;249;p28"/>
           <p:cNvSpPr txBox="1"/>
           <p:nvPr/>
         </p:nvSpPr>
@@ -13839,7 +14722,7 @@
       </p:sp>
       <p:sp>
         <p:nvSpPr>
-          <p:cNvPr id="246" name="Google Shape;246;p26"/>
+          <p:cNvPr id="250" name="Google Shape;250;p28"/>
           <p:cNvSpPr txBox="1"/>
           <p:nvPr/>
         </p:nvSpPr>
@@ -13920,7 +14803,7 @@
     </p:bg>
     <p:spTree>
       <p:nvGrpSpPr>
-        <p:cNvPr id="251" name="Shape 251"/>
+        <p:cNvPr id="255" name="Shape 255"/>
         <p:cNvGrpSpPr/>
         <p:nvPr/>
       </p:nvGrpSpPr>
@@ -13934,7 +14817,7 @@
       </p:grpSpPr>
       <p:pic>
         <p:nvPicPr>
-          <p:cNvPr descr="bg-dark-glow.png" id="252" name="Google Shape;252;p27"/>
+          <p:cNvPr descr="bg-dark-glow.png" id="256" name="Google Shape;256;p29"/>
           <p:cNvPicPr preferRelativeResize="0"/>
           <p:nvPr/>
         </p:nvPicPr>
@@ -13961,7 +14844,7 @@
       </p:pic>
       <p:pic>
         <p:nvPicPr>
-          <p:cNvPr descr="neo-logo-25-white.png" id="253" name="Google Shape;253;p27"/>
+          <p:cNvPr descr="neo-logo-25-white.png" id="257" name="Google Shape;257;p29"/>
           <p:cNvPicPr preferRelativeResize="0"/>
           <p:nvPr/>
         </p:nvPicPr>
@@ -13988,7 +14871,7 @@
       </p:pic>
       <p:sp>
         <p:nvSpPr>
-          <p:cNvPr id="254" name="Google Shape;254;p27"/>
+          <p:cNvPr id="258" name="Google Shape;258;p29"/>
           <p:cNvSpPr txBox="1"/>
           <p:nvPr/>
         </p:nvSpPr>
@@ -14054,7 +14937,7 @@
       </p:sp>
       <p:sp>
         <p:nvSpPr>
-          <p:cNvPr id="255" name="Google Shape;255;p27"/>
+          <p:cNvPr id="259" name="Google Shape;259;p29"/>
           <p:cNvSpPr txBox="1"/>
           <p:nvPr/>
         </p:nvSpPr>
@@ -14132,7 +15015,7 @@
       </p:sp>
       <p:sp>
         <p:nvSpPr>
-          <p:cNvPr id="256" name="Google Shape;256;p27"/>
+          <p:cNvPr id="260" name="Google Shape;260;p29"/>
           <p:cNvSpPr txBox="1"/>
           <p:nvPr/>
         </p:nvSpPr>
@@ -14198,7 +15081,7 @@
       </p:sp>
       <p:sp>
         <p:nvSpPr>
-          <p:cNvPr id="257" name="Google Shape;257;p27"/>
+          <p:cNvPr id="261" name="Google Shape;261;p29"/>
           <p:cNvSpPr txBox="1"/>
           <p:nvPr/>
         </p:nvSpPr>
@@ -14290,7 +15173,7 @@
     </p:bg>
     <p:spTree>
       <p:nvGrpSpPr>
-        <p:cNvPr id="261" name="Shape 261"/>
+        <p:cNvPr id="265" name="Shape 265"/>
         <p:cNvGrpSpPr/>
         <p:nvPr/>
       </p:nvGrpSpPr>
@@ -14304,7 +15187,7 @@
       </p:grpSpPr>
       <p:sp>
         <p:nvSpPr>
-          <p:cNvPr id="262" name="Google Shape;262;p28"/>
+          <p:cNvPr id="266" name="Google Shape;266;p30"/>
           <p:cNvSpPr txBox="1"/>
           <p:nvPr/>
         </p:nvSpPr>
@@ -14370,7 +15253,7 @@
       </p:sp>
       <p:sp>
         <p:nvSpPr>
-          <p:cNvPr id="263" name="Google Shape;263;p28"/>
+          <p:cNvPr id="267" name="Google Shape;267;p30"/>
           <p:cNvSpPr txBox="1"/>
           <p:nvPr/>
         </p:nvSpPr>
@@ -14436,7 +15319,7 @@
       </p:sp>
       <p:sp>
         <p:nvSpPr>
-          <p:cNvPr id="264" name="Google Shape;264;p28"/>
+          <p:cNvPr id="268" name="Google Shape;268;p30"/>
           <p:cNvSpPr txBox="1"/>
           <p:nvPr/>
         </p:nvSpPr>
@@ -14514,7 +15397,7 @@
       </p:sp>
       <p:pic>
         <p:nvPicPr>
-          <p:cNvPr descr="image.png" id="265" name="Google Shape;265;p28"/>
+          <p:cNvPr descr="image.png" id="269" name="Google Shape;269;p30"/>
           <p:cNvPicPr preferRelativeResize="0"/>
           <p:nvPr/>
         </p:nvPicPr>
@@ -14541,7 +15424,7 @@
       </p:pic>
       <p:sp>
         <p:nvSpPr>
-          <p:cNvPr id="266" name="Google Shape;266;p28"/>
+          <p:cNvPr id="270" name="Google Shape;270;p30"/>
           <p:cNvSpPr/>
           <p:nvPr/>
         </p:nvSpPr>
@@ -14600,7 +15483,7 @@
       </p:sp>
       <p:sp>
         <p:nvSpPr>
-          <p:cNvPr id="267" name="Google Shape;267;p28"/>
+          <p:cNvPr id="271" name="Google Shape;271;p30"/>
           <p:cNvSpPr txBox="1"/>
           <p:nvPr/>
         </p:nvSpPr>
@@ -14702,7 +15585,7 @@
       </p:sp>
       <p:sp>
         <p:nvSpPr>
-          <p:cNvPr id="268" name="Google Shape;268;p28"/>
+          <p:cNvPr id="272" name="Google Shape;272;p30"/>
           <p:cNvSpPr txBox="1"/>
           <p:nvPr/>
         </p:nvSpPr>
@@ -14846,7 +15729,7 @@
     </p:bg>
     <p:spTree>
       <p:nvGrpSpPr>
-        <p:cNvPr id="273" name="Shape 273"/>
+        <p:cNvPr id="277" name="Shape 277"/>
         <p:cNvGrpSpPr/>
         <p:nvPr/>
       </p:nvGrpSpPr>
@@ -14860,7 +15743,7 @@
       </p:grpSpPr>
       <p:pic>
         <p:nvPicPr>
-          <p:cNvPr descr="preencoded.png" id="274" name="Google Shape;274;p29"/>
+          <p:cNvPr descr="preencoded.png" id="278" name="Google Shape;278;p31"/>
           <p:cNvPicPr preferRelativeResize="0"/>
           <p:nvPr/>
         </p:nvPicPr>
@@ -14887,7 +15770,7 @@
       </p:pic>
       <p:sp>
         <p:nvSpPr>
-          <p:cNvPr id="275" name="Google Shape;275;p29"/>
+          <p:cNvPr id="279" name="Google Shape;279;p31"/>
           <p:cNvSpPr/>
           <p:nvPr/>
         </p:nvSpPr>
@@ -14953,7 +15836,7 @@
       </p:sp>
       <p:sp>
         <p:nvSpPr>
-          <p:cNvPr id="276" name="Google Shape;276;p29"/>
+          <p:cNvPr id="280" name="Google Shape;280;p31"/>
           <p:cNvSpPr/>
           <p:nvPr/>
         </p:nvSpPr>
@@ -15071,7 +15954,7 @@
       </p:sp>
       <p:sp>
         <p:nvSpPr>
-          <p:cNvPr id="277" name="Google Shape;277;p29"/>
+          <p:cNvPr id="281" name="Google Shape;281;p31"/>
           <p:cNvSpPr/>
           <p:nvPr/>
         </p:nvSpPr>
@@ -15137,7 +16020,7 @@
       </p:sp>
       <p:sp>
         <p:nvSpPr>
-          <p:cNvPr id="278" name="Google Shape;278;p29"/>
+          <p:cNvPr id="282" name="Google Shape;282;p31"/>
           <p:cNvSpPr/>
           <p:nvPr/>
         </p:nvSpPr>
@@ -15203,7 +16086,7 @@
       </p:sp>
       <p:sp>
         <p:nvSpPr>
-          <p:cNvPr id="279" name="Google Shape;279;p29"/>
+          <p:cNvPr id="283" name="Google Shape;283;p31"/>
           <p:cNvSpPr/>
           <p:nvPr/>
         </p:nvSpPr>
@@ -15269,7 +16152,7 @@
       </p:sp>
       <p:sp>
         <p:nvSpPr>
-          <p:cNvPr id="280" name="Google Shape;280;p29"/>
+          <p:cNvPr id="284" name="Google Shape;284;p31"/>
           <p:cNvSpPr/>
           <p:nvPr/>
         </p:nvSpPr>
@@ -15335,7 +16218,7 @@
       </p:sp>
       <p:sp>
         <p:nvSpPr>
-          <p:cNvPr id="281" name="Google Shape;281;p29"/>
+          <p:cNvPr id="285" name="Google Shape;285;p31"/>
           <p:cNvSpPr/>
           <p:nvPr/>
         </p:nvSpPr>
@@ -15401,7 +16284,7 @@
       </p:sp>
       <p:sp>
         <p:nvSpPr>
-          <p:cNvPr id="282" name="Google Shape;282;p29"/>
+          <p:cNvPr id="286" name="Google Shape;286;p31"/>
           <p:cNvSpPr/>
           <p:nvPr/>
         </p:nvSpPr>
@@ -15467,7 +16350,7 @@
       </p:sp>
       <p:sp>
         <p:nvSpPr>
-          <p:cNvPr id="283" name="Google Shape;283;p29"/>
+          <p:cNvPr id="287" name="Google Shape;287;p31"/>
           <p:cNvSpPr/>
           <p:nvPr/>
         </p:nvSpPr>
@@ -15533,7 +16416,7 @@
       </p:sp>
       <p:sp>
         <p:nvSpPr>
-          <p:cNvPr id="284" name="Google Shape;284;p29"/>
+          <p:cNvPr id="288" name="Google Shape;288;p31"/>
           <p:cNvSpPr/>
           <p:nvPr/>
         </p:nvSpPr>
@@ -15599,7 +16482,7 @@
       </p:sp>
       <p:sp>
         <p:nvSpPr>
-          <p:cNvPr id="285" name="Google Shape;285;p29"/>
+          <p:cNvPr id="289" name="Google Shape;289;p31"/>
           <p:cNvSpPr/>
           <p:nvPr/>
         </p:nvSpPr>
@@ -15691,7 +16574,7 @@
     </p:bg>
     <p:spTree>
       <p:nvGrpSpPr>
-        <p:cNvPr id="290" name="Shape 290"/>
+        <p:cNvPr id="294" name="Shape 294"/>
         <p:cNvGrpSpPr/>
         <p:nvPr/>
       </p:nvGrpSpPr>
@@ -15705,7 +16588,7 @@
       </p:grpSpPr>
       <p:pic>
         <p:nvPicPr>
-          <p:cNvPr descr="preencoded.png" id="291" name="Google Shape;291;p30"/>
+          <p:cNvPr descr="preencoded.png" id="295" name="Google Shape;295;p32"/>
           <p:cNvPicPr preferRelativeResize="0"/>
           <p:nvPr/>
         </p:nvPicPr>
@@ -15732,7 +16615,7 @@
       </p:pic>
       <p:pic>
         <p:nvPicPr>
-          <p:cNvPr descr="preencoded.png" id="292" name="Google Shape;292;p30"/>
+          <p:cNvPr descr="preencoded.png" id="296" name="Google Shape;296;p32"/>
           <p:cNvPicPr preferRelativeResize="0"/>
           <p:nvPr/>
         </p:nvPicPr>
@@ -15759,7 +16642,7 @@
       </p:pic>
       <p:pic>
         <p:nvPicPr>
-          <p:cNvPr descr="preencoded.png" id="293" name="Google Shape;293;p30"/>
+          <p:cNvPr descr="preencoded.png" id="297" name="Google Shape;297;p32"/>
           <p:cNvPicPr preferRelativeResize="0"/>
           <p:nvPr/>
         </p:nvPicPr>
@@ -15786,7 +16669,7 @@
       </p:pic>
       <p:pic>
         <p:nvPicPr>
-          <p:cNvPr descr="preencoded.png" id="294" name="Google Shape;294;p30"/>
+          <p:cNvPr descr="preencoded.png" id="298" name="Google Shape;298;p32"/>
           <p:cNvPicPr preferRelativeResize="0"/>
           <p:nvPr/>
         </p:nvPicPr>
@@ -15813,7 +16696,7 @@
       </p:pic>
       <p:sp>
         <p:nvSpPr>
-          <p:cNvPr id="295" name="Google Shape;295;p30"/>
+          <p:cNvPr id="299" name="Google Shape;299;p32"/>
           <p:cNvSpPr/>
           <p:nvPr/>
         </p:nvSpPr>
@@ -15879,7 +16762,7 @@
       </p:sp>
       <p:sp>
         <p:nvSpPr>
-          <p:cNvPr id="296" name="Google Shape;296;p30"/>
+          <p:cNvPr id="300" name="Google Shape;300;p32"/>
           <p:cNvSpPr/>
           <p:nvPr/>
         </p:nvSpPr>
@@ -15969,7 +16852,7 @@
       </p:sp>
       <p:sp>
         <p:nvSpPr>
-          <p:cNvPr id="297" name="Google Shape;297;p30"/>
+          <p:cNvPr id="301" name="Google Shape;301;p32"/>
           <p:cNvSpPr/>
           <p:nvPr/>
         </p:nvSpPr>
@@ -16035,7 +16918,7 @@
       </p:sp>
       <p:sp>
         <p:nvSpPr>
-          <p:cNvPr id="298" name="Google Shape;298;p30"/>
+          <p:cNvPr id="302" name="Google Shape;302;p32"/>
           <p:cNvSpPr/>
           <p:nvPr/>
         </p:nvSpPr>
@@ -16101,7 +16984,7 @@
       </p:sp>
       <p:pic>
         <p:nvPicPr>
-          <p:cNvPr id="299" name="Google Shape;299;p30"/>
+          <p:cNvPr id="303" name="Google Shape;303;p32"/>
           <p:cNvPicPr preferRelativeResize="0"/>
           <p:nvPr/>
         </p:nvPicPr>
@@ -16128,7 +17011,7 @@
       </p:pic>
       <p:pic>
         <p:nvPicPr>
-          <p:cNvPr id="300" name="Google Shape;300;p30"/>
+          <p:cNvPr id="304" name="Google Shape;304;p32"/>
           <p:cNvPicPr preferRelativeResize="0"/>
           <p:nvPr/>
         </p:nvPicPr>
@@ -16155,7 +17038,7 @@
       </p:pic>
       <p:pic>
         <p:nvPicPr>
-          <p:cNvPr descr="preencoded.png" id="301" name="Google Shape;301;p30"/>
+          <p:cNvPr descr="preencoded.png" id="305" name="Google Shape;305;p32"/>
           <p:cNvPicPr preferRelativeResize="0"/>
           <p:nvPr/>
         </p:nvPicPr>
@@ -16182,7 +17065,7 @@
       </p:pic>
       <p:pic>
         <p:nvPicPr>
-          <p:cNvPr id="302" name="Google Shape;302;p30"/>
+          <p:cNvPr id="306" name="Google Shape;306;p32"/>
           <p:cNvPicPr preferRelativeResize="0"/>
           <p:nvPr/>
         </p:nvPicPr>
@@ -16235,7 +17118,7 @@
     </p:bg>
     <p:spTree>
       <p:nvGrpSpPr>
-        <p:cNvPr id="307" name="Shape 307"/>
+        <p:cNvPr id="311" name="Shape 311"/>
         <p:cNvGrpSpPr/>
         <p:nvPr/>
       </p:nvGrpSpPr>
@@ -16249,7 +17132,7 @@
       </p:grpSpPr>
       <p:pic>
         <p:nvPicPr>
-          <p:cNvPr descr="preencoded.png" id="308" name="Google Shape;308;p31"/>
+          <p:cNvPr descr="preencoded.png" id="312" name="Google Shape;312;p33"/>
           <p:cNvPicPr preferRelativeResize="0"/>
           <p:nvPr/>
         </p:nvPicPr>
@@ -16276,7 +17159,7 @@
       </p:pic>
       <p:pic>
         <p:nvPicPr>
-          <p:cNvPr descr="preencoded.png" id="309" name="Google Shape;309;p31"/>
+          <p:cNvPr descr="preencoded.png" id="313" name="Google Shape;313;p33"/>
           <p:cNvPicPr preferRelativeResize="0"/>
           <p:nvPr/>
         </p:nvPicPr>
@@ -16303,7 +17186,7 @@
       </p:pic>
       <p:pic>
         <p:nvPicPr>
-          <p:cNvPr descr="preencoded.png" id="310" name="Google Shape;310;p31"/>
+          <p:cNvPr descr="preencoded.png" id="314" name="Google Shape;314;p33"/>
           <p:cNvPicPr preferRelativeResize="0"/>
           <p:nvPr/>
         </p:nvPicPr>
@@ -16330,7 +17213,7 @@
       </p:pic>
       <p:pic>
         <p:nvPicPr>
-          <p:cNvPr descr="preencoded.png" id="311" name="Google Shape;311;p31"/>
+          <p:cNvPr descr="preencoded.png" id="315" name="Google Shape;315;p33"/>
           <p:cNvPicPr preferRelativeResize="0"/>
           <p:nvPr/>
         </p:nvPicPr>
@@ -16357,7 +17240,7 @@
       </p:pic>
       <p:pic>
         <p:nvPicPr>
-          <p:cNvPr descr="preencoded.png" id="312" name="Google Shape;312;p31"/>
+          <p:cNvPr descr="preencoded.png" id="316" name="Google Shape;316;p33"/>
           <p:cNvPicPr preferRelativeResize="0"/>
           <p:nvPr/>
         </p:nvPicPr>
@@ -16384,7 +17267,7 @@
       </p:pic>
       <p:pic>
         <p:nvPicPr>
-          <p:cNvPr descr="preencoded.png" id="313" name="Google Shape;313;p31"/>
+          <p:cNvPr descr="preencoded.png" id="317" name="Google Shape;317;p33"/>
           <p:cNvPicPr preferRelativeResize="0"/>
           <p:nvPr/>
         </p:nvPicPr>
@@ -16411,7 +17294,7 @@
       </p:pic>
       <p:sp>
         <p:nvSpPr>
-          <p:cNvPr id="314" name="Google Shape;314;p31"/>
+          <p:cNvPr id="318" name="Google Shape;318;p33"/>
           <p:cNvSpPr/>
           <p:nvPr/>
         </p:nvSpPr>
@@ -16477,7 +17360,7 @@
       </p:sp>
       <p:sp>
         <p:nvSpPr>
-          <p:cNvPr id="315" name="Google Shape;315;p31"/>
+          <p:cNvPr id="319" name="Google Shape;319;p33"/>
           <p:cNvSpPr/>
           <p:nvPr/>
         </p:nvSpPr>
@@ -16543,7 +17426,7 @@
       </p:sp>
       <p:sp>
         <p:nvSpPr>
-          <p:cNvPr id="316" name="Google Shape;316;p31"/>
+          <p:cNvPr id="320" name="Google Shape;320;p33"/>
           <p:cNvSpPr/>
           <p:nvPr/>
         </p:nvSpPr>
@@ -16609,7 +17492,7 @@
       </p:sp>
       <p:sp>
         <p:nvSpPr>
-          <p:cNvPr id="317" name="Google Shape;317;p31"/>
+          <p:cNvPr id="321" name="Google Shape;321;p33"/>
           <p:cNvSpPr/>
           <p:nvPr/>
         </p:nvSpPr>
@@ -16699,7 +17582,7 @@
       </p:sp>
       <p:sp>
         <p:nvSpPr>
-          <p:cNvPr id="318" name="Google Shape;318;p31"/>
+          <p:cNvPr id="322" name="Google Shape;322;p33"/>
           <p:cNvSpPr/>
           <p:nvPr/>
         </p:nvSpPr>
@@ -16765,7 +17648,7 @@
       </p:sp>
       <p:sp>
         <p:nvSpPr>
-          <p:cNvPr id="319" name="Google Shape;319;p31"/>
+          <p:cNvPr id="323" name="Google Shape;323;p33"/>
           <p:cNvSpPr/>
           <p:nvPr/>
         </p:nvSpPr>
@@ -16831,7 +17714,7 @@
       </p:sp>
       <p:sp>
         <p:nvSpPr>
-          <p:cNvPr id="320" name="Google Shape;320;p31"/>
+          <p:cNvPr id="324" name="Google Shape;324;p33"/>
           <p:cNvSpPr/>
           <p:nvPr/>
         </p:nvSpPr>
@@ -16897,7 +17780,7 @@
       </p:sp>
       <p:sp>
         <p:nvSpPr>
-          <p:cNvPr id="321" name="Google Shape;321;p31"/>
+          <p:cNvPr id="325" name="Google Shape;325;p33"/>
           <p:cNvSpPr/>
           <p:nvPr/>
         </p:nvSpPr>
@@ -16963,7 +17846,7 @@
       </p:sp>
       <p:sp>
         <p:nvSpPr>
-          <p:cNvPr id="322" name="Google Shape;322;p31"/>
+          <p:cNvPr id="326" name="Google Shape;326;p33"/>
           <p:cNvSpPr/>
           <p:nvPr/>
         </p:nvSpPr>
@@ -17029,7 +17912,7 @@
       </p:sp>
       <p:sp>
         <p:nvSpPr>
-          <p:cNvPr id="323" name="Google Shape;323;p31"/>
+          <p:cNvPr id="327" name="Google Shape;327;p33"/>
           <p:cNvSpPr/>
           <p:nvPr/>
         </p:nvSpPr>
@@ -17095,7 +17978,7 @@
       </p:sp>
       <p:pic>
         <p:nvPicPr>
-          <p:cNvPr id="324" name="Google Shape;324;p31"/>
+          <p:cNvPr id="328" name="Google Shape;328;p33"/>
           <p:cNvPicPr preferRelativeResize="0"/>
           <p:nvPr/>
         </p:nvPicPr>
@@ -17122,7 +18005,7 @@
       </p:pic>
       <p:pic>
         <p:nvPicPr>
-          <p:cNvPr id="325" name="Google Shape;325;p31"/>
+          <p:cNvPr id="329" name="Google Shape;329;p33"/>
           <p:cNvPicPr preferRelativeResize="0"/>
           <p:nvPr/>
         </p:nvPicPr>
@@ -17149,7 +18032,7 @@
       </p:pic>
       <p:pic>
         <p:nvPicPr>
-          <p:cNvPr id="326" name="Google Shape;326;p31"/>
+          <p:cNvPr id="330" name="Google Shape;330;p33"/>
           <p:cNvPicPr preferRelativeResize="0"/>
           <p:nvPr/>
         </p:nvPicPr>
@@ -17176,7 +18059,7 @@
       </p:pic>
       <p:pic>
         <p:nvPicPr>
-          <p:cNvPr id="327" name="Google Shape;327;p31"/>
+          <p:cNvPr id="331" name="Google Shape;331;p33"/>
           <p:cNvPicPr preferRelativeResize="0"/>
           <p:nvPr/>
         </p:nvPicPr>
@@ -17203,7 +18086,7 @@
       </p:pic>
       <p:pic>
         <p:nvPicPr>
-          <p:cNvPr id="328" name="Google Shape;328;p31"/>
+          <p:cNvPr id="332" name="Google Shape;332;p33"/>
           <p:cNvPicPr preferRelativeResize="0"/>
           <p:nvPr/>
         </p:nvPicPr>
@@ -17230,7 +18113,7 @@
       </p:pic>
       <p:pic>
         <p:nvPicPr>
-          <p:cNvPr id="329" name="Google Shape;329;p31"/>
+          <p:cNvPr id="333" name="Google Shape;333;p33"/>
           <p:cNvPicPr preferRelativeResize="0"/>
           <p:nvPr/>
         </p:nvPicPr>
@@ -17257,7 +18140,7 @@
       </p:pic>
       <p:pic>
         <p:nvPicPr>
-          <p:cNvPr id="330" name="Google Shape;330;p31"/>
+          <p:cNvPr id="334" name="Google Shape;334;p33"/>
           <p:cNvPicPr preferRelativeResize="0"/>
           <p:nvPr/>
         </p:nvPicPr>
@@ -17284,7 +18167,7 @@
       </p:pic>
       <p:pic>
         <p:nvPicPr>
-          <p:cNvPr id="331" name="Google Shape;331;p31"/>
+          <p:cNvPr id="335" name="Google Shape;335;p33"/>
           <p:cNvPicPr preferRelativeResize="0"/>
           <p:nvPr/>
         </p:nvPicPr>
@@ -17311,7 +18194,7 @@
       </p:pic>
       <p:pic>
         <p:nvPicPr>
-          <p:cNvPr id="332" name="Google Shape;332;p31"/>
+          <p:cNvPr id="336" name="Google Shape;336;p33"/>
           <p:cNvPicPr preferRelativeResize="0"/>
           <p:nvPr/>
         </p:nvPicPr>
@@ -17338,7 +18221,7 @@
       </p:pic>
       <p:pic>
         <p:nvPicPr>
-          <p:cNvPr id="333" name="Google Shape;333;p31"/>
+          <p:cNvPr id="337" name="Google Shape;337;p33"/>
           <p:cNvPicPr preferRelativeResize="0"/>
           <p:nvPr/>
         </p:nvPicPr>
@@ -17365,7 +18248,7 @@
       </p:pic>
       <p:pic>
         <p:nvPicPr>
-          <p:cNvPr id="334" name="Google Shape;334;p31"/>
+          <p:cNvPr id="338" name="Google Shape;338;p33"/>
           <p:cNvPicPr preferRelativeResize="0"/>
           <p:nvPr/>
         </p:nvPicPr>
@@ -17392,7 +18275,7 @@
       </p:pic>
       <p:pic>
         <p:nvPicPr>
-          <p:cNvPr id="335" name="Google Shape;335;p31"/>
+          <p:cNvPr id="339" name="Google Shape;339;p33"/>
           <p:cNvPicPr preferRelativeResize="0"/>
           <p:nvPr/>
         </p:nvPicPr>
@@ -17419,7 +18302,7 @@
       </p:pic>
       <p:pic>
         <p:nvPicPr>
-          <p:cNvPr id="336" name="Google Shape;336;p31"/>
+          <p:cNvPr id="340" name="Google Shape;340;p33"/>
           <p:cNvPicPr preferRelativeResize="0"/>
           <p:nvPr/>
         </p:nvPicPr>
@@ -17446,7 +18329,7 @@
       </p:pic>
       <p:pic>
         <p:nvPicPr>
-          <p:cNvPr id="337" name="Google Shape;337;p31"/>
+          <p:cNvPr id="341" name="Google Shape;341;p33"/>
           <p:cNvPicPr preferRelativeResize="0"/>
           <p:nvPr/>
         </p:nvPicPr>
@@ -17473,7 +18356,7 @@
       </p:pic>
       <p:pic>
         <p:nvPicPr>
-          <p:cNvPr id="338" name="Google Shape;338;p31"/>
+          <p:cNvPr id="342" name="Google Shape;342;p33"/>
           <p:cNvPicPr preferRelativeResize="0"/>
           <p:nvPr/>
         </p:nvPicPr>
@@ -17500,7 +18383,7 @@
       </p:pic>
       <p:pic>
         <p:nvPicPr>
-          <p:cNvPr id="339" name="Google Shape;339;p31"/>
+          <p:cNvPr id="343" name="Google Shape;343;p33"/>
           <p:cNvPicPr preferRelativeResize="0"/>
           <p:nvPr/>
         </p:nvPicPr>
@@ -17527,7 +18410,7 @@
       </p:pic>
       <p:pic>
         <p:nvPicPr>
-          <p:cNvPr id="340" name="Google Shape;340;p31"/>
+          <p:cNvPr id="344" name="Google Shape;344;p33"/>
           <p:cNvPicPr preferRelativeResize="0"/>
           <p:nvPr/>
         </p:nvPicPr>
@@ -17554,7 +18437,7 @@
       </p:pic>
       <p:pic>
         <p:nvPicPr>
-          <p:cNvPr id="341" name="Google Shape;341;p31"/>
+          <p:cNvPr id="345" name="Google Shape;345;p33"/>
           <p:cNvPicPr preferRelativeResize="0"/>
           <p:nvPr/>
         </p:nvPicPr>
@@ -17581,7 +18464,7 @@
       </p:pic>
       <p:pic>
         <p:nvPicPr>
-          <p:cNvPr id="342" name="Google Shape;342;p31"/>
+          <p:cNvPr id="346" name="Google Shape;346;p33"/>
           <p:cNvPicPr preferRelativeResize="0"/>
           <p:nvPr/>
         </p:nvPicPr>
@@ -17608,7 +18491,7 @@
       </p:pic>
       <p:pic>
         <p:nvPicPr>
-          <p:cNvPr id="343" name="Google Shape;343;p31"/>
+          <p:cNvPr id="347" name="Google Shape;347;p33"/>
           <p:cNvPicPr preferRelativeResize="0"/>
           <p:nvPr/>
         </p:nvPicPr>
@@ -17635,7 +18518,7 @@
       </p:pic>
       <p:pic>
         <p:nvPicPr>
-          <p:cNvPr id="344" name="Google Shape;344;p31"/>
+          <p:cNvPr id="348" name="Google Shape;348;p33"/>
           <p:cNvPicPr preferRelativeResize="0"/>
           <p:nvPr/>
         </p:nvPicPr>
@@ -17662,7 +18545,7 @@
       </p:pic>
       <p:pic>
         <p:nvPicPr>
-          <p:cNvPr id="345" name="Google Shape;345;p31"/>
+          <p:cNvPr id="349" name="Google Shape;349;p33"/>
           <p:cNvPicPr preferRelativeResize="0"/>
           <p:nvPr/>
         </p:nvPicPr>
@@ -17689,7 +18572,7 @@
       </p:pic>
       <p:pic>
         <p:nvPicPr>
-          <p:cNvPr id="346" name="Google Shape;346;p31"/>
+          <p:cNvPr id="350" name="Google Shape;350;p33"/>
           <p:cNvPicPr preferRelativeResize="0"/>
           <p:nvPr/>
         </p:nvPicPr>
@@ -17716,7 +18599,7 @@
       </p:pic>
       <p:pic>
         <p:nvPicPr>
-          <p:cNvPr id="347" name="Google Shape;347;p31"/>
+          <p:cNvPr id="351" name="Google Shape;351;p33"/>
           <p:cNvPicPr preferRelativeResize="0"/>
           <p:nvPr/>
         </p:nvPicPr>
@@ -17743,7 +18626,7 @@
       </p:pic>
       <p:pic>
         <p:nvPicPr>
-          <p:cNvPr id="348" name="Google Shape;348;p31"/>
+          <p:cNvPr id="352" name="Google Shape;352;p33"/>
           <p:cNvPicPr preferRelativeResize="0"/>
           <p:nvPr/>
         </p:nvPicPr>
@@ -17770,7 +18653,7 @@
       </p:pic>
       <p:pic>
         <p:nvPicPr>
-          <p:cNvPr id="349" name="Google Shape;349;p31"/>
+          <p:cNvPr id="353" name="Google Shape;353;p33"/>
           <p:cNvPicPr preferRelativeResize="0"/>
           <p:nvPr/>
         </p:nvPicPr>
@@ -17797,7 +18680,7 @@
       </p:pic>
       <p:pic>
         <p:nvPicPr>
-          <p:cNvPr id="350" name="Google Shape;350;p31"/>
+          <p:cNvPr id="354" name="Google Shape;354;p33"/>
           <p:cNvPicPr preferRelativeResize="0"/>
           <p:nvPr/>
         </p:nvPicPr>
@@ -17824,7 +18707,7 @@
       </p:pic>
       <p:pic>
         <p:nvPicPr>
-          <p:cNvPr id="351" name="Google Shape;351;p31"/>
+          <p:cNvPr id="355" name="Google Shape;355;p33"/>
           <p:cNvPicPr preferRelativeResize="0"/>
           <p:nvPr/>
         </p:nvPicPr>
@@ -17851,7 +18734,7 @@
       </p:pic>
       <p:pic>
         <p:nvPicPr>
-          <p:cNvPr id="352" name="Google Shape;352;p31"/>
+          <p:cNvPr id="356" name="Google Shape;356;p33"/>
           <p:cNvPicPr preferRelativeResize="0"/>
           <p:nvPr/>
         </p:nvPicPr>
@@ -17878,7 +18761,7 @@
       </p:pic>
       <p:pic>
         <p:nvPicPr>
-          <p:cNvPr id="353" name="Google Shape;353;p31"/>
+          <p:cNvPr id="357" name="Google Shape;357;p33"/>
           <p:cNvPicPr preferRelativeResize="0"/>
           <p:nvPr/>
         </p:nvPicPr>
@@ -17905,7 +18788,7 @@
       </p:pic>
       <p:pic>
         <p:nvPicPr>
-          <p:cNvPr id="354" name="Google Shape;354;p31"/>
+          <p:cNvPr id="358" name="Google Shape;358;p33"/>
           <p:cNvPicPr preferRelativeResize="0"/>
           <p:nvPr/>
         </p:nvPicPr>
@@ -17932,7 +18815,7 @@
       </p:pic>
       <p:pic>
         <p:nvPicPr>
-          <p:cNvPr id="355" name="Google Shape;355;p31"/>
+          <p:cNvPr id="359" name="Google Shape;359;p33"/>
           <p:cNvPicPr preferRelativeResize="0"/>
           <p:nvPr/>
         </p:nvPicPr>
@@ -17959,7 +18842,7 @@
       </p:pic>
       <p:pic>
         <p:nvPicPr>
-          <p:cNvPr id="356" name="Google Shape;356;p31"/>
+          <p:cNvPr id="360" name="Google Shape;360;p33"/>
           <p:cNvPicPr preferRelativeResize="0"/>
           <p:nvPr/>
         </p:nvPicPr>
@@ -17986,7 +18869,7 @@
       </p:pic>
       <p:pic>
         <p:nvPicPr>
-          <p:cNvPr id="357" name="Google Shape;357;p31"/>
+          <p:cNvPr id="361" name="Google Shape;361;p33"/>
           <p:cNvPicPr preferRelativeResize="0"/>
           <p:nvPr/>
         </p:nvPicPr>
@@ -18013,7 +18896,7 @@
       </p:pic>
       <p:pic>
         <p:nvPicPr>
-          <p:cNvPr id="358" name="Google Shape;358;p31"/>
+          <p:cNvPr id="362" name="Google Shape;362;p33"/>
           <p:cNvPicPr preferRelativeResize="0"/>
           <p:nvPr/>
         </p:nvPicPr>
@@ -18040,7 +18923,7 @@
       </p:pic>
       <p:pic>
         <p:nvPicPr>
-          <p:cNvPr id="359" name="Google Shape;359;p31"/>
+          <p:cNvPr id="363" name="Google Shape;363;p33"/>
           <p:cNvPicPr preferRelativeResize="0"/>
           <p:nvPr/>
         </p:nvPicPr>
@@ -18067,7 +18950,7 @@
       </p:pic>
       <p:pic>
         <p:nvPicPr>
-          <p:cNvPr id="360" name="Google Shape;360;p31"/>
+          <p:cNvPr id="364" name="Google Shape;364;p33"/>
           <p:cNvPicPr preferRelativeResize="0"/>
           <p:nvPr/>
         </p:nvPicPr>
@@ -18094,7 +18977,7 @@
       </p:pic>
       <p:pic>
         <p:nvPicPr>
-          <p:cNvPr id="361" name="Google Shape;361;p31"/>
+          <p:cNvPr id="365" name="Google Shape;365;p33"/>
           <p:cNvPicPr preferRelativeResize="0"/>
           <p:nvPr/>
         </p:nvPicPr>
@@ -18122,7 +19005,7 @@
       </p:pic>
       <p:pic>
         <p:nvPicPr>
-          <p:cNvPr id="362" name="Google Shape;362;p31"/>
+          <p:cNvPr id="366" name="Google Shape;366;p33"/>
           <p:cNvPicPr preferRelativeResize="0"/>
           <p:nvPr/>
         </p:nvPicPr>
@@ -18150,7 +19033,7 @@
       </p:pic>
       <p:pic>
         <p:nvPicPr>
-          <p:cNvPr id="363" name="Google Shape;363;p31"/>
+          <p:cNvPr id="367" name="Google Shape;367;p33"/>
           <p:cNvPicPr preferRelativeResize="0"/>
           <p:nvPr/>
         </p:nvPicPr>
@@ -18203,7 +19086,7 @@
     </p:bg>
     <p:spTree>
       <p:nvGrpSpPr>
-        <p:cNvPr id="368" name="Shape 368"/>
+        <p:cNvPr id="372" name="Shape 372"/>
         <p:cNvGrpSpPr/>
         <p:nvPr/>
       </p:nvGrpSpPr>
@@ -18217,7 +19100,7 @@
       </p:grpSpPr>
       <p:pic>
         <p:nvPicPr>
-          <p:cNvPr descr="preencoded.png" id="369" name="Google Shape;369;p32"/>
+          <p:cNvPr descr="preencoded.png" id="373" name="Google Shape;373;p34"/>
           <p:cNvPicPr preferRelativeResize="0"/>
           <p:nvPr/>
         </p:nvPicPr>
@@ -18244,7 +19127,7 @@
       </p:pic>
       <p:pic>
         <p:nvPicPr>
-          <p:cNvPr descr="preencoded.png" id="370" name="Google Shape;370;p32"/>
+          <p:cNvPr descr="preencoded.png" id="374" name="Google Shape;374;p34"/>
           <p:cNvPicPr preferRelativeResize="0"/>
           <p:nvPr/>
         </p:nvPicPr>
@@ -18271,7 +19154,7 @@
       </p:pic>
       <p:sp>
         <p:nvSpPr>
-          <p:cNvPr id="371" name="Google Shape;371;p32"/>
+          <p:cNvPr id="375" name="Google Shape;375;p34"/>
           <p:cNvSpPr/>
           <p:nvPr/>
         </p:nvSpPr>
@@ -18337,7 +19220,7 @@
       </p:sp>
       <p:sp>
         <p:nvSpPr>
-          <p:cNvPr id="372" name="Google Shape;372;p32"/>
+          <p:cNvPr id="376" name="Google Shape;376;p34"/>
           <p:cNvSpPr/>
           <p:nvPr/>
         </p:nvSpPr>
@@ -18403,7 +19286,7 @@
       </p:sp>
       <p:sp>
         <p:nvSpPr>
-          <p:cNvPr id="373" name="Google Shape;373;p32"/>
+          <p:cNvPr id="377" name="Google Shape;377;p34"/>
           <p:cNvSpPr/>
           <p:nvPr/>
         </p:nvSpPr>
@@ -18493,7 +19376,7 @@
       </p:sp>
       <p:sp>
         <p:nvSpPr>
-          <p:cNvPr id="374" name="Google Shape;374;p32"/>
+          <p:cNvPr id="378" name="Google Shape;378;p34"/>
           <p:cNvSpPr/>
           <p:nvPr/>
         </p:nvSpPr>
@@ -18559,7 +19442,7 @@
       </p:sp>
       <p:sp>
         <p:nvSpPr>
-          <p:cNvPr id="375" name="Google Shape;375;p32"/>
+          <p:cNvPr id="379" name="Google Shape;379;p34"/>
           <p:cNvSpPr/>
           <p:nvPr/>
         </p:nvSpPr>
@@ -18625,7 +19508,7 @@
       </p:sp>
       <p:sp>
         <p:nvSpPr>
-          <p:cNvPr id="376" name="Google Shape;376;p32"/>
+          <p:cNvPr id="380" name="Google Shape;380;p34"/>
           <p:cNvSpPr/>
           <p:nvPr/>
         </p:nvSpPr>
@@ -18691,7 +19574,7 @@
       </p:sp>
       <p:sp>
         <p:nvSpPr>
-          <p:cNvPr id="377" name="Google Shape;377;p32"/>
+          <p:cNvPr id="381" name="Google Shape;381;p34"/>
           <p:cNvSpPr/>
           <p:nvPr/>
         </p:nvSpPr>
@@ -18757,7 +19640,7 @@
       </p:sp>
       <p:sp>
         <p:nvSpPr>
-          <p:cNvPr id="378" name="Google Shape;378;p32"/>
+          <p:cNvPr id="382" name="Google Shape;382;p34"/>
           <p:cNvSpPr/>
           <p:nvPr/>
         </p:nvSpPr>
@@ -18823,7 +19706,7 @@
       </p:sp>
       <p:sp>
         <p:nvSpPr>
-          <p:cNvPr id="379" name="Google Shape;379;p32"/>
+          <p:cNvPr id="383" name="Google Shape;383;p34"/>
           <p:cNvSpPr/>
           <p:nvPr/>
         </p:nvSpPr>
@@ -18889,7 +19772,7 @@
       </p:sp>
       <p:pic>
         <p:nvPicPr>
-          <p:cNvPr descr="preencoded.png" id="380" name="Google Shape;380;p32"/>
+          <p:cNvPr descr="preencoded.png" id="384" name="Google Shape;384;p34"/>
           <p:cNvPicPr preferRelativeResize="0"/>
           <p:nvPr/>
         </p:nvPicPr>
@@ -18916,7 +19799,7 @@
       </p:pic>
       <p:sp>
         <p:nvSpPr>
-          <p:cNvPr id="381" name="Google Shape;381;p32"/>
+          <p:cNvPr id="385" name="Google Shape;385;p34"/>
           <p:cNvSpPr txBox="1"/>
           <p:nvPr/>
         </p:nvSpPr>
@@ -19037,7 +19920,7 @@
       </p:sp>
       <p:pic>
         <p:nvPicPr>
-          <p:cNvPr id="382" name="Google Shape;382;p32" title="Screenshot 2025-10-27 at 12.16.38 PM.png"/>
+          <p:cNvPr id="386" name="Google Shape;386;p34" title="Screenshot 2025-10-27 at 12.16.38 PM.png"/>
           <p:cNvPicPr preferRelativeResize="0"/>
           <p:nvPr/>
         </p:nvPicPr>
@@ -19082,7 +19965,7 @@
     </p:bg>
     <p:spTree>
       <p:nvGrpSpPr>
-        <p:cNvPr id="71" name="Shape 71"/>
+        <p:cNvPr id="75" name="Shape 75"/>
         <p:cNvGrpSpPr/>
         <p:nvPr/>
       </p:nvGrpSpPr>
@@ -19096,7 +19979,7 @@
       </p:grpSpPr>
       <p:pic>
         <p:nvPicPr>
-          <p:cNvPr descr="bg-dark-glow.png" id="72" name="Google Shape;72;p15"/>
+          <p:cNvPr descr="bg-dark-glow.png" id="76" name="Google Shape;76;p17"/>
           <p:cNvPicPr preferRelativeResize="0"/>
           <p:nvPr/>
         </p:nvPicPr>
@@ -19123,7 +20006,7 @@
       </p:pic>
       <p:pic>
         <p:nvPicPr>
-          <p:cNvPr descr="neo-logo-25-white.png" id="73" name="Google Shape;73;p15"/>
+          <p:cNvPr descr="neo-logo-25-white.png" id="77" name="Google Shape;77;p17"/>
           <p:cNvPicPr preferRelativeResize="0"/>
           <p:nvPr/>
         </p:nvPicPr>
@@ -19150,7 +20033,7 @@
       </p:pic>
       <p:sp>
         <p:nvSpPr>
-          <p:cNvPr id="74" name="Google Shape;74;p15"/>
+          <p:cNvPr id="78" name="Google Shape;78;p17"/>
           <p:cNvSpPr txBox="1"/>
           <p:nvPr/>
         </p:nvSpPr>
@@ -19216,7 +20099,7 @@
       </p:sp>
       <p:sp>
         <p:nvSpPr>
-          <p:cNvPr id="75" name="Google Shape;75;p15"/>
+          <p:cNvPr id="79" name="Google Shape;79;p17"/>
           <p:cNvSpPr txBox="1"/>
           <p:nvPr/>
         </p:nvSpPr>
@@ -19322,7 +20205,7 @@
       </p:sp>
       <p:sp>
         <p:nvSpPr>
-          <p:cNvPr id="76" name="Google Shape;76;p15"/>
+          <p:cNvPr id="80" name="Google Shape;80;p17"/>
           <p:cNvSpPr txBox="1"/>
           <p:nvPr/>
         </p:nvSpPr>
@@ -19388,7 +20271,7 @@
       </p:sp>
       <p:sp>
         <p:nvSpPr>
-          <p:cNvPr id="77" name="Google Shape;77;p15"/>
+          <p:cNvPr id="81" name="Google Shape;81;p17"/>
           <p:cNvSpPr txBox="1"/>
           <p:nvPr/>
         </p:nvSpPr>
@@ -19480,7 +20363,7 @@
     </p:bg>
     <p:spTree>
       <p:nvGrpSpPr>
-        <p:cNvPr id="82" name="Shape 82"/>
+        <p:cNvPr id="86" name="Shape 86"/>
         <p:cNvGrpSpPr/>
         <p:nvPr/>
       </p:nvGrpSpPr>
@@ -19494,7 +20377,7 @@
       </p:grpSpPr>
       <p:sp>
         <p:nvSpPr>
-          <p:cNvPr id="83" name="Google Shape;83;p16"/>
+          <p:cNvPr id="87" name="Google Shape;87;p18"/>
           <p:cNvSpPr txBox="1"/>
           <p:nvPr/>
         </p:nvSpPr>
@@ -19560,7 +20443,7 @@
       </p:sp>
       <p:sp>
         <p:nvSpPr>
-          <p:cNvPr id="84" name="Google Shape;84;p16"/>
+          <p:cNvPr id="88" name="Google Shape;88;p18"/>
           <p:cNvSpPr txBox="1"/>
           <p:nvPr/>
         </p:nvSpPr>
@@ -19626,7 +20509,7 @@
       </p:sp>
       <p:sp>
         <p:nvSpPr>
-          <p:cNvPr id="85" name="Google Shape;85;p16"/>
+          <p:cNvPr id="89" name="Google Shape;89;p18"/>
           <p:cNvSpPr txBox="1"/>
           <p:nvPr/>
         </p:nvSpPr>
@@ -19692,7 +20575,7 @@
       </p:sp>
       <p:sp>
         <p:nvSpPr>
-          <p:cNvPr id="86" name="Google Shape;86;p16"/>
+          <p:cNvPr id="90" name="Google Shape;90;p18"/>
           <p:cNvSpPr/>
           <p:nvPr/>
         </p:nvSpPr>
@@ -19766,7 +20649,7 @@
       </p:sp>
       <p:sp>
         <p:nvSpPr>
-          <p:cNvPr id="87" name="Google Shape;87;p16"/>
+          <p:cNvPr id="91" name="Google Shape;91;p18"/>
           <p:cNvSpPr txBox="1"/>
           <p:nvPr/>
         </p:nvSpPr>
@@ -19832,7 +20715,7 @@
       </p:sp>
       <p:sp>
         <p:nvSpPr>
-          <p:cNvPr id="88" name="Google Shape;88;p16"/>
+          <p:cNvPr id="92" name="Google Shape;92;p18"/>
           <p:cNvSpPr txBox="1"/>
           <p:nvPr/>
         </p:nvSpPr>
@@ -19898,7 +20781,7 @@
       </p:sp>
       <p:sp>
         <p:nvSpPr>
-          <p:cNvPr id="89" name="Google Shape;89;p16"/>
+          <p:cNvPr id="93" name="Google Shape;93;p18"/>
           <p:cNvSpPr/>
           <p:nvPr/>
         </p:nvSpPr>
@@ -19972,7 +20855,7 @@
       </p:sp>
       <p:sp>
         <p:nvSpPr>
-          <p:cNvPr id="90" name="Google Shape;90;p16"/>
+          <p:cNvPr id="94" name="Google Shape;94;p18"/>
           <p:cNvSpPr txBox="1"/>
           <p:nvPr/>
         </p:nvSpPr>
@@ -20038,7 +20921,7 @@
       </p:sp>
       <p:sp>
         <p:nvSpPr>
-          <p:cNvPr id="91" name="Google Shape;91;p16"/>
+          <p:cNvPr id="95" name="Google Shape;95;p18"/>
           <p:cNvSpPr txBox="1"/>
           <p:nvPr/>
         </p:nvSpPr>
@@ -20104,7 +20987,7 @@
       </p:sp>
       <p:sp>
         <p:nvSpPr>
-          <p:cNvPr id="92" name="Google Shape;92;p16"/>
+          <p:cNvPr id="96" name="Google Shape;96;p18"/>
           <p:cNvSpPr/>
           <p:nvPr/>
         </p:nvSpPr>
@@ -20178,7 +21061,7 @@
       </p:sp>
       <p:sp>
         <p:nvSpPr>
-          <p:cNvPr id="93" name="Google Shape;93;p16"/>
+          <p:cNvPr id="97" name="Google Shape;97;p18"/>
           <p:cNvSpPr txBox="1"/>
           <p:nvPr/>
         </p:nvSpPr>
@@ -20244,7 +21127,7 @@
       </p:sp>
       <p:sp>
         <p:nvSpPr>
-          <p:cNvPr id="94" name="Google Shape;94;p16"/>
+          <p:cNvPr id="98" name="Google Shape;98;p18"/>
           <p:cNvSpPr txBox="1"/>
           <p:nvPr/>
         </p:nvSpPr>
@@ -20310,7 +21193,7 @@
       </p:sp>
       <p:sp>
         <p:nvSpPr>
-          <p:cNvPr id="95" name="Google Shape;95;p16"/>
+          <p:cNvPr id="99" name="Google Shape;99;p18"/>
           <p:cNvSpPr/>
           <p:nvPr/>
         </p:nvSpPr>
@@ -20384,7 +21267,7 @@
       </p:sp>
       <p:sp>
         <p:nvSpPr>
-          <p:cNvPr id="96" name="Google Shape;96;p16"/>
+          <p:cNvPr id="100" name="Google Shape;100;p18"/>
           <p:cNvSpPr txBox="1"/>
           <p:nvPr/>
         </p:nvSpPr>
@@ -20450,7 +21333,7 @@
       </p:sp>
       <p:sp>
         <p:nvSpPr>
-          <p:cNvPr id="97" name="Google Shape;97;p16"/>
+          <p:cNvPr id="101" name="Google Shape;101;p18"/>
           <p:cNvSpPr txBox="1"/>
           <p:nvPr/>
         </p:nvSpPr>
@@ -20534,7 +21417,7 @@
     </p:bg>
     <p:spTree>
       <p:nvGrpSpPr>
-        <p:cNvPr id="102" name="Shape 102"/>
+        <p:cNvPr id="106" name="Shape 106"/>
         <p:cNvGrpSpPr/>
         <p:nvPr/>
       </p:nvGrpSpPr>
@@ -20548,7 +21431,7 @@
       </p:grpSpPr>
       <p:pic>
         <p:nvPicPr>
-          <p:cNvPr descr="bg-dark-glow.png" id="103" name="Google Shape;103;p17"/>
+          <p:cNvPr descr="bg-dark-glow.png" id="107" name="Google Shape;107;p19"/>
           <p:cNvPicPr preferRelativeResize="0"/>
           <p:nvPr/>
         </p:nvPicPr>
@@ -20575,7 +21458,7 @@
       </p:pic>
       <p:pic>
         <p:nvPicPr>
-          <p:cNvPr descr="neo-logo-25-white.png" id="104" name="Google Shape;104;p17"/>
+          <p:cNvPr descr="neo-logo-25-white.png" id="108" name="Google Shape;108;p19"/>
           <p:cNvPicPr preferRelativeResize="0"/>
           <p:nvPr/>
         </p:nvPicPr>
@@ -20602,7 +21485,7 @@
       </p:pic>
       <p:sp>
         <p:nvSpPr>
-          <p:cNvPr id="105" name="Google Shape;105;p17"/>
+          <p:cNvPr id="109" name="Google Shape;109;p19"/>
           <p:cNvSpPr txBox="1"/>
           <p:nvPr/>
         </p:nvSpPr>
@@ -20668,7 +21551,7 @@
       </p:sp>
       <p:sp>
         <p:nvSpPr>
-          <p:cNvPr id="106" name="Google Shape;106;p17"/>
+          <p:cNvPr id="110" name="Google Shape;110;p19"/>
           <p:cNvSpPr txBox="1"/>
           <p:nvPr/>
         </p:nvSpPr>
@@ -20734,7 +21617,7 @@
       </p:sp>
       <p:sp>
         <p:nvSpPr>
-          <p:cNvPr id="107" name="Google Shape;107;p17"/>
+          <p:cNvPr id="111" name="Google Shape;111;p19"/>
           <p:cNvSpPr txBox="1"/>
           <p:nvPr/>
         </p:nvSpPr>
@@ -20811,7 +21694,7 @@
   <p:cSld>
     <p:spTree>
       <p:nvGrpSpPr>
-        <p:cNvPr id="111" name="Shape 111"/>
+        <p:cNvPr id="115" name="Shape 115"/>
         <p:cNvGrpSpPr/>
         <p:nvPr/>
       </p:nvGrpSpPr>
@@ -20825,7 +21708,7 @@
       </p:grpSpPr>
       <p:sp>
         <p:nvSpPr>
-          <p:cNvPr id="112" name="Google Shape;112;p18"/>
+          <p:cNvPr id="116" name="Google Shape;116;p20"/>
           <p:cNvSpPr txBox="1"/>
           <p:nvPr/>
         </p:nvSpPr>
@@ -20891,7 +21774,7 @@
       </p:sp>
       <p:sp>
         <p:nvSpPr>
-          <p:cNvPr id="113" name="Google Shape;113;p18"/>
+          <p:cNvPr id="117" name="Google Shape;117;p20"/>
           <p:cNvSpPr txBox="1"/>
           <p:nvPr/>
         </p:nvSpPr>
@@ -20969,7 +21852,7 @@
       </p:sp>
       <p:sp>
         <p:nvSpPr>
-          <p:cNvPr id="114" name="Google Shape;114;p18"/>
+          <p:cNvPr id="118" name="Google Shape;118;p20"/>
           <p:cNvSpPr/>
           <p:nvPr/>
         </p:nvSpPr>
@@ -21034,7 +21917,7 @@
       </p:sp>
       <p:sp>
         <p:nvSpPr>
-          <p:cNvPr id="115" name="Google Shape;115;p18"/>
+          <p:cNvPr id="119" name="Google Shape;119;p20"/>
           <p:cNvSpPr txBox="1"/>
           <p:nvPr/>
         </p:nvSpPr>
@@ -21118,7 +22001,7 @@
     </p:bg>
     <p:spTree>
       <p:nvGrpSpPr>
-        <p:cNvPr id="120" name="Shape 120"/>
+        <p:cNvPr id="124" name="Shape 124"/>
         <p:cNvGrpSpPr/>
         <p:nvPr/>
       </p:nvGrpSpPr>
@@ -21132,7 +22015,7 @@
       </p:grpSpPr>
       <p:pic>
         <p:nvPicPr>
-          <p:cNvPr descr="bg-dark-glow.png" id="121" name="Google Shape;121;p19"/>
+          <p:cNvPr descr="bg-dark-glow.png" id="125" name="Google Shape;125;p21"/>
           <p:cNvPicPr preferRelativeResize="0"/>
           <p:nvPr/>
         </p:nvPicPr>
@@ -21159,7 +22042,7 @@
       </p:pic>
       <p:pic>
         <p:nvPicPr>
-          <p:cNvPr descr="neo-logo-25-white.png" id="122" name="Google Shape;122;p19"/>
+          <p:cNvPr descr="neo-logo-25-white.png" id="126" name="Google Shape;126;p21"/>
           <p:cNvPicPr preferRelativeResize="0"/>
           <p:nvPr/>
         </p:nvPicPr>
@@ -21186,7 +22069,7 @@
       </p:pic>
       <p:sp>
         <p:nvSpPr>
-          <p:cNvPr id="123" name="Google Shape;123;p19"/>
+          <p:cNvPr id="127" name="Google Shape;127;p21"/>
           <p:cNvSpPr txBox="1"/>
           <p:nvPr/>
         </p:nvSpPr>
@@ -21252,7 +22135,7 @@
       </p:sp>
       <p:sp>
         <p:nvSpPr>
-          <p:cNvPr id="124" name="Google Shape;124;p19"/>
+          <p:cNvPr id="128" name="Google Shape;128;p21"/>
           <p:cNvSpPr txBox="1"/>
           <p:nvPr/>
         </p:nvSpPr>
@@ -21330,7 +22213,7 @@
       </p:sp>
       <p:sp>
         <p:nvSpPr>
-          <p:cNvPr id="125" name="Google Shape;125;p19"/>
+          <p:cNvPr id="129" name="Google Shape;129;p21"/>
           <p:cNvSpPr txBox="1"/>
           <p:nvPr/>
         </p:nvSpPr>
@@ -21407,7 +22290,7 @@
   <p:cSld>
     <p:spTree>
       <p:nvGrpSpPr>
-        <p:cNvPr id="129" name="Shape 129"/>
+        <p:cNvPr id="133" name="Shape 133"/>
         <p:cNvGrpSpPr/>
         <p:nvPr/>
       </p:nvGrpSpPr>
@@ -21421,7 +22304,7 @@
       </p:grpSpPr>
       <p:sp>
         <p:nvSpPr>
-          <p:cNvPr id="130" name="Google Shape;130;p20"/>
+          <p:cNvPr id="134" name="Google Shape;134;p22"/>
           <p:cNvSpPr txBox="1"/>
           <p:nvPr/>
         </p:nvSpPr>
@@ -21487,7 +22370,7 @@
       </p:sp>
       <p:sp>
         <p:nvSpPr>
-          <p:cNvPr id="131" name="Google Shape;131;p20"/>
+          <p:cNvPr id="135" name="Google Shape;135;p22"/>
           <p:cNvSpPr txBox="1"/>
           <p:nvPr/>
         </p:nvSpPr>
@@ -21553,7 +22436,7 @@
       </p:sp>
       <p:sp>
         <p:nvSpPr>
-          <p:cNvPr id="132" name="Google Shape;132;p20"/>
+          <p:cNvPr id="136" name="Google Shape;136;p22"/>
           <p:cNvSpPr txBox="1"/>
           <p:nvPr/>
         </p:nvSpPr>
@@ -21655,7 +22538,7 @@
       </p:sp>
       <p:sp>
         <p:nvSpPr>
-          <p:cNvPr id="133" name="Google Shape;133;p20"/>
+          <p:cNvPr id="137" name="Google Shape;137;p22"/>
           <p:cNvSpPr/>
           <p:nvPr/>
         </p:nvSpPr>
@@ -21731,7 +22614,7 @@
   <p:cSld>
     <p:spTree>
       <p:nvGrpSpPr>
-        <p:cNvPr id="137" name="Shape 137"/>
+        <p:cNvPr id="141" name="Shape 141"/>
         <p:cNvGrpSpPr/>
         <p:nvPr/>
       </p:nvGrpSpPr>
@@ -21745,7 +22628,7 @@
       </p:grpSpPr>
       <p:sp>
         <p:nvSpPr>
-          <p:cNvPr id="138" name="Google Shape;138;p21"/>
+          <p:cNvPr id="142" name="Google Shape;142;p23"/>
           <p:cNvSpPr txBox="1"/>
           <p:nvPr/>
         </p:nvSpPr>
@@ -21811,7 +22694,7 @@
       </p:sp>
       <p:sp>
         <p:nvSpPr>
-          <p:cNvPr id="139" name="Google Shape;139;p21"/>
+          <p:cNvPr id="143" name="Google Shape;143;p23"/>
           <p:cNvSpPr txBox="1"/>
           <p:nvPr/>
         </p:nvSpPr>
@@ -21877,7 +22760,7 @@
       </p:sp>
       <p:sp>
         <p:nvSpPr>
-          <p:cNvPr id="140" name="Google Shape;140;p21"/>
+          <p:cNvPr id="144" name="Google Shape;144;p23"/>
           <p:cNvSpPr txBox="1"/>
           <p:nvPr/>
         </p:nvSpPr>
@@ -21955,7 +22838,7 @@
       </p:sp>
       <p:sp>
         <p:nvSpPr>
-          <p:cNvPr id="141" name="Google Shape;141;p21"/>
+          <p:cNvPr id="145" name="Google Shape;145;p23"/>
           <p:cNvSpPr txBox="1"/>
           <p:nvPr/>
         </p:nvSpPr>
@@ -22021,7 +22904,7 @@
       </p:sp>
       <p:sp>
         <p:nvSpPr>
-          <p:cNvPr id="142" name="Google Shape;142;p21"/>
+          <p:cNvPr id="146" name="Google Shape;146;p23"/>
           <p:cNvSpPr/>
           <p:nvPr/>
         </p:nvSpPr>
@@ -22089,7 +22972,7 @@
       </p:sp>
       <p:sp>
         <p:nvSpPr>
-          <p:cNvPr id="143" name="Google Shape;143;p21"/>
+          <p:cNvPr id="147" name="Google Shape;147;p23"/>
           <p:cNvSpPr/>
           <p:nvPr/>
         </p:nvSpPr>
@@ -22156,7 +23039,7 @@
       </p:sp>
       <p:sp>
         <p:nvSpPr>
-          <p:cNvPr id="144" name="Google Shape;144;p21"/>
+          <p:cNvPr id="148" name="Google Shape;148;p23"/>
           <p:cNvSpPr txBox="1"/>
           <p:nvPr/>
         </p:nvSpPr>
@@ -22222,7 +23105,7 @@
       </p:sp>
       <p:pic>
         <p:nvPicPr>
-          <p:cNvPr descr="icon_pilar1.png" id="145" name="Google Shape;145;p21"/>
+          <p:cNvPr descr="icon_pilar1.png" id="149" name="Google Shape;149;p23"/>
           <p:cNvPicPr preferRelativeResize="0"/>
           <p:nvPr/>
         </p:nvPicPr>
@@ -22249,7 +23132,7 @@
       </p:pic>
       <p:sp>
         <p:nvSpPr>
-          <p:cNvPr id="146" name="Google Shape;146;p21"/>
+          <p:cNvPr id="150" name="Google Shape;150;p23"/>
           <p:cNvSpPr txBox="1"/>
           <p:nvPr/>
         </p:nvSpPr>
@@ -22315,7 +23198,7 @@
       </p:sp>
       <p:sp>
         <p:nvSpPr>
-          <p:cNvPr id="147" name="Google Shape;147;p21"/>
+          <p:cNvPr id="151" name="Google Shape;151;p23"/>
           <p:cNvSpPr/>
           <p:nvPr/>
         </p:nvSpPr>
@@ -22380,7 +23263,7 @@
       </p:sp>
       <p:sp>
         <p:nvSpPr>
-          <p:cNvPr id="148" name="Google Shape;148;p21"/>
+          <p:cNvPr id="152" name="Google Shape;152;p23"/>
           <p:cNvSpPr txBox="1"/>
           <p:nvPr/>
         </p:nvSpPr>
@@ -22446,7 +23329,7 @@
       </p:sp>
       <p:sp>
         <p:nvSpPr>
-          <p:cNvPr id="149" name="Google Shape;149;p21"/>
+          <p:cNvPr id="153" name="Google Shape;153;p23"/>
           <p:cNvSpPr/>
           <p:nvPr/>
         </p:nvSpPr>
@@ -22514,7 +23397,7 @@
       </p:sp>
       <p:sp>
         <p:nvSpPr>
-          <p:cNvPr id="150" name="Google Shape;150;p21"/>
+          <p:cNvPr id="154" name="Google Shape;154;p23"/>
           <p:cNvSpPr/>
           <p:nvPr/>
         </p:nvSpPr>
@@ -22581,7 +23464,7 @@
       </p:sp>
       <p:sp>
         <p:nvSpPr>
-          <p:cNvPr id="151" name="Google Shape;151;p21"/>
+          <p:cNvPr id="155" name="Google Shape;155;p23"/>
           <p:cNvSpPr txBox="1"/>
           <p:nvPr/>
         </p:nvSpPr>
@@ -22647,7 +23530,7 @@
       </p:sp>
       <p:pic>
         <p:nvPicPr>
-          <p:cNvPr descr="icon_pilar2.png" id="152" name="Google Shape;152;p21"/>
+          <p:cNvPr descr="icon_pilar2.png" id="156" name="Google Shape;156;p23"/>
           <p:cNvPicPr preferRelativeResize="0"/>
           <p:nvPr/>
         </p:nvPicPr>
@@ -22674,7 +23557,7 @@
       </p:pic>
       <p:sp>
         <p:nvSpPr>
-          <p:cNvPr id="153" name="Google Shape;153;p21"/>
+          <p:cNvPr id="157" name="Google Shape;157;p23"/>
           <p:cNvSpPr txBox="1"/>
           <p:nvPr/>
         </p:nvSpPr>
@@ -22740,7 +23623,7 @@
       </p:sp>
       <p:sp>
         <p:nvSpPr>
-          <p:cNvPr id="154" name="Google Shape;154;p21"/>
+          <p:cNvPr id="158" name="Google Shape;158;p23"/>
           <p:cNvSpPr/>
           <p:nvPr/>
         </p:nvSpPr>
@@ -22805,7 +23688,7 @@
       </p:sp>
       <p:sp>
         <p:nvSpPr>
-          <p:cNvPr id="155" name="Google Shape;155;p21"/>
+          <p:cNvPr id="159" name="Google Shape;159;p23"/>
           <p:cNvSpPr txBox="1"/>
           <p:nvPr/>
         </p:nvSpPr>
@@ -22871,7 +23754,7 @@
       </p:sp>
       <p:sp>
         <p:nvSpPr>
-          <p:cNvPr id="156" name="Google Shape;156;p21"/>
+          <p:cNvPr id="160" name="Google Shape;160;p23"/>
           <p:cNvSpPr/>
           <p:nvPr/>
         </p:nvSpPr>
@@ -22939,7 +23822,7 @@
       </p:sp>
       <p:sp>
         <p:nvSpPr>
-          <p:cNvPr id="157" name="Google Shape;157;p21"/>
+          <p:cNvPr id="161" name="Google Shape;161;p23"/>
           <p:cNvSpPr/>
           <p:nvPr/>
         </p:nvSpPr>
@@ -23006,7 +23889,7 @@
       </p:sp>
       <p:sp>
         <p:nvSpPr>
-          <p:cNvPr id="158" name="Google Shape;158;p21"/>
+          <p:cNvPr id="162" name="Google Shape;162;p23"/>
           <p:cNvSpPr txBox="1"/>
           <p:nvPr/>
         </p:nvSpPr>
@@ -23072,7 +23955,7 @@
       </p:sp>
       <p:pic>
         <p:nvPicPr>
-          <p:cNvPr descr="icon_pilar3.png" id="159" name="Google Shape;159;p21"/>
+          <p:cNvPr descr="icon_pilar3.png" id="163" name="Google Shape;163;p23"/>
           <p:cNvPicPr preferRelativeResize="0"/>
           <p:nvPr/>
         </p:nvPicPr>
@@ -23099,7 +23982,7 @@
       </p:pic>
       <p:sp>
         <p:nvSpPr>
-          <p:cNvPr id="160" name="Google Shape;160;p21"/>
+          <p:cNvPr id="164" name="Google Shape;164;p23"/>
           <p:cNvSpPr txBox="1"/>
           <p:nvPr/>
         </p:nvSpPr>
@@ -23165,7 +24048,7 @@
       </p:sp>
       <p:sp>
         <p:nvSpPr>
-          <p:cNvPr id="161" name="Google Shape;161;p21"/>
+          <p:cNvPr id="165" name="Google Shape;165;p23"/>
           <p:cNvSpPr/>
           <p:nvPr/>
         </p:nvSpPr>
@@ -23230,7 +24113,7 @@
       </p:sp>
       <p:sp>
         <p:nvSpPr>
-          <p:cNvPr id="162" name="Google Shape;162;p21"/>
+          <p:cNvPr id="166" name="Google Shape;166;p23"/>
           <p:cNvSpPr txBox="1"/>
           <p:nvPr/>
         </p:nvSpPr>
@@ -23307,7 +24190,7 @@
   <p:cSld>
     <p:spTree>
       <p:nvGrpSpPr>
-        <p:cNvPr id="166" name="Shape 166"/>
+        <p:cNvPr id="170" name="Shape 170"/>
         <p:cNvGrpSpPr/>
         <p:nvPr/>
       </p:nvGrpSpPr>
@@ -23321,7 +24204,7 @@
       </p:grpSpPr>
       <p:sp>
         <p:nvSpPr>
-          <p:cNvPr id="167" name="Google Shape;167;p22"/>
+          <p:cNvPr id="171" name="Google Shape;171;p24"/>
           <p:cNvSpPr txBox="1"/>
           <p:nvPr/>
         </p:nvSpPr>
@@ -23387,7 +24270,7 @@
       </p:sp>
       <p:sp>
         <p:nvSpPr>
-          <p:cNvPr id="168" name="Google Shape;168;p22"/>
+          <p:cNvPr id="172" name="Google Shape;172;p24"/>
           <p:cNvSpPr txBox="1"/>
           <p:nvPr/>
         </p:nvSpPr>
@@ -23453,7 +24336,7 @@
       </p:sp>
       <p:sp>
         <p:nvSpPr>
-          <p:cNvPr id="169" name="Google Shape;169;p22"/>
+          <p:cNvPr id="173" name="Google Shape;173;p24"/>
           <p:cNvSpPr txBox="1"/>
           <p:nvPr/>
         </p:nvSpPr>
@@ -23531,7 +24414,7 @@
       </p:sp>
       <p:sp>
         <p:nvSpPr>
-          <p:cNvPr id="170" name="Google Shape;170;p22"/>
+          <p:cNvPr id="174" name="Google Shape;174;p24"/>
           <p:cNvSpPr txBox="1"/>
           <p:nvPr/>
         </p:nvSpPr>
@@ -23597,7 +24480,7 @@
       </p:sp>
       <p:sp>
         <p:nvSpPr>
-          <p:cNvPr id="171" name="Google Shape;171;p22"/>
+          <p:cNvPr id="175" name="Google Shape;175;p24"/>
           <p:cNvSpPr/>
           <p:nvPr/>
         </p:nvSpPr>
@@ -23657,7 +24540,7 @@
       </p:sp>
       <p:sp>
         <p:nvSpPr>
-          <p:cNvPr id="172" name="Google Shape;172;p22"/>
+          <p:cNvPr id="176" name="Google Shape;176;p24"/>
           <p:cNvSpPr txBox="1"/>
           <p:nvPr/>
         </p:nvSpPr>
@@ -23723,7 +24606,7 @@
       </p:sp>
       <p:sp>
         <p:nvSpPr>
-          <p:cNvPr id="173" name="Google Shape;173;p22"/>
+          <p:cNvPr id="177" name="Google Shape;177;p24"/>
           <p:cNvSpPr txBox="1"/>
           <p:nvPr/>
         </p:nvSpPr>
@@ -23789,7 +24672,7 @@
       </p:sp>
       <p:sp>
         <p:nvSpPr>
-          <p:cNvPr id="174" name="Google Shape;174;p22"/>
+          <p:cNvPr id="178" name="Google Shape;178;p24"/>
           <p:cNvSpPr/>
           <p:nvPr/>
         </p:nvSpPr>
@@ -23854,7 +24737,7 @@
       </p:sp>
       <p:sp>
         <p:nvSpPr>
-          <p:cNvPr id="175" name="Google Shape;175;p22"/>
+          <p:cNvPr id="179" name="Google Shape;179;p24"/>
           <p:cNvSpPr txBox="1"/>
           <p:nvPr/>
         </p:nvSpPr>
@@ -23920,7 +24803,7 @@
       </p:sp>
       <p:sp>
         <p:nvSpPr>
-          <p:cNvPr id="176" name="Google Shape;176;p22"/>
+          <p:cNvPr id="180" name="Google Shape;180;p24"/>
           <p:cNvSpPr/>
           <p:nvPr/>
         </p:nvSpPr>
@@ -23987,7 +24870,7 @@
       </p:sp>
       <p:sp>
         <p:nvSpPr>
-          <p:cNvPr id="177" name="Google Shape;177;p22"/>
+          <p:cNvPr id="181" name="Google Shape;181;p24"/>
           <p:cNvSpPr txBox="1"/>
           <p:nvPr/>
         </p:nvSpPr>
@@ -24053,7 +24936,7 @@
       </p:sp>
       <p:sp>
         <p:nvSpPr>
-          <p:cNvPr id="178" name="Google Shape;178;p22"/>
+          <p:cNvPr id="182" name="Google Shape;182;p24"/>
           <p:cNvSpPr/>
           <p:nvPr/>
         </p:nvSpPr>
@@ -24113,7 +24996,7 @@
       </p:sp>
       <p:sp>
         <p:nvSpPr>
-          <p:cNvPr id="179" name="Google Shape;179;p22"/>
+          <p:cNvPr id="183" name="Google Shape;183;p24"/>
           <p:cNvSpPr txBox="1"/>
           <p:nvPr/>
         </p:nvSpPr>
@@ -24179,7 +25062,7 @@
       </p:sp>
       <p:sp>
         <p:nvSpPr>
-          <p:cNvPr id="180" name="Google Shape;180;p22"/>
+          <p:cNvPr id="184" name="Google Shape;184;p24"/>
           <p:cNvSpPr txBox="1"/>
           <p:nvPr/>
         </p:nvSpPr>
@@ -24245,7 +25128,7 @@
       </p:sp>
       <p:sp>
         <p:nvSpPr>
-          <p:cNvPr id="181" name="Google Shape;181;p22"/>
+          <p:cNvPr id="185" name="Google Shape;185;p24"/>
           <p:cNvSpPr/>
           <p:nvPr/>
         </p:nvSpPr>
@@ -24310,7 +25193,7 @@
       </p:sp>
       <p:sp>
         <p:nvSpPr>
-          <p:cNvPr id="182" name="Google Shape;182;p22"/>
+          <p:cNvPr id="186" name="Google Shape;186;p24"/>
           <p:cNvSpPr txBox="1"/>
           <p:nvPr/>
         </p:nvSpPr>
@@ -24376,7 +25259,7 @@
       </p:sp>
       <p:sp>
         <p:nvSpPr>
-          <p:cNvPr id="183" name="Google Shape;183;p22"/>
+          <p:cNvPr id="187" name="Google Shape;187;p24"/>
           <p:cNvSpPr/>
           <p:nvPr/>
         </p:nvSpPr>
@@ -24443,7 +25326,7 @@
       </p:sp>
       <p:sp>
         <p:nvSpPr>
-          <p:cNvPr id="184" name="Google Shape;184;p22"/>
+          <p:cNvPr id="188" name="Google Shape;188;p24"/>
           <p:cNvSpPr txBox="1"/>
           <p:nvPr/>
         </p:nvSpPr>
@@ -24509,7 +25392,7 @@
       </p:sp>
       <p:sp>
         <p:nvSpPr>
-          <p:cNvPr id="185" name="Google Shape;185;p22"/>
+          <p:cNvPr id="189" name="Google Shape;189;p24"/>
           <p:cNvSpPr/>
           <p:nvPr/>
         </p:nvSpPr>
@@ -24569,7 +25452,7 @@
       </p:sp>
       <p:sp>
         <p:nvSpPr>
-          <p:cNvPr id="186" name="Google Shape;186;p22"/>
+          <p:cNvPr id="190" name="Google Shape;190;p24"/>
           <p:cNvSpPr txBox="1"/>
           <p:nvPr/>
         </p:nvSpPr>
@@ -24635,7 +25518,7 @@
       </p:sp>
       <p:sp>
         <p:nvSpPr>
-          <p:cNvPr id="187" name="Google Shape;187;p22"/>
+          <p:cNvPr id="191" name="Google Shape;191;p24"/>
           <p:cNvSpPr txBox="1"/>
           <p:nvPr/>
         </p:nvSpPr>
@@ -24701,7 +25584,7 @@
       </p:sp>
       <p:sp>
         <p:nvSpPr>
-          <p:cNvPr id="188" name="Google Shape;188;p22"/>
+          <p:cNvPr id="192" name="Google Shape;192;p24"/>
           <p:cNvSpPr/>
           <p:nvPr/>
         </p:nvSpPr>
@@ -24766,7 +25649,7 @@
       </p:sp>
       <p:sp>
         <p:nvSpPr>
-          <p:cNvPr id="189" name="Google Shape;189;p22"/>
+          <p:cNvPr id="193" name="Google Shape;193;p24"/>
           <p:cNvSpPr txBox="1"/>
           <p:nvPr/>
         </p:nvSpPr>
@@ -24832,7 +25715,7 @@
       </p:sp>
       <p:sp>
         <p:nvSpPr>
-          <p:cNvPr id="190" name="Google Shape;190;p22"/>
+          <p:cNvPr id="194" name="Google Shape;194;p24"/>
           <p:cNvSpPr/>
           <p:nvPr/>
         </p:nvSpPr>
@@ -24899,7 +25782,7 @@
       </p:sp>
       <p:sp>
         <p:nvSpPr>
-          <p:cNvPr id="191" name="Google Shape;191;p22"/>
+          <p:cNvPr id="195" name="Google Shape;195;p24"/>
           <p:cNvSpPr txBox="1"/>
           <p:nvPr/>
         </p:nvSpPr>
@@ -24972,6 +25855,285 @@
 </file>
 
 <file path=ppt/theme/theme1.xml><?xml version="1.0" encoding="utf-8"?>
+<a:theme xmlns:a="http://schemas.openxmlformats.org/drawingml/2006/main" xmlns:r="http://schemas.openxmlformats.org/officeDocument/2006/relationships" name="Office Theme">
+  <a:themeElements>
+    <a:clrScheme name="Office">
+      <a:dk1>
+        <a:srgbClr val="000000"/>
+      </a:dk1>
+      <a:lt1>
+        <a:srgbClr val="FFFFFF"/>
+      </a:lt1>
+      <a:dk2>
+        <a:srgbClr val="44546A"/>
+      </a:dk2>
+      <a:lt2>
+        <a:srgbClr val="E7E6E6"/>
+      </a:lt2>
+      <a:accent1>
+        <a:srgbClr val="4472C4"/>
+      </a:accent1>
+      <a:accent2>
+        <a:srgbClr val="ED7D31"/>
+      </a:accent2>
+      <a:accent3>
+        <a:srgbClr val="A5A5A5"/>
+      </a:accent3>
+      <a:accent4>
+        <a:srgbClr val="FFC000"/>
+      </a:accent4>
+      <a:accent5>
+        <a:srgbClr val="5B9BD5"/>
+      </a:accent5>
+      <a:accent6>
+        <a:srgbClr val="70AD47"/>
+      </a:accent6>
+      <a:hlink>
+        <a:srgbClr val="0563C1"/>
+      </a:hlink>
+      <a:folHlink>
+        <a:srgbClr val="954F72"/>
+      </a:folHlink>
+    </a:clrScheme>
+    <a:fontScheme name="Office">
+      <a:majorFont>
+        <a:latin typeface="Arial"/>
+        <a:ea typeface=""/>
+        <a:cs typeface=""/>
+        <a:font script="Jpan" typeface="ＭＳ Ｐゴシック"/>
+        <a:font script="Hang" typeface="맑은 고딕"/>
+        <a:font script="Hans" typeface="宋体"/>
+        <a:font script="Hant" typeface="新細明體"/>
+        <a:font script="Arab" typeface="Times New Roman"/>
+        <a:font script="Hebr" typeface="Times New Roman"/>
+        <a:font script="Thai" typeface="Angsana New"/>
+        <a:font script="Ethi" typeface="Nyala"/>
+        <a:font script="Beng" typeface="Vrinda"/>
+        <a:font script="Gujr" typeface="Shruti"/>
+        <a:font script="Khmr" typeface="MoolBoran"/>
+        <a:font script="Knda" typeface="Tunga"/>
+        <a:font script="Guru" typeface="Raavi"/>
+        <a:font script="Cans" typeface="Euphemia"/>
+        <a:font script="Cher" typeface="Plantagenet Cherokee"/>
+        <a:font script="Yiii" typeface="Microsoft Yi Baiti"/>
+        <a:font script="Tibt" typeface="Microsoft Himalaya"/>
+        <a:font script="Thaa" typeface="MV Boli"/>
+        <a:font script="Deva" typeface="Mangal"/>
+        <a:font script="Telu" typeface="Gautami"/>
+        <a:font script="Taml" typeface="Latha"/>
+        <a:font script="Syrc" typeface="Estrangelo Edessa"/>
+        <a:font script="Orya" typeface="Kalinga"/>
+        <a:font script="Mlym" typeface="Kartika"/>
+        <a:font script="Laoo" typeface="DokChampa"/>
+        <a:font script="Sinh" typeface="Iskoola Pota"/>
+        <a:font script="Mong" typeface="Mongolian Baiti"/>
+        <a:font script="Viet" typeface="Times New Roman"/>
+        <a:font script="Uigh" typeface="Microsoft Uighur"/>
+        <a:font script="Geor" typeface="Sylfaen"/>
+      </a:majorFont>
+      <a:minorFont>
+        <a:latin typeface="Arial"/>
+        <a:ea typeface=""/>
+        <a:cs typeface=""/>
+        <a:font script="Jpan" typeface="ＭＳ Ｐゴシック"/>
+        <a:font script="Hang" typeface="맑은 고딕"/>
+        <a:font script="Hans" typeface="宋体"/>
+        <a:font script="Hant" typeface="新細明體"/>
+        <a:font script="Arab" typeface="Arial"/>
+        <a:font script="Hebr" typeface="Arial"/>
+        <a:font script="Thai" typeface="Cordia New"/>
+        <a:font script="Ethi" typeface="Nyala"/>
+        <a:font script="Beng" typeface="Vrinda"/>
+        <a:font script="Gujr" typeface="Shruti"/>
+        <a:font script="Khmr" typeface="DaunPenh"/>
+        <a:font script="Knda" typeface="Tunga"/>
+        <a:font script="Guru" typeface="Raavi"/>
+        <a:font script="Cans" typeface="Euphemia"/>
+        <a:font script="Cher" typeface="Plantagenet Cherokee"/>
+        <a:font script="Yiii" typeface="Microsoft Yi Baiti"/>
+        <a:font script="Tibt" typeface="Microsoft Himalaya"/>
+        <a:font script="Thaa" typeface="MV Boli"/>
+        <a:font script="Deva" typeface="Mangal"/>
+        <a:font script="Telu" typeface="Gautami"/>
+        <a:font script="Taml" typeface="Latha"/>
+        <a:font script="Syrc" typeface="Estrangelo Edessa"/>
+        <a:font script="Orya" typeface="Kalinga"/>
+        <a:font script="Mlym" typeface="Kartika"/>
+        <a:font script="Laoo" typeface="DokChampa"/>
+        <a:font script="Sinh" typeface="Iskoola Pota"/>
+        <a:font script="Mong" typeface="Mongolian Baiti"/>
+        <a:font script="Viet" typeface="Arial"/>
+        <a:font script="Uigh" typeface="Microsoft Uighur"/>
+        <a:font script="Geor" typeface="Sylfaen"/>
+      </a:minorFont>
+    </a:fontScheme>
+    <a:fmtScheme name="Office">
+      <a:fillStyleLst>
+        <a:solidFill>
+          <a:schemeClr val="phClr"/>
+        </a:solidFill>
+        <a:gradFill rotWithShape="1">
+          <a:gsLst>
+            <a:gs pos="0">
+              <a:schemeClr val="phClr">
+                <a:tint val="50000"/>
+                <a:satMod val="300000"/>
+              </a:schemeClr>
+            </a:gs>
+            <a:gs pos="35000">
+              <a:schemeClr val="phClr">
+                <a:tint val="37000"/>
+                <a:satMod val="300000"/>
+              </a:schemeClr>
+            </a:gs>
+            <a:gs pos="100000">
+              <a:schemeClr val="phClr">
+                <a:tint val="15000"/>
+                <a:satMod val="350000"/>
+              </a:schemeClr>
+            </a:gs>
+          </a:gsLst>
+          <a:lin ang="16200000" scaled="1"/>
+        </a:gradFill>
+        <a:gradFill rotWithShape="1">
+          <a:gsLst>
+            <a:gs pos="0">
+              <a:schemeClr val="phClr">
+                <a:tint val="100000"/>
+                <a:shade val="100000"/>
+                <a:satMod val="130000"/>
+              </a:schemeClr>
+            </a:gs>
+            <a:gs pos="100000">
+              <a:schemeClr val="phClr">
+                <a:tint val="50000"/>
+                <a:shade val="100000"/>
+                <a:satMod val="350000"/>
+              </a:schemeClr>
+            </a:gs>
+          </a:gsLst>
+          <a:lin ang="16200000" scaled="0"/>
+        </a:gradFill>
+      </a:fillStyleLst>
+      <a:lnStyleLst>
+        <a:ln w="9525" cap="flat" cmpd="sng" algn="ctr">
+          <a:solidFill>
+            <a:schemeClr val="phClr">
+              <a:shade val="95000"/>
+              <a:satMod val="105000"/>
+            </a:schemeClr>
+          </a:solidFill>
+          <a:prstDash val="solid"/>
+        </a:ln>
+        <a:ln w="25400" cap="flat" cmpd="sng" algn="ctr">
+          <a:solidFill>
+            <a:schemeClr val="phClr"/>
+          </a:solidFill>
+          <a:prstDash val="solid"/>
+        </a:ln>
+        <a:ln w="38100" cap="flat" cmpd="sng" algn="ctr">
+          <a:solidFill>
+            <a:schemeClr val="phClr"/>
+          </a:solidFill>
+          <a:prstDash val="solid"/>
+        </a:ln>
+      </a:lnStyleLst>
+      <a:effectStyleLst>
+        <a:effectStyle>
+          <a:effectLst>
+            <a:outerShdw blurRad="40000" dist="20000" dir="5400000" rotWithShape="0">
+              <a:srgbClr val="000000">
+                <a:alpha val="38000"/>
+              </a:srgbClr>
+            </a:outerShdw>
+          </a:effectLst>
+        </a:effectStyle>
+        <a:effectStyle>
+          <a:effectLst>
+            <a:outerShdw blurRad="40000" dist="23000" dir="5400000" rotWithShape="0">
+              <a:srgbClr val="000000">
+                <a:alpha val="35000"/>
+              </a:srgbClr>
+            </a:outerShdw>
+          </a:effectLst>
+        </a:effectStyle>
+        <a:effectStyle>
+          <a:effectLst>
+            <a:outerShdw blurRad="40000" dist="23000" dir="5400000" rotWithShape="0">
+              <a:srgbClr val="000000">
+                <a:alpha val="35000"/>
+              </a:srgbClr>
+            </a:outerShdw>
+          </a:effectLst>
+          <a:scene3d>
+            <a:camera prst="orthographicFront">
+              <a:rot lat="0" lon="0" rev="0"/>
+            </a:camera>
+            <a:lightRig rig="threePt" dir="t">
+              <a:rot lat="0" lon="0" rev="1200000"/>
+            </a:lightRig>
+          </a:scene3d>
+          <a:sp3d>
+            <a:bevelT w="63500" h="25400"/>
+          </a:sp3d>
+        </a:effectStyle>
+      </a:effectStyleLst>
+      <a:bgFillStyleLst>
+        <a:solidFill>
+          <a:schemeClr val="phClr"/>
+        </a:solidFill>
+        <a:gradFill rotWithShape="1">
+          <a:gsLst>
+            <a:gs pos="0">
+              <a:schemeClr val="phClr">
+                <a:tint val="40000"/>
+                <a:satMod val="350000"/>
+              </a:schemeClr>
+            </a:gs>
+            <a:gs pos="40000">
+              <a:schemeClr val="phClr">
+                <a:tint val="45000"/>
+                <a:shade val="99000"/>
+                <a:satMod val="350000"/>
+              </a:schemeClr>
+            </a:gs>
+            <a:gs pos="100000">
+              <a:schemeClr val="phClr">
+                <a:shade val="20000"/>
+                <a:satMod val="255000"/>
+              </a:schemeClr>
+            </a:gs>
+          </a:gsLst>
+          <a:path path="circle">
+            <a:fillToRect l="50000" t="-80000" r="50000" b="180000"/>
+          </a:path>
+        </a:gradFill>
+        <a:gradFill rotWithShape="1">
+          <a:gsLst>
+            <a:gs pos="0">
+              <a:schemeClr val="phClr">
+                <a:tint val="80000"/>
+                <a:satMod val="300000"/>
+              </a:schemeClr>
+            </a:gs>
+            <a:gs pos="100000">
+              <a:schemeClr val="phClr">
+                <a:shade val="30000"/>
+                <a:satMod val="200000"/>
+              </a:schemeClr>
+            </a:gs>
+          </a:gsLst>
+          <a:path path="circle">
+            <a:fillToRect l="50000" t="50000" r="50000" b="50000"/>
+          </a:path>
+        </a:gradFill>
+      </a:bgFillStyleLst>
+    </a:fmtScheme>
+  </a:themeElements>
+</a:theme>
+</file>
+
+<file path=ppt/theme/theme2.xml><?xml version="1.0" encoding="utf-8"?>
 <a:theme xmlns:a="http://schemas.openxmlformats.org/drawingml/2006/main" xmlns:r="http://schemas.openxmlformats.org/officeDocument/2006/relationships" name="Simple Light">
   <a:themeElements>
     <a:clrScheme name="Simple Light">
@@ -25250,7 +26412,7 @@
 </a:theme>
 </file>
 
-<file path=ppt/theme/theme2.xml><?xml version="1.0" encoding="utf-8"?>
+<file path=ppt/theme/theme3.xml><?xml version="1.0" encoding="utf-8"?>
 <a:theme xmlns:a="http://schemas.openxmlformats.org/drawingml/2006/main" xmlns:r="http://schemas.openxmlformats.org/officeDocument/2006/relationships" name="Office Theme">
   <a:themeElements>
     <a:clrScheme name="Office">
@@ -25285,10 +26447,10 @@
         <a:srgbClr val="70AD47"/>
       </a:accent6>
       <a:hlink>
-        <a:srgbClr val="0563C1"/>
+        <a:srgbClr val="2D5BFF"/>
       </a:hlink>
       <a:folHlink>
-        <a:srgbClr val="954F72"/>
+        <a:srgbClr val="2D5BFF"/>
       </a:folHlink>
     </a:clrScheme>
     <a:fontScheme name="Office">
